--- a/pitch-deck/VoltPlan-pitch.pptx
+++ b/pitch-deck/VoltPlan-pitch.pptx
@@ -15,9 +15,11 @@
     <p:sldId id="263" r:id="rId9"/>
     <p:sldId id="264" r:id="rId10"/>
     <p:sldId id="265" r:id="rId11"/>
+    <p:sldId id="266" r:id="rId12"/>
+    <p:sldId id="267" r:id="rId13"/>
   </p:sldIdLst>
   <p:notesMasterIdLst>
-    <p:notesMasterId r:id="rId12"/>
+    <p:notesMasterId r:id="rId14"/>
   </p:notesMasterIdLst>
   <p:sldSz cx="12191695" cy="6858000"/>
   <p:notesSz cx="6858000" cy="12191695"/>
@@ -641,6 +643,182 @@
 </p:notes>
 </file>
 
+<file path=ppt/notesSlides/notesSlide11.xml><?xml version="1.0" encoding="utf-8"?>
+<p:notes xmlns:a="http://schemas.openxmlformats.org/drawingml/2006/main" xmlns:r="http://schemas.openxmlformats.org/officeDocument/2006/relationships" xmlns:p="http://schemas.openxmlformats.org/presentationml/2006/main">
+  <p:cSld>
+    <p:spTree>
+      <p:nvGrpSpPr>
+        <p:cNvPr id="1" name=""/>
+        <p:cNvGrpSpPr/>
+        <p:nvPr/>
+      </p:nvGrpSpPr>
+      <p:grpSpPr>
+        <a:xfrm>
+          <a:off x="0" y="0"/>
+          <a:ext cx="0" cy="0"/>
+          <a:chOff x="0" y="0"/>
+          <a:chExt cx="0" cy="0"/>
+        </a:xfrm>
+      </p:grpSpPr>
+      <p:sp>
+        <p:nvSpPr>
+          <p:cNvPr id="2" name="Slide Image Placeholder 1"/>
+          <p:cNvSpPr>
+            <a:spLocks noGrp="1" noRot="1" noChangeAspect="1"/>
+          </p:cNvSpPr>
+          <p:nvPr>
+            <p:ph type="sldImg"/>
+          </p:nvPr>
+        </p:nvSpPr>
+        <p:spPr/>
+      </p:sp>
+      <p:sp>
+        <p:nvSpPr>
+          <p:cNvPr id="3" name="Notes Placeholder 2"/>
+          <p:cNvSpPr>
+            <a:spLocks noGrp="1"/>
+          </p:cNvSpPr>
+          <p:nvPr>
+            <p:ph type="body" idx="1"/>
+          </p:nvPr>
+        </p:nvSpPr>
+        <p:spPr/>
+        <p:txBody>
+          <a:bodyPr/>
+          <a:lstStyle/>
+          <a:p>
+            <a:r>
+              <a:rPr lang="en-US" dirty="0"/>
+              <a:t/>
+            </a:r>
+            <a:endParaRPr lang="en-US" dirty="0"/>
+          </a:p>
+        </p:txBody>
+      </p:sp>
+      <p:sp>
+        <p:nvSpPr>
+          <p:cNvPr id="4" name="Slide Number Placeholder 3"/>
+          <p:cNvSpPr>
+            <a:spLocks noGrp="1"/>
+          </p:cNvSpPr>
+          <p:nvPr>
+            <p:ph type="sldNum" sz="quarter" idx="10"/>
+          </p:nvPr>
+        </p:nvSpPr>
+        <p:spPr/>
+        <p:txBody>
+          <a:bodyPr/>
+          <a:lstStyle/>
+          <a:p>
+            <a:fld id="{F7021451-1387-4CA6-816F-3879F97B5CBC}" type="slidenum">
+              <a:rPr lang="en-US"/>
+              <a:t>11</a:t>
+            </a:fld>
+            <a:endParaRPr lang="en-US"/>
+          </a:p>
+        </p:txBody>
+      </p:sp>
+    </p:spTree>
+    <p:extLst>
+      <p:ext uri="{BB962C8B-B14F-4D97-AF65-F5344CB8AC3E}">
+        <p14:creationId xmlns:p14="http://schemas.microsoft.com/office/powerpoint/2010/main" val="1024086991"/>
+      </p:ext>
+    </p:extLst>
+  </p:cSld>
+  <p:clrMapOvr>
+    <a:masterClrMapping/>
+  </p:clrMapOvr>
+</p:notes>
+</file>
+
+<file path=ppt/notesSlides/notesSlide12.xml><?xml version="1.0" encoding="utf-8"?>
+<p:notes xmlns:a="http://schemas.openxmlformats.org/drawingml/2006/main" xmlns:r="http://schemas.openxmlformats.org/officeDocument/2006/relationships" xmlns:p="http://schemas.openxmlformats.org/presentationml/2006/main">
+  <p:cSld>
+    <p:spTree>
+      <p:nvGrpSpPr>
+        <p:cNvPr id="1" name=""/>
+        <p:cNvGrpSpPr/>
+        <p:nvPr/>
+      </p:nvGrpSpPr>
+      <p:grpSpPr>
+        <a:xfrm>
+          <a:off x="0" y="0"/>
+          <a:ext cx="0" cy="0"/>
+          <a:chOff x="0" y="0"/>
+          <a:chExt cx="0" cy="0"/>
+        </a:xfrm>
+      </p:grpSpPr>
+      <p:sp>
+        <p:nvSpPr>
+          <p:cNvPr id="2" name="Slide Image Placeholder 1"/>
+          <p:cNvSpPr>
+            <a:spLocks noGrp="1" noRot="1" noChangeAspect="1"/>
+          </p:cNvSpPr>
+          <p:nvPr>
+            <p:ph type="sldImg"/>
+          </p:nvPr>
+        </p:nvSpPr>
+        <p:spPr/>
+      </p:sp>
+      <p:sp>
+        <p:nvSpPr>
+          <p:cNvPr id="3" name="Notes Placeholder 2"/>
+          <p:cNvSpPr>
+            <a:spLocks noGrp="1"/>
+          </p:cNvSpPr>
+          <p:nvPr>
+            <p:ph type="body" idx="1"/>
+          </p:nvPr>
+        </p:nvSpPr>
+        <p:spPr/>
+        <p:txBody>
+          <a:bodyPr/>
+          <a:lstStyle/>
+          <a:p>
+            <a:r>
+              <a:rPr lang="en-US" dirty="0"/>
+              <a:t/>
+            </a:r>
+            <a:endParaRPr lang="en-US" dirty="0"/>
+          </a:p>
+        </p:txBody>
+      </p:sp>
+      <p:sp>
+        <p:nvSpPr>
+          <p:cNvPr id="4" name="Slide Number Placeholder 3"/>
+          <p:cNvSpPr>
+            <a:spLocks noGrp="1"/>
+          </p:cNvSpPr>
+          <p:nvPr>
+            <p:ph type="sldNum" sz="quarter" idx="10"/>
+          </p:nvPr>
+        </p:nvSpPr>
+        <p:spPr/>
+        <p:txBody>
+          <a:bodyPr/>
+          <a:lstStyle/>
+          <a:p>
+            <a:fld id="{F7021451-1387-4CA6-816F-3879F97B5CBC}" type="slidenum">
+              <a:rPr lang="en-US"/>
+              <a:t>12</a:t>
+            </a:fld>
+            <a:endParaRPr lang="en-US"/>
+          </a:p>
+        </p:txBody>
+      </p:sp>
+    </p:spTree>
+    <p:extLst>
+      <p:ext uri="{BB962C8B-B14F-4D97-AF65-F5344CB8AC3E}">
+        <p14:creationId xmlns:p14="http://schemas.microsoft.com/office/powerpoint/2010/main" val="1024086991"/>
+      </p:ext>
+    </p:extLst>
+  </p:cSld>
+  <p:clrMapOvr>
+    <a:masterClrMapping/>
+  </p:clrMapOvr>
+</p:notes>
+</file>
+
 <file path=ppt/notesSlides/notesSlide2.xml><?xml version="1.0" encoding="utf-8"?>
 <p:notes xmlns:a="http://schemas.openxmlformats.org/drawingml/2006/main" xmlns:r="http://schemas.openxmlformats.org/officeDocument/2006/relationships" xmlns:p="http://schemas.openxmlformats.org/presentationml/2006/main">
   <p:cSld>
@@ -2031,6 +2209,2331 @@
     <p:bg>
       <p:bgPr>
         <a:solidFill>
+          <a:srgbClr val="F3F6F9"/>
+        </a:solidFill>
+      </p:bgPr>
+    </p:bg>
+    <p:spTree>
+      <p:nvGrpSpPr>
+        <p:cNvPr id="1" name=""/>
+        <p:cNvGrpSpPr/>
+        <p:nvPr/>
+      </p:nvGrpSpPr>
+      <p:grpSpPr>
+        <a:xfrm>
+          <a:off x="0" y="0"/>
+          <a:ext cx="0" cy="0"/>
+          <a:chOff x="0" y="0"/>
+          <a:chExt cx="0" cy="0"/>
+        </a:xfrm>
+      </p:grpSpPr>
+      <p:sp>
+        <p:nvSpPr>
+          <p:cNvPr id="2" name="Text 0"/>
+          <p:cNvSpPr/>
+          <p:nvPr/>
+        </p:nvSpPr>
+        <p:spPr>
+          <a:xfrm>
+            <a:off x="640080" y="502920"/>
+            <a:ext cx="10058400" cy="274320"/>
+          </a:xfrm>
+          <a:prstGeom prst="rect">
+            <a:avLst/>
+          </a:prstGeom>
+          <a:noFill/>
+          <a:ln/>
+        </p:spPr>
+        <p:txBody>
+          <a:bodyPr wrap="square" lIns="0" tIns="0" rIns="0" bIns="0" rtlCol="0" anchor="ctr"/>
+          <a:lstStyle/>
+          <a:p>
+            <a:pPr algn="l" indent="0" marL="0">
+              <a:buNone/>
+            </a:pPr>
+            <a:r>
+              <a:rPr lang="en-US" sz="1200" b="1" spc="300" kern="0" dirty="0">
+                <a:solidFill>
+                  <a:srgbClr val="19C37D"/>
+                </a:solidFill>
+                <a:latin typeface="Calibri" pitchFamily="34" charset="0"/>
+                <a:ea typeface="Calibri" pitchFamily="34" charset="-122"/>
+                <a:cs typeface="Calibri" pitchFamily="34" charset="-120"/>
+              </a:rPr>
+              <a:t>ETIKA &amp; ODPOVĚDNOST</a:t>
+            </a:r>
+            <a:endParaRPr lang="en-US" sz="1200" dirty="0"/>
+          </a:p>
+        </p:txBody>
+      </p:sp>
+      <p:sp>
+        <p:nvSpPr>
+          <p:cNvPr id="3" name="Text 1"/>
+          <p:cNvSpPr/>
+          <p:nvPr/>
+        </p:nvSpPr>
+        <p:spPr>
+          <a:xfrm>
+            <a:off x="640080" y="795528"/>
+            <a:ext cx="8686800" cy="1005840"/>
+          </a:xfrm>
+          <a:prstGeom prst="rect">
+            <a:avLst/>
+          </a:prstGeom>
+          <a:noFill/>
+          <a:ln/>
+        </p:spPr>
+        <p:txBody>
+          <a:bodyPr wrap="square" lIns="0" tIns="0" rIns="0" bIns="0" rtlCol="0" anchor="t"/>
+          <a:lstStyle/>
+          <a:p>
+            <a:pPr algn="l" indent="0" marL="0">
+              <a:lnSpc>
+                <a:spcPct val="102000"/>
+              </a:lnSpc>
+              <a:buNone/>
+            </a:pPr>
+            <a:r>
+              <a:rPr lang="en-US" sz="3100" b="1" dirty="0">
+                <a:solidFill>
+                  <a:srgbClr val="0E1726"/>
+                </a:solidFill>
+                <a:latin typeface="Georgia" pitchFamily="34" charset="0"/>
+                <a:ea typeface="Georgia" pitchFamily="34" charset="-122"/>
+                <a:cs typeface="Georgia" pitchFamily="34" charset="-120"/>
+              </a:rPr>
+              <a:t>Čtyři rizika, která bereme vážně</a:t>
+            </a:r>
+            <a:endParaRPr lang="en-US" sz="3100" dirty="0"/>
+          </a:p>
+          <a:p>
+            <a:pPr algn="l" indent="0" marL="0">
+              <a:lnSpc>
+                <a:spcPct val="102000"/>
+              </a:lnSpc>
+              <a:buNone/>
+            </a:pPr>
+            <a:r>
+              <a:rPr lang="en-US" sz="3100" b="1" dirty="0">
+                <a:solidFill>
+                  <a:srgbClr val="0E1726"/>
+                </a:solidFill>
+                <a:latin typeface="Georgia" pitchFamily="34" charset="0"/>
+                <a:ea typeface="Georgia" pitchFamily="34" charset="-122"/>
+                <a:cs typeface="Georgia" pitchFamily="34" charset="-120"/>
+              </a:rPr>
+              <a:t>— ne dodatek, ale součást návrhu.</a:t>
+            </a:r>
+            <a:endParaRPr lang="en-US" sz="3100" dirty="0"/>
+          </a:p>
+        </p:txBody>
+      </p:sp>
+      <p:sp>
+        <p:nvSpPr>
+          <p:cNvPr id="4" name="Shape 2"/>
+          <p:cNvSpPr/>
+          <p:nvPr/>
+        </p:nvSpPr>
+        <p:spPr>
+          <a:xfrm>
+            <a:off x="640080" y="2606040"/>
+            <a:ext cx="5349240" cy="1417320"/>
+          </a:xfrm>
+          <a:prstGeom prst="rect">
+            <a:avLst/>
+          </a:prstGeom>
+          <a:solidFill>
+            <a:srgbClr val="FFFFFF"/>
+          </a:solidFill>
+          <a:ln w="12700">
+            <a:solidFill>
+              <a:srgbClr val="E1E8EF"/>
+            </a:solidFill>
+            <a:prstDash val="solid"/>
+          </a:ln>
+          <a:effectLst>
+            <a:outerShdw sx="100000" sy="100000" kx="0" ky="0" algn="bl" rotWithShape="0" blurRad="76200" dist="25400" dir="5400000">
+              <a:srgbClr val="0E1726">
+                <a:alpha val="10000"/>
+              </a:srgbClr>
+            </a:outerShdw>
+          </a:effectLst>
+        </p:spPr>
+      </p:sp>
+      <p:sp>
+        <p:nvSpPr>
+          <p:cNvPr id="5" name="Shape 3"/>
+          <p:cNvSpPr/>
+          <p:nvPr/>
+        </p:nvSpPr>
+        <p:spPr>
+          <a:xfrm>
+            <a:off x="640080" y="2606040"/>
+            <a:ext cx="91440" cy="1417320"/>
+          </a:xfrm>
+          <a:prstGeom prst="rect">
+            <a:avLst/>
+          </a:prstGeom>
+          <a:solidFill>
+            <a:srgbClr val="19C37D"/>
+          </a:solidFill>
+          <a:ln/>
+        </p:spPr>
+      </p:sp>
+      <p:sp>
+        <p:nvSpPr>
+          <p:cNvPr id="6" name="Shape 4"/>
+          <p:cNvSpPr/>
+          <p:nvPr/>
+        </p:nvSpPr>
+        <p:spPr>
+          <a:xfrm>
+            <a:off x="914400" y="2898648"/>
+            <a:ext cx="713232" cy="713232"/>
+          </a:xfrm>
+          <a:prstGeom prst="roundRect">
+            <a:avLst>
+              <a:gd name="adj" fmla="val 22000"/>
+            </a:avLst>
+          </a:prstGeom>
+          <a:solidFill>
+            <a:srgbClr val="0E1726"/>
+          </a:solidFill>
+          <a:ln/>
+        </p:spPr>
+      </p:sp>
+      <p:pic>
+        <p:nvPicPr>
+          <p:cNvPr id="7" name="Image 0" descr="preencoded.png">    </p:cNvPr>
+          <p:cNvPicPr>
+            <a:picLocks noChangeAspect="1"/>
+          </p:cNvPicPr>
+          <p:nvPr/>
+        </p:nvPicPr>
+        <p:blipFill>
+          <a:blip r:embed="rId1"/>
+          <a:stretch>
+            <a:fillRect/>
+          </a:stretch>
+        </p:blipFill>
+        <p:spPr>
+          <a:xfrm>
+            <a:off x="1099840" y="3084088"/>
+            <a:ext cx="342351" cy="342351"/>
+          </a:xfrm>
+          <a:prstGeom prst="rect">
+            <a:avLst/>
+          </a:prstGeom>
+        </p:spPr>
+      </p:pic>
+      <p:sp>
+        <p:nvSpPr>
+          <p:cNvPr id="8" name="Text 5"/>
+          <p:cNvSpPr/>
+          <p:nvPr/>
+        </p:nvSpPr>
+        <p:spPr>
+          <a:xfrm>
+            <a:off x="1847088" y="2825496"/>
+            <a:ext cx="3886200" cy="384048"/>
+          </a:xfrm>
+          <a:prstGeom prst="rect">
+            <a:avLst/>
+          </a:prstGeom>
+          <a:noFill/>
+          <a:ln/>
+        </p:spPr>
+        <p:txBody>
+          <a:bodyPr wrap="square" lIns="0" tIns="0" rIns="0" bIns="0" rtlCol="0" anchor="ctr"/>
+          <a:lstStyle/>
+          <a:p>
+            <a:pPr indent="0" marL="0">
+              <a:buNone/>
+            </a:pPr>
+            <a:r>
+              <a:rPr lang="en-US" sz="1550" b="1" dirty="0">
+                <a:solidFill>
+                  <a:srgbClr val="0E1726"/>
+                </a:solidFill>
+                <a:latin typeface="Georgia" pitchFamily="34" charset="0"/>
+                <a:ea typeface="Georgia" pitchFamily="34" charset="-122"/>
+                <a:cs typeface="Georgia" pitchFamily="34" charset="-120"/>
+              </a:rPr>
+              <a:t>Chybná predikce &amp; odpovědnost</a:t>
+            </a:r>
+            <a:endParaRPr lang="en-US" sz="1550" dirty="0"/>
+          </a:p>
+        </p:txBody>
+      </p:sp>
+      <p:sp>
+        <p:nvSpPr>
+          <p:cNvPr id="9" name="Text 6"/>
+          <p:cNvSpPr/>
+          <p:nvPr/>
+        </p:nvSpPr>
+        <p:spPr>
+          <a:xfrm>
+            <a:off x="1847088" y="3227832"/>
+            <a:ext cx="3931920" cy="731520"/>
+          </a:xfrm>
+          <a:prstGeom prst="rect">
+            <a:avLst/>
+          </a:prstGeom>
+          <a:noFill/>
+          <a:ln/>
+        </p:spPr>
+        <p:txBody>
+          <a:bodyPr wrap="square" lIns="0" tIns="0" rIns="0" bIns="0" rtlCol="0" anchor="t"/>
+          <a:lstStyle/>
+          <a:p>
+            <a:pPr indent="0" marL="0">
+              <a:lnSpc>
+                <a:spcPct val="106000"/>
+              </a:lnSpc>
+              <a:buNone/>
+            </a:pPr>
+            <a:r>
+              <a:rPr lang="en-US" sz="1150" dirty="0">
+                <a:solidFill>
+                  <a:srgbClr val="55626F"/>
+                </a:solidFill>
+                <a:latin typeface="Calibri" pitchFamily="34" charset="0"/>
+                <a:ea typeface="Calibri" pitchFamily="34" charset="-122"/>
+                <a:cs typeface="Calibri" pitchFamily="34" charset="-120"/>
+              </a:rPr>
+              <a:t>Model je podpora rozhodnutí, ne autopilot. Doporučení = vstup pro úředníka, finální slovo má člověk.</a:t>
+            </a:r>
+            <a:endParaRPr lang="en-US" sz="1150" dirty="0"/>
+          </a:p>
+        </p:txBody>
+      </p:sp>
+      <p:sp>
+        <p:nvSpPr>
+          <p:cNvPr id="10" name="Shape 7"/>
+          <p:cNvSpPr/>
+          <p:nvPr/>
+        </p:nvSpPr>
+        <p:spPr>
+          <a:xfrm>
+            <a:off x="6172200" y="2606040"/>
+            <a:ext cx="5349240" cy="1417320"/>
+          </a:xfrm>
+          <a:prstGeom prst="rect">
+            <a:avLst/>
+          </a:prstGeom>
+          <a:solidFill>
+            <a:srgbClr val="FFFFFF"/>
+          </a:solidFill>
+          <a:ln w="12700">
+            <a:solidFill>
+              <a:srgbClr val="E1E8EF"/>
+            </a:solidFill>
+            <a:prstDash val="solid"/>
+          </a:ln>
+          <a:effectLst>
+            <a:outerShdw sx="100000" sy="100000" kx="0" ky="0" algn="bl" rotWithShape="0" blurRad="76200" dist="25400" dir="5400000">
+              <a:srgbClr val="0E1726">
+                <a:alpha val="10000"/>
+              </a:srgbClr>
+            </a:outerShdw>
+          </a:effectLst>
+        </p:spPr>
+      </p:sp>
+      <p:sp>
+        <p:nvSpPr>
+          <p:cNvPr id="11" name="Shape 8"/>
+          <p:cNvSpPr/>
+          <p:nvPr/>
+        </p:nvSpPr>
+        <p:spPr>
+          <a:xfrm>
+            <a:off x="6172200" y="2606040"/>
+            <a:ext cx="91440" cy="1417320"/>
+          </a:xfrm>
+          <a:prstGeom prst="rect">
+            <a:avLst/>
+          </a:prstGeom>
+          <a:solidFill>
+            <a:srgbClr val="19C37D"/>
+          </a:solidFill>
+          <a:ln/>
+        </p:spPr>
+      </p:sp>
+      <p:sp>
+        <p:nvSpPr>
+          <p:cNvPr id="12" name="Shape 9"/>
+          <p:cNvSpPr/>
+          <p:nvPr/>
+        </p:nvSpPr>
+        <p:spPr>
+          <a:xfrm>
+            <a:off x="6446520" y="2898648"/>
+            <a:ext cx="713232" cy="713232"/>
+          </a:xfrm>
+          <a:prstGeom prst="roundRect">
+            <a:avLst>
+              <a:gd name="adj" fmla="val 22000"/>
+            </a:avLst>
+          </a:prstGeom>
+          <a:solidFill>
+            <a:srgbClr val="0E1726"/>
+          </a:solidFill>
+          <a:ln/>
+        </p:spPr>
+      </p:sp>
+      <p:pic>
+        <p:nvPicPr>
+          <p:cNvPr id="13" name="Image 1" descr="preencoded.png">    </p:cNvPr>
+          <p:cNvPicPr>
+            <a:picLocks noChangeAspect="1"/>
+          </p:cNvPicPr>
+          <p:nvPr/>
+        </p:nvPicPr>
+        <p:blipFill>
+          <a:blip r:embed="rId2"/>
+          <a:stretch>
+            <a:fillRect/>
+          </a:stretch>
+        </p:blipFill>
+        <p:spPr>
+          <a:xfrm>
+            <a:off x="6631960" y="3084088"/>
+            <a:ext cx="342351" cy="342351"/>
+          </a:xfrm>
+          <a:prstGeom prst="rect">
+            <a:avLst/>
+          </a:prstGeom>
+        </p:spPr>
+      </p:pic>
+      <p:sp>
+        <p:nvSpPr>
+          <p:cNvPr id="14" name="Text 10"/>
+          <p:cNvSpPr/>
+          <p:nvPr/>
+        </p:nvSpPr>
+        <p:spPr>
+          <a:xfrm>
+            <a:off x="7379208" y="2825496"/>
+            <a:ext cx="3886200" cy="384048"/>
+          </a:xfrm>
+          <a:prstGeom prst="rect">
+            <a:avLst/>
+          </a:prstGeom>
+          <a:noFill/>
+          <a:ln/>
+        </p:spPr>
+        <p:txBody>
+          <a:bodyPr wrap="square" lIns="0" tIns="0" rIns="0" bIns="0" rtlCol="0" anchor="ctr"/>
+          <a:lstStyle/>
+          <a:p>
+            <a:pPr indent="0" marL="0">
+              <a:buNone/>
+            </a:pPr>
+            <a:r>
+              <a:rPr lang="en-US" sz="1550" b="1" dirty="0">
+                <a:solidFill>
+                  <a:srgbClr val="0E1726"/>
+                </a:solidFill>
+                <a:latin typeface="Georgia" pitchFamily="34" charset="0"/>
+                <a:ea typeface="Georgia" pitchFamily="34" charset="-122"/>
+                <a:cs typeface="Georgia" pitchFamily="34" charset="-120"/>
+              </a:rPr>
+              <a:t>Soukromí</a:t>
+            </a:r>
+            <a:endParaRPr lang="en-US" sz="1550" dirty="0"/>
+          </a:p>
+        </p:txBody>
+      </p:sp>
+      <p:sp>
+        <p:nvSpPr>
+          <p:cNvPr id="15" name="Text 11"/>
+          <p:cNvSpPr/>
+          <p:nvPr/>
+        </p:nvSpPr>
+        <p:spPr>
+          <a:xfrm>
+            <a:off x="7379208" y="3227832"/>
+            <a:ext cx="3931920" cy="731520"/>
+          </a:xfrm>
+          <a:prstGeom prst="rect">
+            <a:avLst/>
+          </a:prstGeom>
+          <a:noFill/>
+          <a:ln/>
+        </p:spPr>
+        <p:txBody>
+          <a:bodyPr wrap="square" lIns="0" tIns="0" rIns="0" bIns="0" rtlCol="0" anchor="t"/>
+          <a:lstStyle/>
+          <a:p>
+            <a:pPr indent="0" marL="0">
+              <a:lnSpc>
+                <a:spcPct val="106000"/>
+              </a:lnSpc>
+              <a:buNone/>
+            </a:pPr>
+            <a:r>
+              <a:rPr lang="en-US" sz="1150" dirty="0">
+                <a:solidFill>
+                  <a:srgbClr val="55626F"/>
+                </a:solidFill>
+                <a:latin typeface="Calibri" pitchFamily="34" charset="0"/>
+                <a:ea typeface="Calibri" pitchFamily="34" charset="-122"/>
+                <a:cs typeface="Calibri" pitchFamily="34" charset="-120"/>
+              </a:rPr>
+              <a:t>Pracujeme s agregovanými daty na úrovni zón a sítě — žádné sledování pohybu jednotlivců.</a:t>
+            </a:r>
+            <a:endParaRPr lang="en-US" sz="1150" dirty="0"/>
+          </a:p>
+        </p:txBody>
+      </p:sp>
+      <p:sp>
+        <p:nvSpPr>
+          <p:cNvPr id="16" name="Shape 12"/>
+          <p:cNvSpPr/>
+          <p:nvPr/>
+        </p:nvSpPr>
+        <p:spPr>
+          <a:xfrm>
+            <a:off x="640080" y="4206240"/>
+            <a:ext cx="5349240" cy="1417320"/>
+          </a:xfrm>
+          <a:prstGeom prst="rect">
+            <a:avLst/>
+          </a:prstGeom>
+          <a:solidFill>
+            <a:srgbClr val="FFFFFF"/>
+          </a:solidFill>
+          <a:ln w="12700">
+            <a:solidFill>
+              <a:srgbClr val="E1E8EF"/>
+            </a:solidFill>
+            <a:prstDash val="solid"/>
+          </a:ln>
+          <a:effectLst>
+            <a:outerShdw sx="100000" sy="100000" kx="0" ky="0" algn="bl" rotWithShape="0" blurRad="76200" dist="25400" dir="5400000">
+              <a:srgbClr val="0E1726">
+                <a:alpha val="10000"/>
+              </a:srgbClr>
+            </a:outerShdw>
+          </a:effectLst>
+        </p:spPr>
+      </p:sp>
+      <p:sp>
+        <p:nvSpPr>
+          <p:cNvPr id="17" name="Shape 13"/>
+          <p:cNvSpPr/>
+          <p:nvPr/>
+        </p:nvSpPr>
+        <p:spPr>
+          <a:xfrm>
+            <a:off x="640080" y="4206240"/>
+            <a:ext cx="91440" cy="1417320"/>
+          </a:xfrm>
+          <a:prstGeom prst="rect">
+            <a:avLst/>
+          </a:prstGeom>
+          <a:solidFill>
+            <a:srgbClr val="19C37D"/>
+          </a:solidFill>
+          <a:ln/>
+        </p:spPr>
+      </p:sp>
+      <p:sp>
+        <p:nvSpPr>
+          <p:cNvPr id="18" name="Shape 14"/>
+          <p:cNvSpPr/>
+          <p:nvPr/>
+        </p:nvSpPr>
+        <p:spPr>
+          <a:xfrm>
+            <a:off x="914400" y="4498848"/>
+            <a:ext cx="713232" cy="713232"/>
+          </a:xfrm>
+          <a:prstGeom prst="roundRect">
+            <a:avLst>
+              <a:gd name="adj" fmla="val 22000"/>
+            </a:avLst>
+          </a:prstGeom>
+          <a:solidFill>
+            <a:srgbClr val="0E1726"/>
+          </a:solidFill>
+          <a:ln/>
+        </p:spPr>
+      </p:sp>
+      <p:pic>
+        <p:nvPicPr>
+          <p:cNvPr id="19" name="Image 2" descr="preencoded.png">    </p:cNvPr>
+          <p:cNvPicPr>
+            <a:picLocks noChangeAspect="1"/>
+          </p:cNvPicPr>
+          <p:nvPr/>
+        </p:nvPicPr>
+        <p:blipFill>
+          <a:blip r:embed="rId3"/>
+          <a:stretch>
+            <a:fillRect/>
+          </a:stretch>
+        </p:blipFill>
+        <p:spPr>
+          <a:xfrm>
+            <a:off x="1099840" y="4684288"/>
+            <a:ext cx="342351" cy="342351"/>
+          </a:xfrm>
+          <a:prstGeom prst="rect">
+            <a:avLst/>
+          </a:prstGeom>
+        </p:spPr>
+      </p:pic>
+      <p:sp>
+        <p:nvSpPr>
+          <p:cNvPr id="20" name="Text 15"/>
+          <p:cNvSpPr/>
+          <p:nvPr/>
+        </p:nvSpPr>
+        <p:spPr>
+          <a:xfrm>
+            <a:off x="1847088" y="4425696"/>
+            <a:ext cx="3886200" cy="384048"/>
+          </a:xfrm>
+          <a:prstGeom prst="rect">
+            <a:avLst/>
+          </a:prstGeom>
+          <a:noFill/>
+          <a:ln/>
+        </p:spPr>
+        <p:txBody>
+          <a:bodyPr wrap="square" lIns="0" tIns="0" rIns="0" bIns="0" rtlCol="0" anchor="ctr"/>
+          <a:lstStyle/>
+          <a:p>
+            <a:pPr indent="0" marL="0">
+              <a:buNone/>
+            </a:pPr>
+            <a:r>
+              <a:rPr lang="en-US" sz="1550" b="1" dirty="0">
+                <a:solidFill>
+                  <a:srgbClr val="0E1726"/>
+                </a:solidFill>
+                <a:latin typeface="Georgia" pitchFamily="34" charset="0"/>
+                <a:ea typeface="Georgia" pitchFamily="34" charset="-122"/>
+                <a:cs typeface="Georgia" pitchFamily="34" charset="-120"/>
+              </a:rPr>
+              <a:t>Spravedlnost &amp; cold-start</a:t>
+            </a:r>
+            <a:endParaRPr lang="en-US" sz="1550" dirty="0"/>
+          </a:p>
+        </p:txBody>
+      </p:sp>
+      <p:sp>
+        <p:nvSpPr>
+          <p:cNvPr id="21" name="Text 16"/>
+          <p:cNvSpPr/>
+          <p:nvPr/>
+        </p:nvSpPr>
+        <p:spPr>
+          <a:xfrm>
+            <a:off x="1847088" y="4828032"/>
+            <a:ext cx="3931920" cy="731520"/>
+          </a:xfrm>
+          <a:prstGeom prst="rect">
+            <a:avLst/>
+          </a:prstGeom>
+          <a:noFill/>
+          <a:ln/>
+        </p:spPr>
+        <p:txBody>
+          <a:bodyPr wrap="square" lIns="0" tIns="0" rIns="0" bIns="0" rtlCol="0" anchor="t"/>
+          <a:lstStyle/>
+          <a:p>
+            <a:pPr indent="0" marL="0">
+              <a:lnSpc>
+                <a:spcPct val="106000"/>
+              </a:lnSpc>
+              <a:buNone/>
+            </a:pPr>
+            <a:r>
+              <a:rPr lang="en-US" sz="1150" dirty="0">
+                <a:solidFill>
+                  <a:srgbClr val="55626F"/>
+                </a:solidFill>
+                <a:latin typeface="Calibri" pitchFamily="34" charset="0"/>
+                <a:ea typeface="Calibri" pitchFamily="34" charset="-122"/>
+                <a:cs typeface="Calibri" pitchFamily="34" charset="-120"/>
+              </a:rPr>
+              <a:t>equity_weight chrání okrajové a chudší čtvrti před spirálou podinvestování. Férovost je přímo ve skóre.</a:t>
+            </a:r>
+            <a:endParaRPr lang="en-US" sz="1150" dirty="0"/>
+          </a:p>
+        </p:txBody>
+      </p:sp>
+      <p:sp>
+        <p:nvSpPr>
+          <p:cNvPr id="22" name="Shape 17"/>
+          <p:cNvSpPr/>
+          <p:nvPr/>
+        </p:nvSpPr>
+        <p:spPr>
+          <a:xfrm>
+            <a:off x="6172200" y="4206240"/>
+            <a:ext cx="5349240" cy="1417320"/>
+          </a:xfrm>
+          <a:prstGeom prst="rect">
+            <a:avLst/>
+          </a:prstGeom>
+          <a:solidFill>
+            <a:srgbClr val="FFFFFF"/>
+          </a:solidFill>
+          <a:ln w="12700">
+            <a:solidFill>
+              <a:srgbClr val="E1E8EF"/>
+            </a:solidFill>
+            <a:prstDash val="solid"/>
+          </a:ln>
+          <a:effectLst>
+            <a:outerShdw sx="100000" sy="100000" kx="0" ky="0" algn="bl" rotWithShape="0" blurRad="76200" dist="25400" dir="5400000">
+              <a:srgbClr val="0E1726">
+                <a:alpha val="10000"/>
+              </a:srgbClr>
+            </a:outerShdw>
+          </a:effectLst>
+        </p:spPr>
+      </p:sp>
+      <p:sp>
+        <p:nvSpPr>
+          <p:cNvPr id="23" name="Shape 18"/>
+          <p:cNvSpPr/>
+          <p:nvPr/>
+        </p:nvSpPr>
+        <p:spPr>
+          <a:xfrm>
+            <a:off x="6172200" y="4206240"/>
+            <a:ext cx="91440" cy="1417320"/>
+          </a:xfrm>
+          <a:prstGeom prst="rect">
+            <a:avLst/>
+          </a:prstGeom>
+          <a:solidFill>
+            <a:srgbClr val="19C37D"/>
+          </a:solidFill>
+          <a:ln/>
+        </p:spPr>
+      </p:sp>
+      <p:sp>
+        <p:nvSpPr>
+          <p:cNvPr id="24" name="Shape 19"/>
+          <p:cNvSpPr/>
+          <p:nvPr/>
+        </p:nvSpPr>
+        <p:spPr>
+          <a:xfrm>
+            <a:off x="6446520" y="4498848"/>
+            <a:ext cx="713232" cy="713232"/>
+          </a:xfrm>
+          <a:prstGeom prst="roundRect">
+            <a:avLst>
+              <a:gd name="adj" fmla="val 22000"/>
+            </a:avLst>
+          </a:prstGeom>
+          <a:solidFill>
+            <a:srgbClr val="0E1726"/>
+          </a:solidFill>
+          <a:ln/>
+        </p:spPr>
+      </p:sp>
+      <p:pic>
+        <p:nvPicPr>
+          <p:cNvPr id="25" name="Image 3" descr="preencoded.png">    </p:cNvPr>
+          <p:cNvPicPr>
+            <a:picLocks noChangeAspect="1"/>
+          </p:cNvPicPr>
+          <p:nvPr/>
+        </p:nvPicPr>
+        <p:blipFill>
+          <a:blip r:embed="rId4"/>
+          <a:stretch>
+            <a:fillRect/>
+          </a:stretch>
+        </p:blipFill>
+        <p:spPr>
+          <a:xfrm>
+            <a:off x="6631960" y="4684288"/>
+            <a:ext cx="342351" cy="342351"/>
+          </a:xfrm>
+          <a:prstGeom prst="rect">
+            <a:avLst/>
+          </a:prstGeom>
+        </p:spPr>
+      </p:pic>
+      <p:sp>
+        <p:nvSpPr>
+          <p:cNvPr id="26" name="Text 20"/>
+          <p:cNvSpPr/>
+          <p:nvPr/>
+        </p:nvSpPr>
+        <p:spPr>
+          <a:xfrm>
+            <a:off x="7379208" y="4425696"/>
+            <a:ext cx="3886200" cy="384048"/>
+          </a:xfrm>
+          <a:prstGeom prst="rect">
+            <a:avLst/>
+          </a:prstGeom>
+          <a:noFill/>
+          <a:ln/>
+        </p:spPr>
+        <p:txBody>
+          <a:bodyPr wrap="square" lIns="0" tIns="0" rIns="0" bIns="0" rtlCol="0" anchor="ctr"/>
+          <a:lstStyle/>
+          <a:p>
+            <a:pPr indent="0" marL="0">
+              <a:buNone/>
+            </a:pPr>
+            <a:r>
+              <a:rPr lang="en-US" sz="1550" b="1" dirty="0">
+                <a:solidFill>
+                  <a:srgbClr val="0E1726"/>
+                </a:solidFill>
+                <a:latin typeface="Georgia" pitchFamily="34" charset="0"/>
+                <a:ea typeface="Georgia" pitchFamily="34" charset="-122"/>
+                <a:cs typeface="Georgia" pitchFamily="34" charset="-120"/>
+              </a:rPr>
+              <a:t>Komunikace nejistoty</a:t>
+            </a:r>
+            <a:endParaRPr lang="en-US" sz="1550" dirty="0"/>
+          </a:p>
+        </p:txBody>
+      </p:sp>
+      <p:sp>
+        <p:nvSpPr>
+          <p:cNvPr id="27" name="Text 21"/>
+          <p:cNvSpPr/>
+          <p:nvPr/>
+        </p:nvSpPr>
+        <p:spPr>
+          <a:xfrm>
+            <a:off x="7379208" y="4828032"/>
+            <a:ext cx="3931920" cy="731520"/>
+          </a:xfrm>
+          <a:prstGeom prst="rect">
+            <a:avLst/>
+          </a:prstGeom>
+          <a:noFill/>
+          <a:ln/>
+        </p:spPr>
+        <p:txBody>
+          <a:bodyPr wrap="square" lIns="0" tIns="0" rIns="0" bIns="0" rtlCol="0" anchor="t"/>
+          <a:lstStyle/>
+          <a:p>
+            <a:pPr indent="0" marL="0">
+              <a:lnSpc>
+                <a:spcPct val="106000"/>
+              </a:lnSpc>
+              <a:buNone/>
+            </a:pPr>
+            <a:r>
+              <a:rPr lang="en-US" sz="1150" dirty="0">
+                <a:solidFill>
+                  <a:srgbClr val="55626F"/>
+                </a:solidFill>
+                <a:latin typeface="Calibri" pitchFamily="34" charset="0"/>
+                <a:ea typeface="Calibri" pitchFamily="34" charset="-122"/>
+                <a:cs typeface="Calibri" pitchFamily="34" charset="-120"/>
+              </a:rPr>
+              <a:t>Predikce 2030 ukazujeme jako pásmo scénářů (konzervativní / střední / ambiciózní), ne jedno „zaručené“ číslo.</a:t>
+            </a:r>
+            <a:endParaRPr lang="en-US" sz="1150" dirty="0"/>
+          </a:p>
+        </p:txBody>
+      </p:sp>
+      <p:sp>
+        <p:nvSpPr>
+          <p:cNvPr id="28" name="Text 22"/>
+          <p:cNvSpPr/>
+          <p:nvPr/>
+        </p:nvSpPr>
+        <p:spPr>
+          <a:xfrm>
+            <a:off x="640080" y="5943600"/>
+            <a:ext cx="10881360" cy="457200"/>
+          </a:xfrm>
+          <a:prstGeom prst="rect">
+            <a:avLst/>
+          </a:prstGeom>
+          <a:noFill/>
+          <a:ln/>
+        </p:spPr>
+        <p:txBody>
+          <a:bodyPr wrap="square" lIns="0" tIns="0" rIns="0" bIns="0" rtlCol="0" anchor="ctr"/>
+          <a:lstStyle/>
+          <a:p>
+            <a:pPr algn="l" indent="0" marL="0">
+              <a:buNone/>
+            </a:pPr>
+            <a:r>
+              <a:rPr lang="en-US" sz="1300" b="1" i="1" dirty="0">
+                <a:solidFill>
+                  <a:srgbClr val="0E9E63"/>
+                </a:solidFill>
+                <a:latin typeface="Calibri" pitchFamily="34" charset="0"/>
+                <a:ea typeface="Calibri" pitchFamily="34" charset="-122"/>
+                <a:cs typeface="Calibri" pitchFamily="34" charset="-120"/>
+              </a:rPr>
+              <a:t>Cold-start skóruje 2× — </a:t>
+            </a:r>
+            <a:pPr algn="l" indent="0" marL="0">
+              <a:buNone/>
+            </a:pPr>
+            <a:r>
+              <a:rPr lang="en-US" sz="1300" i="1" dirty="0">
+                <a:solidFill>
+                  <a:srgbClr val="55626F"/>
+                </a:solidFill>
+                <a:latin typeface="Calibri" pitchFamily="34" charset="0"/>
+                <a:ea typeface="Calibri" pitchFamily="34" charset="-122"/>
+                <a:cs typeface="Calibri" pitchFamily="34" charset="-120"/>
+              </a:rPr>
+              <a:t>technicky (málo dat o okraji) i eticky (spravedlnost). U nás je to jeden a tentýž mechanismus.</a:t>
+            </a:r>
+            <a:endParaRPr lang="en-US" sz="1300" dirty="0"/>
+          </a:p>
+        </p:txBody>
+      </p:sp>
+      <p:sp>
+        <p:nvSpPr>
+          <p:cNvPr id="29" name="Text 23"/>
+          <p:cNvSpPr/>
+          <p:nvPr/>
+        </p:nvSpPr>
+        <p:spPr>
+          <a:xfrm>
+            <a:off x="457200" y="6473952"/>
+            <a:ext cx="5486400" cy="274320"/>
+          </a:xfrm>
+          <a:prstGeom prst="rect">
+            <a:avLst/>
+          </a:prstGeom>
+          <a:noFill/>
+          <a:ln/>
+        </p:spPr>
+        <p:txBody>
+          <a:bodyPr wrap="square" lIns="0" tIns="0" rIns="0" bIns="0" rtlCol="0" anchor="ctr"/>
+          <a:lstStyle/>
+          <a:p>
+            <a:pPr algn="l" indent="0" marL="0">
+              <a:buNone/>
+            </a:pPr>
+            <a:r>
+              <a:rPr lang="en-US" sz="1050" b="1" dirty="0">
+                <a:solidFill>
+                  <a:srgbClr val="0E1726"/>
+                </a:solidFill>
+                <a:latin typeface="Calibri" pitchFamily="34" charset="0"/>
+                <a:ea typeface="Calibri" pitchFamily="34" charset="-122"/>
+                <a:cs typeface="Calibri" pitchFamily="34" charset="-120"/>
+              </a:rPr>
+              <a:t>VoltPlán</a:t>
+            </a:r>
+            <a:pPr algn="l" indent="0" marL="0">
+              <a:buNone/>
+            </a:pPr>
+            <a:r>
+              <a:rPr lang="en-US" sz="1050" dirty="0">
+                <a:solidFill>
+                  <a:srgbClr val="55626F"/>
+                </a:solidFill>
+                <a:latin typeface="Calibri" pitchFamily="34" charset="0"/>
+                <a:ea typeface="Calibri" pitchFamily="34" charset="-122"/>
+                <a:cs typeface="Calibri" pitchFamily="34" charset="-120"/>
+              </a:rPr>
+              <a:t>  ·  AIO_PHA-02-PHA</a:t>
+            </a:r>
+            <a:endParaRPr lang="en-US" sz="1050" dirty="0"/>
+          </a:p>
+        </p:txBody>
+      </p:sp>
+      <p:sp>
+        <p:nvSpPr>
+          <p:cNvPr id="30" name="Text 24"/>
+          <p:cNvSpPr/>
+          <p:nvPr/>
+        </p:nvSpPr>
+        <p:spPr>
+          <a:xfrm>
+            <a:off x="10637215" y="6473952"/>
+            <a:ext cx="1097280" cy="274320"/>
+          </a:xfrm>
+          <a:prstGeom prst="rect">
+            <a:avLst/>
+          </a:prstGeom>
+          <a:noFill/>
+          <a:ln/>
+        </p:spPr>
+        <p:txBody>
+          <a:bodyPr wrap="square" lIns="0" tIns="0" rIns="0" bIns="0" rtlCol="0" anchor="ctr"/>
+          <a:lstStyle/>
+          <a:p>
+            <a:pPr algn="r" indent="0" marL="0">
+              <a:buNone/>
+            </a:pPr>
+            <a:r>
+              <a:rPr lang="en-US" sz="1050" dirty="0">
+                <a:solidFill>
+                  <a:srgbClr val="55626F"/>
+                </a:solidFill>
+                <a:latin typeface="Calibri" pitchFamily="34" charset="0"/>
+                <a:ea typeface="Calibri" pitchFamily="34" charset="-122"/>
+                <a:cs typeface="Calibri" pitchFamily="34" charset="-120"/>
+              </a:rPr>
+              <a:t>10 / 12</a:t>
+            </a:r>
+            <a:endParaRPr lang="en-US" sz="1050" dirty="0"/>
+          </a:p>
+        </p:txBody>
+      </p:sp>
+    </p:spTree>
+  </p:cSld>
+  <p:clrMapOvr>
+    <a:masterClrMapping/>
+  </p:clrMapOvr>
+</p:sld>
+</file>
+
+<file path=ppt/slides/slide11.xml><?xml version="1.0" encoding="utf-8"?>
+<p:sld xmlns:a="http://schemas.openxmlformats.org/drawingml/2006/main" xmlns:r="http://schemas.openxmlformats.org/officeDocument/2006/relationships" xmlns:p="http://schemas.openxmlformats.org/presentationml/2006/main">
+  <p:cSld name="Slide 11">
+    <p:bg>
+      <p:bgPr>
+        <a:solidFill>
+          <a:srgbClr val="0E1726"/>
+        </a:solidFill>
+      </p:bgPr>
+    </p:bg>
+    <p:spTree>
+      <p:nvGrpSpPr>
+        <p:cNvPr id="1" name=""/>
+        <p:cNvGrpSpPr/>
+        <p:nvPr/>
+      </p:nvGrpSpPr>
+      <p:grpSpPr>
+        <a:xfrm>
+          <a:off x="0" y="0"/>
+          <a:ext cx="0" cy="0"/>
+          <a:chOff x="0" y="0"/>
+          <a:chExt cx="0" cy="0"/>
+        </a:xfrm>
+      </p:grpSpPr>
+      <p:sp>
+        <p:nvSpPr>
+          <p:cNvPr id="2" name="Shape 0"/>
+          <p:cNvSpPr/>
+          <p:nvPr/>
+        </p:nvSpPr>
+        <p:spPr>
+          <a:xfrm>
+            <a:off x="9326880" y="-2011680"/>
+            <a:ext cx="4754880" cy="4754880"/>
+          </a:xfrm>
+          <a:prstGeom prst="ellipse">
+            <a:avLst/>
+          </a:prstGeom>
+          <a:solidFill>
+            <a:srgbClr val="18283F"/>
+          </a:solidFill>
+          <a:ln/>
+        </p:spPr>
+      </p:sp>
+      <p:sp>
+        <p:nvSpPr>
+          <p:cNvPr id="3" name="Text 1"/>
+          <p:cNvSpPr/>
+          <p:nvPr/>
+        </p:nvSpPr>
+        <p:spPr>
+          <a:xfrm>
+            <a:off x="640080" y="502920"/>
+            <a:ext cx="10058400" cy="274320"/>
+          </a:xfrm>
+          <a:prstGeom prst="rect">
+            <a:avLst/>
+          </a:prstGeom>
+          <a:noFill/>
+          <a:ln/>
+        </p:spPr>
+        <p:txBody>
+          <a:bodyPr wrap="square" lIns="0" tIns="0" rIns="0" bIns="0" rtlCol="0" anchor="ctr"/>
+          <a:lstStyle/>
+          <a:p>
+            <a:pPr algn="l" indent="0" marL="0">
+              <a:buNone/>
+            </a:pPr>
+            <a:r>
+              <a:rPr lang="en-US" sz="1200" b="1" spc="300" kern="0" dirty="0">
+                <a:solidFill>
+                  <a:srgbClr val="19C37D"/>
+                </a:solidFill>
+                <a:latin typeface="Calibri" pitchFamily="34" charset="0"/>
+                <a:ea typeface="Calibri" pitchFamily="34" charset="-122"/>
+                <a:cs typeface="Calibri" pitchFamily="34" charset="-120"/>
+              </a:rPr>
+              <a:t>ETIKA ZABUDOVANÁ V PRODUKTU</a:t>
+            </a:r>
+            <a:endParaRPr lang="en-US" sz="1200" dirty="0"/>
+          </a:p>
+        </p:txBody>
+      </p:sp>
+      <p:sp>
+        <p:nvSpPr>
+          <p:cNvPr id="4" name="Text 2"/>
+          <p:cNvSpPr/>
+          <p:nvPr/>
+        </p:nvSpPr>
+        <p:spPr>
+          <a:xfrm>
+            <a:off x="640080" y="795528"/>
+            <a:ext cx="11002975" cy="1005840"/>
+          </a:xfrm>
+          <a:prstGeom prst="rect">
+            <a:avLst/>
+          </a:prstGeom>
+          <a:noFill/>
+          <a:ln/>
+        </p:spPr>
+        <p:txBody>
+          <a:bodyPr wrap="square" lIns="0" tIns="0" rIns="0" bIns="0" rtlCol="0" anchor="t"/>
+          <a:lstStyle/>
+          <a:p>
+            <a:pPr algn="l" indent="0" marL="0">
+              <a:lnSpc>
+                <a:spcPct val="102000"/>
+              </a:lnSpc>
+              <a:buNone/>
+            </a:pPr>
+            <a:r>
+              <a:rPr lang="en-US" sz="3100" b="1" dirty="0">
+                <a:solidFill>
+                  <a:srgbClr val="FFFFFF"/>
+                </a:solidFill>
+                <a:latin typeface="Georgia" pitchFamily="34" charset="0"/>
+                <a:ea typeface="Georgia" pitchFamily="34" charset="-122"/>
+                <a:cs typeface="Georgia" pitchFamily="34" charset="-120"/>
+              </a:rPr>
+              <a:t>Etika není slide navíc —</a:t>
+            </a:r>
+            <a:endParaRPr lang="en-US" sz="3100" dirty="0"/>
+          </a:p>
+          <a:p>
+            <a:pPr algn="l" indent="0" marL="0">
+              <a:lnSpc>
+                <a:spcPct val="102000"/>
+              </a:lnSpc>
+              <a:buNone/>
+            </a:pPr>
+            <a:r>
+              <a:rPr lang="en-US" sz="3100" b="1" dirty="0">
+                <a:solidFill>
+                  <a:srgbClr val="FFFFFF"/>
+                </a:solidFill>
+                <a:latin typeface="Georgia" pitchFamily="34" charset="0"/>
+                <a:ea typeface="Georgia" pitchFamily="34" charset="-122"/>
+                <a:cs typeface="Georgia" pitchFamily="34" charset="-120"/>
+              </a:rPr>
+              <a:t>je to kód, který běží.</a:t>
+            </a:r>
+            <a:endParaRPr lang="en-US" sz="3100" dirty="0"/>
+          </a:p>
+        </p:txBody>
+      </p:sp>
+      <p:sp>
+        <p:nvSpPr>
+          <p:cNvPr id="5" name="Text 3"/>
+          <p:cNvSpPr/>
+          <p:nvPr/>
+        </p:nvSpPr>
+        <p:spPr>
+          <a:xfrm>
+            <a:off x="658368" y="1783080"/>
+            <a:ext cx="10881360" cy="640080"/>
+          </a:xfrm>
+          <a:prstGeom prst="rect">
+            <a:avLst/>
+          </a:prstGeom>
+          <a:noFill/>
+          <a:ln/>
+        </p:spPr>
+        <p:txBody>
+          <a:bodyPr wrap="square" lIns="0" tIns="0" rIns="0" bIns="0" rtlCol="0" anchor="t"/>
+          <a:lstStyle/>
+          <a:p>
+            <a:pPr algn="l" indent="0" marL="0">
+              <a:lnSpc>
+                <a:spcPct val="112000"/>
+              </a:lnSpc>
+              <a:buNone/>
+            </a:pPr>
+            <a:r>
+              <a:rPr lang="en-US" sz="1400" dirty="0">
+                <a:solidFill>
+                  <a:srgbClr val="9DB2C6"/>
+                </a:solidFill>
+                <a:latin typeface="Calibri" pitchFamily="34" charset="0"/>
+                <a:ea typeface="Calibri" pitchFamily="34" charset="-122"/>
+                <a:cs typeface="Calibri" pitchFamily="34" charset="-120"/>
+              </a:rPr>
+              <a:t>Každé ze čtyř rizik má v systému konkrétní mechanismus. Nejsou to sliby do pitche — jsou to vlastnosti, které jsou v produktu vidět a dají se zkontrolovat.</a:t>
+            </a:r>
+            <a:endParaRPr lang="en-US" sz="1400" dirty="0"/>
+          </a:p>
+        </p:txBody>
+      </p:sp>
+      <p:sp>
+        <p:nvSpPr>
+          <p:cNvPr id="6" name="Shape 4"/>
+          <p:cNvSpPr/>
+          <p:nvPr/>
+        </p:nvSpPr>
+        <p:spPr>
+          <a:xfrm>
+            <a:off x="640080" y="2606040"/>
+            <a:ext cx="3584448" cy="1627632"/>
+          </a:xfrm>
+          <a:prstGeom prst="rect">
+            <a:avLst/>
+          </a:prstGeom>
+          <a:solidFill>
+            <a:srgbClr val="18283F"/>
+          </a:solidFill>
+          <a:ln/>
+          <a:effectLst>
+            <a:outerShdw sx="100000" sy="100000" kx="0" ky="0" algn="bl" rotWithShape="0" blurRad="114300" dist="38100" dir="5400000">
+              <a:srgbClr val="000000">
+                <a:alpha val="22000"/>
+              </a:srgbClr>
+            </a:outerShdw>
+          </a:effectLst>
+        </p:spPr>
+      </p:sp>
+      <p:sp>
+        <p:nvSpPr>
+          <p:cNvPr id="7" name="Shape 5"/>
+          <p:cNvSpPr/>
+          <p:nvPr/>
+        </p:nvSpPr>
+        <p:spPr>
+          <a:xfrm>
+            <a:off x="640080" y="2606040"/>
+            <a:ext cx="3584448" cy="73152"/>
+          </a:xfrm>
+          <a:prstGeom prst="rect">
+            <a:avLst/>
+          </a:prstGeom>
+          <a:solidFill>
+            <a:srgbClr val="19C37D"/>
+          </a:solidFill>
+          <a:ln/>
+        </p:spPr>
+      </p:sp>
+      <p:sp>
+        <p:nvSpPr>
+          <p:cNvPr id="8" name="Shape 6"/>
+          <p:cNvSpPr/>
+          <p:nvPr/>
+        </p:nvSpPr>
+        <p:spPr>
+          <a:xfrm>
+            <a:off x="877824" y="2862072"/>
+            <a:ext cx="603504" cy="603504"/>
+          </a:xfrm>
+          <a:prstGeom prst="roundRect">
+            <a:avLst>
+              <a:gd name="adj" fmla="val 22000"/>
+            </a:avLst>
+          </a:prstGeom>
+          <a:solidFill>
+            <a:srgbClr val="0E9E63"/>
+          </a:solidFill>
+          <a:ln/>
+        </p:spPr>
+      </p:sp>
+      <p:pic>
+        <p:nvPicPr>
+          <p:cNvPr id="9" name="Image 0" descr="preencoded.png">    </p:cNvPr>
+          <p:cNvPicPr>
+            <a:picLocks noChangeAspect="1"/>
+          </p:cNvPicPr>
+          <p:nvPr/>
+        </p:nvPicPr>
+        <p:blipFill>
+          <a:blip r:embed="rId1"/>
+          <a:stretch>
+            <a:fillRect/>
+          </a:stretch>
+        </p:blipFill>
+        <p:spPr>
+          <a:xfrm>
+            <a:off x="1034735" y="3018983"/>
+            <a:ext cx="289682" cy="289682"/>
+          </a:xfrm>
+          <a:prstGeom prst="rect">
+            <a:avLst/>
+          </a:prstGeom>
+        </p:spPr>
+      </p:pic>
+      <p:sp>
+        <p:nvSpPr>
+          <p:cNvPr id="10" name="Text 7"/>
+          <p:cNvSpPr/>
+          <p:nvPr/>
+        </p:nvSpPr>
+        <p:spPr>
+          <a:xfrm>
+            <a:off x="1600200" y="2898648"/>
+            <a:ext cx="2441448" cy="548640"/>
+          </a:xfrm>
+          <a:prstGeom prst="rect">
+            <a:avLst/>
+          </a:prstGeom>
+          <a:noFill/>
+          <a:ln/>
+        </p:spPr>
+        <p:txBody>
+          <a:bodyPr wrap="square" lIns="0" tIns="0" rIns="0" bIns="0" rtlCol="0" anchor="ctr"/>
+          <a:lstStyle/>
+          <a:p>
+            <a:pPr indent="0" marL="0">
+              <a:buNone/>
+            </a:pPr>
+            <a:r>
+              <a:rPr lang="en-US" sz="1400" b="1" dirty="0">
+                <a:solidFill>
+                  <a:srgbClr val="FFFFFF"/>
+                </a:solidFill>
+                <a:latin typeface="Georgia" pitchFamily="34" charset="0"/>
+                <a:ea typeface="Georgia" pitchFamily="34" charset="-122"/>
+                <a:cs typeface="Georgia" pitchFamily="34" charset="-120"/>
+              </a:rPr>
+              <a:t>Férovost ve skóre</a:t>
+            </a:r>
+            <a:endParaRPr lang="en-US" sz="1400" dirty="0"/>
+          </a:p>
+        </p:txBody>
+      </p:sp>
+      <p:sp>
+        <p:nvSpPr>
+          <p:cNvPr id="11" name="Text 8"/>
+          <p:cNvSpPr/>
+          <p:nvPr/>
+        </p:nvSpPr>
+        <p:spPr>
+          <a:xfrm>
+            <a:off x="896112" y="3520440"/>
+            <a:ext cx="3127248" cy="658368"/>
+          </a:xfrm>
+          <a:prstGeom prst="rect">
+            <a:avLst/>
+          </a:prstGeom>
+          <a:noFill/>
+          <a:ln/>
+        </p:spPr>
+        <p:txBody>
+          <a:bodyPr wrap="square" lIns="0" tIns="0" rIns="0" bIns="0" rtlCol="0" anchor="t"/>
+          <a:lstStyle/>
+          <a:p>
+            <a:pPr indent="0" marL="0">
+              <a:lnSpc>
+                <a:spcPct val="106000"/>
+              </a:lnSpc>
+              <a:buNone/>
+            </a:pPr>
+            <a:r>
+              <a:rPr lang="en-US" sz="1050" dirty="0">
+                <a:solidFill>
+                  <a:srgbClr val="9DB2C6"/>
+                </a:solidFill>
+                <a:latin typeface="Calibri" pitchFamily="34" charset="0"/>
+                <a:ea typeface="Calibri" pitchFamily="34" charset="-122"/>
+                <a:cs typeface="Calibri" pitchFamily="34" charset="-120"/>
+              </a:rPr>
+              <a:t>equity_weight = 15 % suitability. Čtvrti s byty bez stání dostávají prioritu přímo ve vzorci → cold-start spirálu lámeme matematicky, ne dobrou vůlí.</a:t>
+            </a:r>
+            <a:endParaRPr lang="en-US" sz="1050" dirty="0"/>
+          </a:p>
+        </p:txBody>
+      </p:sp>
+      <p:sp>
+        <p:nvSpPr>
+          <p:cNvPr id="12" name="Shape 9"/>
+          <p:cNvSpPr/>
+          <p:nvPr/>
+        </p:nvSpPr>
+        <p:spPr>
+          <a:xfrm>
+            <a:off x="4389120" y="2606040"/>
+            <a:ext cx="3584448" cy="1627632"/>
+          </a:xfrm>
+          <a:prstGeom prst="rect">
+            <a:avLst/>
+          </a:prstGeom>
+          <a:solidFill>
+            <a:srgbClr val="18283F"/>
+          </a:solidFill>
+          <a:ln/>
+          <a:effectLst>
+            <a:outerShdw sx="100000" sy="100000" kx="0" ky="0" algn="bl" rotWithShape="0" blurRad="114300" dist="38100" dir="5400000">
+              <a:srgbClr val="000000">
+                <a:alpha val="22000"/>
+              </a:srgbClr>
+            </a:outerShdw>
+          </a:effectLst>
+        </p:spPr>
+      </p:sp>
+      <p:sp>
+        <p:nvSpPr>
+          <p:cNvPr id="13" name="Shape 10"/>
+          <p:cNvSpPr/>
+          <p:nvPr/>
+        </p:nvSpPr>
+        <p:spPr>
+          <a:xfrm>
+            <a:off x="4389120" y="2606040"/>
+            <a:ext cx="3584448" cy="73152"/>
+          </a:xfrm>
+          <a:prstGeom prst="rect">
+            <a:avLst/>
+          </a:prstGeom>
+          <a:solidFill>
+            <a:srgbClr val="19C37D"/>
+          </a:solidFill>
+          <a:ln/>
+        </p:spPr>
+      </p:sp>
+      <p:sp>
+        <p:nvSpPr>
+          <p:cNvPr id="14" name="Shape 11"/>
+          <p:cNvSpPr/>
+          <p:nvPr/>
+        </p:nvSpPr>
+        <p:spPr>
+          <a:xfrm>
+            <a:off x="4626864" y="2862072"/>
+            <a:ext cx="603504" cy="603504"/>
+          </a:xfrm>
+          <a:prstGeom prst="roundRect">
+            <a:avLst>
+              <a:gd name="adj" fmla="val 22000"/>
+            </a:avLst>
+          </a:prstGeom>
+          <a:solidFill>
+            <a:srgbClr val="0E9E63"/>
+          </a:solidFill>
+          <a:ln/>
+        </p:spPr>
+      </p:sp>
+      <p:pic>
+        <p:nvPicPr>
+          <p:cNvPr id="15" name="Image 1" descr="preencoded.png">    </p:cNvPr>
+          <p:cNvPicPr>
+            <a:picLocks noChangeAspect="1"/>
+          </p:cNvPicPr>
+          <p:nvPr/>
+        </p:nvPicPr>
+        <p:blipFill>
+          <a:blip r:embed="rId2"/>
+          <a:stretch>
+            <a:fillRect/>
+          </a:stretch>
+        </p:blipFill>
+        <p:spPr>
+          <a:xfrm>
+            <a:off x="4783775" y="3018983"/>
+            <a:ext cx="289682" cy="289682"/>
+          </a:xfrm>
+          <a:prstGeom prst="rect">
+            <a:avLst/>
+          </a:prstGeom>
+        </p:spPr>
+      </p:pic>
+      <p:sp>
+        <p:nvSpPr>
+          <p:cNvPr id="16" name="Text 12"/>
+          <p:cNvSpPr/>
+          <p:nvPr/>
+        </p:nvSpPr>
+        <p:spPr>
+          <a:xfrm>
+            <a:off x="5349240" y="2898648"/>
+            <a:ext cx="2441448" cy="548640"/>
+          </a:xfrm>
+          <a:prstGeom prst="rect">
+            <a:avLst/>
+          </a:prstGeom>
+          <a:noFill/>
+          <a:ln/>
+        </p:spPr>
+        <p:txBody>
+          <a:bodyPr wrap="square" lIns="0" tIns="0" rIns="0" bIns="0" rtlCol="0" anchor="ctr"/>
+          <a:lstStyle/>
+          <a:p>
+            <a:pPr indent="0" marL="0">
+              <a:buNone/>
+            </a:pPr>
+            <a:r>
+              <a:rPr lang="en-US" sz="1400" b="1" dirty="0">
+                <a:solidFill>
+                  <a:srgbClr val="FFFFFF"/>
+                </a:solidFill>
+                <a:latin typeface="Georgia" pitchFamily="34" charset="0"/>
+                <a:ea typeface="Georgia" pitchFamily="34" charset="-122"/>
+                <a:cs typeface="Georgia" pitchFamily="34" charset="-120"/>
+              </a:rPr>
+              <a:t>Indikátor jistoty</a:t>
+            </a:r>
+            <a:endParaRPr lang="en-US" sz="1400" dirty="0"/>
+          </a:p>
+        </p:txBody>
+      </p:sp>
+      <p:sp>
+        <p:nvSpPr>
+          <p:cNvPr id="17" name="Text 13"/>
+          <p:cNvSpPr/>
+          <p:nvPr/>
+        </p:nvSpPr>
+        <p:spPr>
+          <a:xfrm>
+            <a:off x="4645152" y="3520440"/>
+            <a:ext cx="3127248" cy="658368"/>
+          </a:xfrm>
+          <a:prstGeom prst="rect">
+            <a:avLst/>
+          </a:prstGeom>
+          <a:noFill/>
+          <a:ln/>
+        </p:spPr>
+        <p:txBody>
+          <a:bodyPr wrap="square" lIns="0" tIns="0" rIns="0" bIns="0" rtlCol="0" anchor="t"/>
+          <a:lstStyle/>
+          <a:p>
+            <a:pPr indent="0" marL="0">
+              <a:lnSpc>
+                <a:spcPct val="106000"/>
+              </a:lnSpc>
+              <a:buNone/>
+            </a:pPr>
+            <a:r>
+              <a:rPr lang="en-US" sz="1050" dirty="0">
+                <a:solidFill>
+                  <a:srgbClr val="9DB2C6"/>
+                </a:solidFill>
+                <a:latin typeface="Calibri" pitchFamily="34" charset="0"/>
+                <a:ea typeface="Calibri" pitchFamily="34" charset="-122"/>
+                <a:cs typeface="Calibri" pitchFamily="34" charset="-120"/>
+              </a:rPr>
+              <a:t>Zóny s řídkými daty dostanou nižší confidence a jsou v mapě označené. Model neříká „nevím“ potichu — řekne to nahlas.</a:t>
+            </a:r>
+            <a:endParaRPr lang="en-US" sz="1050" dirty="0"/>
+          </a:p>
+        </p:txBody>
+      </p:sp>
+      <p:sp>
+        <p:nvSpPr>
+          <p:cNvPr id="18" name="Shape 14"/>
+          <p:cNvSpPr/>
+          <p:nvPr/>
+        </p:nvSpPr>
+        <p:spPr>
+          <a:xfrm>
+            <a:off x="8138160" y="2606040"/>
+            <a:ext cx="3584448" cy="1627632"/>
+          </a:xfrm>
+          <a:prstGeom prst="rect">
+            <a:avLst/>
+          </a:prstGeom>
+          <a:solidFill>
+            <a:srgbClr val="18283F"/>
+          </a:solidFill>
+          <a:ln/>
+          <a:effectLst>
+            <a:outerShdw sx="100000" sy="100000" kx="0" ky="0" algn="bl" rotWithShape="0" blurRad="114300" dist="38100" dir="5400000">
+              <a:srgbClr val="000000">
+                <a:alpha val="22000"/>
+              </a:srgbClr>
+            </a:outerShdw>
+          </a:effectLst>
+        </p:spPr>
+      </p:sp>
+      <p:sp>
+        <p:nvSpPr>
+          <p:cNvPr id="19" name="Shape 15"/>
+          <p:cNvSpPr/>
+          <p:nvPr/>
+        </p:nvSpPr>
+        <p:spPr>
+          <a:xfrm>
+            <a:off x="8138160" y="2606040"/>
+            <a:ext cx="3584448" cy="73152"/>
+          </a:xfrm>
+          <a:prstGeom prst="rect">
+            <a:avLst/>
+          </a:prstGeom>
+          <a:solidFill>
+            <a:srgbClr val="19C37D"/>
+          </a:solidFill>
+          <a:ln/>
+        </p:spPr>
+      </p:sp>
+      <p:sp>
+        <p:nvSpPr>
+          <p:cNvPr id="20" name="Shape 16"/>
+          <p:cNvSpPr/>
+          <p:nvPr/>
+        </p:nvSpPr>
+        <p:spPr>
+          <a:xfrm>
+            <a:off x="8375904" y="2862072"/>
+            <a:ext cx="603504" cy="603504"/>
+          </a:xfrm>
+          <a:prstGeom prst="roundRect">
+            <a:avLst>
+              <a:gd name="adj" fmla="val 22000"/>
+            </a:avLst>
+          </a:prstGeom>
+          <a:solidFill>
+            <a:srgbClr val="0E9E63"/>
+          </a:solidFill>
+          <a:ln/>
+        </p:spPr>
+      </p:sp>
+      <p:pic>
+        <p:nvPicPr>
+          <p:cNvPr id="21" name="Image 2" descr="preencoded.png">    </p:cNvPr>
+          <p:cNvPicPr>
+            <a:picLocks noChangeAspect="1"/>
+          </p:cNvPicPr>
+          <p:nvPr/>
+        </p:nvPicPr>
+        <p:blipFill>
+          <a:blip r:embed="rId3"/>
+          <a:stretch>
+            <a:fillRect/>
+          </a:stretch>
+        </p:blipFill>
+        <p:spPr>
+          <a:xfrm>
+            <a:off x="8532815" y="3018983"/>
+            <a:ext cx="289682" cy="289682"/>
+          </a:xfrm>
+          <a:prstGeom prst="rect">
+            <a:avLst/>
+          </a:prstGeom>
+        </p:spPr>
+      </p:pic>
+      <p:sp>
+        <p:nvSpPr>
+          <p:cNvPr id="22" name="Text 17"/>
+          <p:cNvSpPr/>
+          <p:nvPr/>
+        </p:nvSpPr>
+        <p:spPr>
+          <a:xfrm>
+            <a:off x="9098280" y="2898648"/>
+            <a:ext cx="2441448" cy="548640"/>
+          </a:xfrm>
+          <a:prstGeom prst="rect">
+            <a:avLst/>
+          </a:prstGeom>
+          <a:noFill/>
+          <a:ln/>
+        </p:spPr>
+        <p:txBody>
+          <a:bodyPr wrap="square" lIns="0" tIns="0" rIns="0" bIns="0" rtlCol="0" anchor="ctr"/>
+          <a:lstStyle/>
+          <a:p>
+            <a:pPr indent="0" marL="0">
+              <a:buNone/>
+            </a:pPr>
+            <a:r>
+              <a:rPr lang="en-US" sz="1400" b="1" dirty="0">
+                <a:solidFill>
+                  <a:srgbClr val="FFFFFF"/>
+                </a:solidFill>
+                <a:latin typeface="Georgia" pitchFamily="34" charset="0"/>
+                <a:ea typeface="Georgia" pitchFamily="34" charset="-122"/>
+                <a:cs typeface="Georgia" pitchFamily="34" charset="-120"/>
+              </a:rPr>
+              <a:t>Člověk rozhoduje</a:t>
+            </a:r>
+            <a:endParaRPr lang="en-US" sz="1400" dirty="0"/>
+          </a:p>
+        </p:txBody>
+      </p:sp>
+      <p:sp>
+        <p:nvSpPr>
+          <p:cNvPr id="23" name="Text 18"/>
+          <p:cNvSpPr/>
+          <p:nvPr/>
+        </p:nvSpPr>
+        <p:spPr>
+          <a:xfrm>
+            <a:off x="8394192" y="3520440"/>
+            <a:ext cx="3127248" cy="658368"/>
+          </a:xfrm>
+          <a:prstGeom prst="rect">
+            <a:avLst/>
+          </a:prstGeom>
+          <a:noFill/>
+          <a:ln/>
+        </p:spPr>
+        <p:txBody>
+          <a:bodyPr wrap="square" lIns="0" tIns="0" rIns="0" bIns="0" rtlCol="0" anchor="t"/>
+          <a:lstStyle/>
+          <a:p>
+            <a:pPr indent="0" marL="0">
+              <a:lnSpc>
+                <a:spcPct val="106000"/>
+              </a:lnSpc>
+              <a:buNone/>
+            </a:pPr>
+            <a:r>
+              <a:rPr lang="en-US" sz="1050" dirty="0">
+                <a:solidFill>
+                  <a:srgbClr val="9DB2C6"/>
+                </a:solidFill>
+                <a:latin typeface="Calibri" pitchFamily="34" charset="0"/>
+                <a:ea typeface="Calibri" pitchFamily="34" charset="-122"/>
+                <a:cs typeface="Calibri" pitchFamily="34" charset="-120"/>
+              </a:rPr>
+              <a:t>Doporučení = návrh pro úředníka, ne příkaz. Každé skóre má audit log (vstupy + verze modelu) → rozhodnutí je dohledatelné.</a:t>
+            </a:r>
+            <a:endParaRPr lang="en-US" sz="1050" dirty="0"/>
+          </a:p>
+        </p:txBody>
+      </p:sp>
+      <p:sp>
+        <p:nvSpPr>
+          <p:cNvPr id="24" name="Shape 19"/>
+          <p:cNvSpPr/>
+          <p:nvPr/>
+        </p:nvSpPr>
+        <p:spPr>
+          <a:xfrm>
+            <a:off x="640080" y="4398264"/>
+            <a:ext cx="3584448" cy="1627632"/>
+          </a:xfrm>
+          <a:prstGeom prst="rect">
+            <a:avLst/>
+          </a:prstGeom>
+          <a:solidFill>
+            <a:srgbClr val="18283F"/>
+          </a:solidFill>
+          <a:ln/>
+          <a:effectLst>
+            <a:outerShdw sx="100000" sy="100000" kx="0" ky="0" algn="bl" rotWithShape="0" blurRad="114300" dist="38100" dir="5400000">
+              <a:srgbClr val="000000">
+                <a:alpha val="22000"/>
+              </a:srgbClr>
+            </a:outerShdw>
+          </a:effectLst>
+        </p:spPr>
+      </p:sp>
+      <p:sp>
+        <p:nvSpPr>
+          <p:cNvPr id="25" name="Shape 20"/>
+          <p:cNvSpPr/>
+          <p:nvPr/>
+        </p:nvSpPr>
+        <p:spPr>
+          <a:xfrm>
+            <a:off x="640080" y="4398264"/>
+            <a:ext cx="3584448" cy="73152"/>
+          </a:xfrm>
+          <a:prstGeom prst="rect">
+            <a:avLst/>
+          </a:prstGeom>
+          <a:solidFill>
+            <a:srgbClr val="19C37D"/>
+          </a:solidFill>
+          <a:ln/>
+        </p:spPr>
+      </p:sp>
+      <p:sp>
+        <p:nvSpPr>
+          <p:cNvPr id="26" name="Shape 21"/>
+          <p:cNvSpPr/>
+          <p:nvPr/>
+        </p:nvSpPr>
+        <p:spPr>
+          <a:xfrm>
+            <a:off x="877824" y="4654296"/>
+            <a:ext cx="603504" cy="603504"/>
+          </a:xfrm>
+          <a:prstGeom prst="roundRect">
+            <a:avLst>
+              <a:gd name="adj" fmla="val 22000"/>
+            </a:avLst>
+          </a:prstGeom>
+          <a:solidFill>
+            <a:srgbClr val="0E9E63"/>
+          </a:solidFill>
+          <a:ln/>
+        </p:spPr>
+      </p:sp>
+      <p:pic>
+        <p:nvPicPr>
+          <p:cNvPr id="27" name="Image 3" descr="preencoded.png">    </p:cNvPr>
+          <p:cNvPicPr>
+            <a:picLocks noChangeAspect="1"/>
+          </p:cNvPicPr>
+          <p:nvPr/>
+        </p:nvPicPr>
+        <p:blipFill>
+          <a:blip r:embed="rId4"/>
+          <a:stretch>
+            <a:fillRect/>
+          </a:stretch>
+        </p:blipFill>
+        <p:spPr>
+          <a:xfrm>
+            <a:off x="1034735" y="4811207"/>
+            <a:ext cx="289682" cy="289682"/>
+          </a:xfrm>
+          <a:prstGeom prst="rect">
+            <a:avLst/>
+          </a:prstGeom>
+        </p:spPr>
+      </p:pic>
+      <p:sp>
+        <p:nvSpPr>
+          <p:cNvPr id="28" name="Text 22"/>
+          <p:cNvSpPr/>
+          <p:nvPr/>
+        </p:nvSpPr>
+        <p:spPr>
+          <a:xfrm>
+            <a:off x="1600200" y="4690872"/>
+            <a:ext cx="2441448" cy="548640"/>
+          </a:xfrm>
+          <a:prstGeom prst="rect">
+            <a:avLst/>
+          </a:prstGeom>
+          <a:noFill/>
+          <a:ln/>
+        </p:spPr>
+        <p:txBody>
+          <a:bodyPr wrap="square" lIns="0" tIns="0" rIns="0" bIns="0" rtlCol="0" anchor="ctr"/>
+          <a:lstStyle/>
+          <a:p>
+            <a:pPr indent="0" marL="0">
+              <a:buNone/>
+            </a:pPr>
+            <a:r>
+              <a:rPr lang="en-US" sz="1400" b="1" dirty="0">
+                <a:solidFill>
+                  <a:srgbClr val="FFFFFF"/>
+                </a:solidFill>
+                <a:latin typeface="Georgia" pitchFamily="34" charset="0"/>
+                <a:ea typeface="Georgia" pitchFamily="34" charset="-122"/>
+                <a:cs typeface="Georgia" pitchFamily="34" charset="-120"/>
+              </a:rPr>
+              <a:t>Pásmo, ne jedno číslo</a:t>
+            </a:r>
+            <a:endParaRPr lang="en-US" sz="1400" dirty="0"/>
+          </a:p>
+        </p:txBody>
+      </p:sp>
+      <p:sp>
+        <p:nvSpPr>
+          <p:cNvPr id="29" name="Text 23"/>
+          <p:cNvSpPr/>
+          <p:nvPr/>
+        </p:nvSpPr>
+        <p:spPr>
+          <a:xfrm>
+            <a:off x="896112" y="5312664"/>
+            <a:ext cx="3127248" cy="658368"/>
+          </a:xfrm>
+          <a:prstGeom prst="rect">
+            <a:avLst/>
+          </a:prstGeom>
+          <a:noFill/>
+          <a:ln/>
+        </p:spPr>
+        <p:txBody>
+          <a:bodyPr wrap="square" lIns="0" tIns="0" rIns="0" bIns="0" rtlCol="0" anchor="t"/>
+          <a:lstStyle/>
+          <a:p>
+            <a:pPr indent="0" marL="0">
+              <a:lnSpc>
+                <a:spcPct val="106000"/>
+              </a:lnSpc>
+              <a:buNone/>
+            </a:pPr>
+            <a:r>
+              <a:rPr lang="en-US" sz="1050" dirty="0">
+                <a:solidFill>
+                  <a:srgbClr val="9DB2C6"/>
+                </a:solidFill>
+                <a:latin typeface="Calibri" pitchFamily="34" charset="0"/>
+                <a:ea typeface="Calibri" pitchFamily="34" charset="-122"/>
+                <a:cs typeface="Calibri" pitchFamily="34" charset="-120"/>
+              </a:rPr>
+              <a:t>Predikce 2030 jako 3 scénáře růstu EV (konzervativní / střední / ambiciózní). Nejistotu komunikujeme, neschováváme.</a:t>
+            </a:r>
+            <a:endParaRPr lang="en-US" sz="1050" dirty="0"/>
+          </a:p>
+        </p:txBody>
+      </p:sp>
+      <p:sp>
+        <p:nvSpPr>
+          <p:cNvPr id="30" name="Shape 24"/>
+          <p:cNvSpPr/>
+          <p:nvPr/>
+        </p:nvSpPr>
+        <p:spPr>
+          <a:xfrm>
+            <a:off x="4389120" y="4398264"/>
+            <a:ext cx="3584448" cy="1627632"/>
+          </a:xfrm>
+          <a:prstGeom prst="rect">
+            <a:avLst/>
+          </a:prstGeom>
+          <a:solidFill>
+            <a:srgbClr val="18283F"/>
+          </a:solidFill>
+          <a:ln/>
+          <a:effectLst>
+            <a:outerShdw sx="100000" sy="100000" kx="0" ky="0" algn="bl" rotWithShape="0" blurRad="114300" dist="38100" dir="5400000">
+              <a:srgbClr val="000000">
+                <a:alpha val="22000"/>
+              </a:srgbClr>
+            </a:outerShdw>
+          </a:effectLst>
+        </p:spPr>
+      </p:sp>
+      <p:sp>
+        <p:nvSpPr>
+          <p:cNvPr id="31" name="Shape 25"/>
+          <p:cNvSpPr/>
+          <p:nvPr/>
+        </p:nvSpPr>
+        <p:spPr>
+          <a:xfrm>
+            <a:off x="4389120" y="4398264"/>
+            <a:ext cx="3584448" cy="73152"/>
+          </a:xfrm>
+          <a:prstGeom prst="rect">
+            <a:avLst/>
+          </a:prstGeom>
+          <a:solidFill>
+            <a:srgbClr val="19C37D"/>
+          </a:solidFill>
+          <a:ln/>
+        </p:spPr>
+      </p:sp>
+      <p:sp>
+        <p:nvSpPr>
+          <p:cNvPr id="32" name="Shape 26"/>
+          <p:cNvSpPr/>
+          <p:nvPr/>
+        </p:nvSpPr>
+        <p:spPr>
+          <a:xfrm>
+            <a:off x="4626864" y="4654296"/>
+            <a:ext cx="603504" cy="603504"/>
+          </a:xfrm>
+          <a:prstGeom prst="roundRect">
+            <a:avLst>
+              <a:gd name="adj" fmla="val 22000"/>
+            </a:avLst>
+          </a:prstGeom>
+          <a:solidFill>
+            <a:srgbClr val="0E9E63"/>
+          </a:solidFill>
+          <a:ln/>
+        </p:spPr>
+      </p:sp>
+      <p:pic>
+        <p:nvPicPr>
+          <p:cNvPr id="33" name="Image 4" descr="preencoded.png">    </p:cNvPr>
+          <p:cNvPicPr>
+            <a:picLocks noChangeAspect="1"/>
+          </p:cNvPicPr>
+          <p:nvPr/>
+        </p:nvPicPr>
+        <p:blipFill>
+          <a:blip r:embed="rId5"/>
+          <a:stretch>
+            <a:fillRect/>
+          </a:stretch>
+        </p:blipFill>
+        <p:spPr>
+          <a:xfrm>
+            <a:off x="4783775" y="4811207"/>
+            <a:ext cx="289682" cy="289682"/>
+          </a:xfrm>
+          <a:prstGeom prst="rect">
+            <a:avLst/>
+          </a:prstGeom>
+        </p:spPr>
+      </p:pic>
+      <p:sp>
+        <p:nvSpPr>
+          <p:cNvPr id="34" name="Text 27"/>
+          <p:cNvSpPr/>
+          <p:nvPr/>
+        </p:nvSpPr>
+        <p:spPr>
+          <a:xfrm>
+            <a:off x="5349240" y="4690872"/>
+            <a:ext cx="2441448" cy="548640"/>
+          </a:xfrm>
+          <a:prstGeom prst="rect">
+            <a:avLst/>
+          </a:prstGeom>
+          <a:noFill/>
+          <a:ln/>
+        </p:spPr>
+        <p:txBody>
+          <a:bodyPr wrap="square" lIns="0" tIns="0" rIns="0" bIns="0" rtlCol="0" anchor="ctr"/>
+          <a:lstStyle/>
+          <a:p>
+            <a:pPr indent="0" marL="0">
+              <a:buNone/>
+            </a:pPr>
+            <a:r>
+              <a:rPr lang="en-US" sz="1400" b="1" dirty="0">
+                <a:solidFill>
+                  <a:srgbClr val="FFFFFF"/>
+                </a:solidFill>
+                <a:latin typeface="Georgia" pitchFamily="34" charset="0"/>
+                <a:ea typeface="Georgia" pitchFamily="34" charset="-122"/>
+                <a:cs typeface="Georgia" pitchFamily="34" charset="-120"/>
+              </a:rPr>
+              <a:t>Minimum dat (GDPR)</a:t>
+            </a:r>
+            <a:endParaRPr lang="en-US" sz="1400" dirty="0"/>
+          </a:p>
+        </p:txBody>
+      </p:sp>
+      <p:sp>
+        <p:nvSpPr>
+          <p:cNvPr id="35" name="Text 28"/>
+          <p:cNvSpPr/>
+          <p:nvPr/>
+        </p:nvSpPr>
+        <p:spPr>
+          <a:xfrm>
+            <a:off x="4645152" y="5312664"/>
+            <a:ext cx="3127248" cy="658368"/>
+          </a:xfrm>
+          <a:prstGeom prst="rect">
+            <a:avLst/>
+          </a:prstGeom>
+          <a:noFill/>
+          <a:ln/>
+        </p:spPr>
+        <p:txBody>
+          <a:bodyPr wrap="square" lIns="0" tIns="0" rIns="0" bIns="0" rtlCol="0" anchor="t"/>
+          <a:lstStyle/>
+          <a:p>
+            <a:pPr indent="0" marL="0">
+              <a:lnSpc>
+                <a:spcPct val="106000"/>
+              </a:lnSpc>
+              <a:buNone/>
+            </a:pPr>
+            <a:r>
+              <a:rPr lang="en-US" sz="1050" dirty="0">
+                <a:solidFill>
+                  <a:srgbClr val="9DB2C6"/>
+                </a:solidFill>
+                <a:latin typeface="Calibri" pitchFamily="34" charset="0"/>
+                <a:ea typeface="Calibri" pitchFamily="34" charset="-122"/>
+                <a:cs typeface="Calibri" pitchFamily="34" charset="-120"/>
+              </a:rPr>
+              <a:t>Pracujeme jen s agregáty na úroveň zóny a sítě. Žádná osobní data, žádné sledování jednotlivých vozidel ani lidí.</a:t>
+            </a:r>
+            <a:endParaRPr lang="en-US" sz="1050" dirty="0"/>
+          </a:p>
+        </p:txBody>
+      </p:sp>
+      <p:sp>
+        <p:nvSpPr>
+          <p:cNvPr id="36" name="Shape 29"/>
+          <p:cNvSpPr/>
+          <p:nvPr/>
+        </p:nvSpPr>
+        <p:spPr>
+          <a:xfrm>
+            <a:off x="8138160" y="4398264"/>
+            <a:ext cx="3584448" cy="1627632"/>
+          </a:xfrm>
+          <a:prstGeom prst="rect">
+            <a:avLst/>
+          </a:prstGeom>
+          <a:solidFill>
+            <a:srgbClr val="18283F"/>
+          </a:solidFill>
+          <a:ln/>
+          <a:effectLst>
+            <a:outerShdw sx="100000" sy="100000" kx="0" ky="0" algn="bl" rotWithShape="0" blurRad="114300" dist="38100" dir="5400000">
+              <a:srgbClr val="000000">
+                <a:alpha val="22000"/>
+              </a:srgbClr>
+            </a:outerShdw>
+          </a:effectLst>
+        </p:spPr>
+      </p:sp>
+      <p:sp>
+        <p:nvSpPr>
+          <p:cNvPr id="37" name="Shape 30"/>
+          <p:cNvSpPr/>
+          <p:nvPr/>
+        </p:nvSpPr>
+        <p:spPr>
+          <a:xfrm>
+            <a:off x="8138160" y="4398264"/>
+            <a:ext cx="3584448" cy="73152"/>
+          </a:xfrm>
+          <a:prstGeom prst="rect">
+            <a:avLst/>
+          </a:prstGeom>
+          <a:solidFill>
+            <a:srgbClr val="19C37D"/>
+          </a:solidFill>
+          <a:ln/>
+        </p:spPr>
+      </p:sp>
+      <p:sp>
+        <p:nvSpPr>
+          <p:cNvPr id="38" name="Shape 31"/>
+          <p:cNvSpPr/>
+          <p:nvPr/>
+        </p:nvSpPr>
+        <p:spPr>
+          <a:xfrm>
+            <a:off x="8375904" y="4654296"/>
+            <a:ext cx="603504" cy="603504"/>
+          </a:xfrm>
+          <a:prstGeom prst="roundRect">
+            <a:avLst>
+              <a:gd name="adj" fmla="val 22000"/>
+            </a:avLst>
+          </a:prstGeom>
+          <a:solidFill>
+            <a:srgbClr val="0E9E63"/>
+          </a:solidFill>
+          <a:ln/>
+        </p:spPr>
+      </p:sp>
+      <p:pic>
+        <p:nvPicPr>
+          <p:cNvPr id="39" name="Image 5" descr="preencoded.png">    </p:cNvPr>
+          <p:cNvPicPr>
+            <a:picLocks noChangeAspect="1"/>
+          </p:cNvPicPr>
+          <p:nvPr/>
+        </p:nvPicPr>
+        <p:blipFill>
+          <a:blip r:embed="rId6"/>
+          <a:stretch>
+            <a:fillRect/>
+          </a:stretch>
+        </p:blipFill>
+        <p:spPr>
+          <a:xfrm>
+            <a:off x="8532815" y="4811207"/>
+            <a:ext cx="289682" cy="289682"/>
+          </a:xfrm>
+          <a:prstGeom prst="rect">
+            <a:avLst/>
+          </a:prstGeom>
+        </p:spPr>
+      </p:pic>
+      <p:sp>
+        <p:nvSpPr>
+          <p:cNvPr id="40" name="Text 32"/>
+          <p:cNvSpPr/>
+          <p:nvPr/>
+        </p:nvSpPr>
+        <p:spPr>
+          <a:xfrm>
+            <a:off x="9098280" y="4690872"/>
+            <a:ext cx="2441448" cy="548640"/>
+          </a:xfrm>
+          <a:prstGeom prst="rect">
+            <a:avLst/>
+          </a:prstGeom>
+          <a:noFill/>
+          <a:ln/>
+        </p:spPr>
+        <p:txBody>
+          <a:bodyPr wrap="square" lIns="0" tIns="0" rIns="0" bIns="0" rtlCol="0" anchor="ctr"/>
+          <a:lstStyle/>
+          <a:p>
+            <a:pPr indent="0" marL="0">
+              <a:buNone/>
+            </a:pPr>
+            <a:r>
+              <a:rPr lang="en-US" sz="1400" b="1" dirty="0">
+                <a:solidFill>
+                  <a:srgbClr val="FFFFFF"/>
+                </a:solidFill>
+                <a:latin typeface="Georgia" pitchFamily="34" charset="0"/>
+                <a:ea typeface="Georgia" pitchFamily="34" charset="-122"/>
+                <a:cs typeface="Georgia" pitchFamily="34" charset="-120"/>
+              </a:rPr>
+              <a:t>Vysvětlitelnost</a:t>
+            </a:r>
+            <a:endParaRPr lang="en-US" sz="1400" dirty="0"/>
+          </a:p>
+        </p:txBody>
+      </p:sp>
+      <p:sp>
+        <p:nvSpPr>
+          <p:cNvPr id="41" name="Text 33"/>
+          <p:cNvSpPr/>
+          <p:nvPr/>
+        </p:nvSpPr>
+        <p:spPr>
+          <a:xfrm>
+            <a:off x="8394192" y="5312664"/>
+            <a:ext cx="3127248" cy="658368"/>
+          </a:xfrm>
+          <a:prstGeom prst="rect">
+            <a:avLst/>
+          </a:prstGeom>
+          <a:noFill/>
+          <a:ln/>
+        </p:spPr>
+        <p:txBody>
+          <a:bodyPr wrap="square" lIns="0" tIns="0" rIns="0" bIns="0" rtlCol="0" anchor="t"/>
+          <a:lstStyle/>
+          <a:p>
+            <a:pPr indent="0" marL="0">
+              <a:lnSpc>
+                <a:spcPct val="106000"/>
+              </a:lnSpc>
+              <a:buNone/>
+            </a:pPr>
+            <a:r>
+              <a:rPr lang="en-US" sz="1050" dirty="0">
+                <a:solidFill>
+                  <a:srgbClr val="9DB2C6"/>
+                </a:solidFill>
+                <a:latin typeface="Calibri" pitchFamily="34" charset="0"/>
+                <a:ea typeface="Calibri" pitchFamily="34" charset="-122"/>
+                <a:cs typeface="Calibri" pitchFamily="34" charset="-120"/>
+              </a:rPr>
+              <a:t>U každé zóny „proč tady“ (top důvody + feature importance). Žádný black-box — město i občan vidí, na čem skóre stojí.</a:t>
+            </a:r>
+            <a:endParaRPr lang="en-US" sz="1050" dirty="0"/>
+          </a:p>
+        </p:txBody>
+      </p:sp>
+      <p:sp>
+        <p:nvSpPr>
+          <p:cNvPr id="42" name="Text 34"/>
+          <p:cNvSpPr/>
+          <p:nvPr/>
+        </p:nvSpPr>
+        <p:spPr>
+          <a:xfrm>
+            <a:off x="457200" y="6473952"/>
+            <a:ext cx="5486400" cy="274320"/>
+          </a:xfrm>
+          <a:prstGeom prst="rect">
+            <a:avLst/>
+          </a:prstGeom>
+          <a:noFill/>
+          <a:ln/>
+        </p:spPr>
+        <p:txBody>
+          <a:bodyPr wrap="square" lIns="0" tIns="0" rIns="0" bIns="0" rtlCol="0" anchor="ctr"/>
+          <a:lstStyle/>
+          <a:p>
+            <a:pPr algn="l" indent="0" marL="0">
+              <a:buNone/>
+            </a:pPr>
+            <a:r>
+              <a:rPr lang="en-US" sz="1050" b="1" dirty="0">
+                <a:solidFill>
+                  <a:srgbClr val="FFFFFF"/>
+                </a:solidFill>
+                <a:latin typeface="Calibri" pitchFamily="34" charset="0"/>
+                <a:ea typeface="Calibri" pitchFamily="34" charset="-122"/>
+                <a:cs typeface="Calibri" pitchFamily="34" charset="-120"/>
+              </a:rPr>
+              <a:t>VoltPlán</a:t>
+            </a:r>
+            <a:pPr algn="l" indent="0" marL="0">
+              <a:buNone/>
+            </a:pPr>
+            <a:r>
+              <a:rPr lang="en-US" sz="1050" dirty="0">
+                <a:solidFill>
+                  <a:srgbClr val="9DB2C6"/>
+                </a:solidFill>
+                <a:latin typeface="Calibri" pitchFamily="34" charset="0"/>
+                <a:ea typeface="Calibri" pitchFamily="34" charset="-122"/>
+                <a:cs typeface="Calibri" pitchFamily="34" charset="-120"/>
+              </a:rPr>
+              <a:t>  ·  AIO_PHA-02-PHA</a:t>
+            </a:r>
+            <a:endParaRPr lang="en-US" sz="1050" dirty="0"/>
+          </a:p>
+        </p:txBody>
+      </p:sp>
+      <p:sp>
+        <p:nvSpPr>
+          <p:cNvPr id="43" name="Text 35"/>
+          <p:cNvSpPr/>
+          <p:nvPr/>
+        </p:nvSpPr>
+        <p:spPr>
+          <a:xfrm>
+            <a:off x="10637215" y="6473952"/>
+            <a:ext cx="1097280" cy="274320"/>
+          </a:xfrm>
+          <a:prstGeom prst="rect">
+            <a:avLst/>
+          </a:prstGeom>
+          <a:noFill/>
+          <a:ln/>
+        </p:spPr>
+        <p:txBody>
+          <a:bodyPr wrap="square" lIns="0" tIns="0" rIns="0" bIns="0" rtlCol="0" anchor="ctr"/>
+          <a:lstStyle/>
+          <a:p>
+            <a:pPr algn="r" indent="0" marL="0">
+              <a:buNone/>
+            </a:pPr>
+            <a:r>
+              <a:rPr lang="en-US" sz="1050" dirty="0">
+                <a:solidFill>
+                  <a:srgbClr val="9DB2C6"/>
+                </a:solidFill>
+                <a:latin typeface="Calibri" pitchFamily="34" charset="0"/>
+                <a:ea typeface="Calibri" pitchFamily="34" charset="-122"/>
+                <a:cs typeface="Calibri" pitchFamily="34" charset="-120"/>
+              </a:rPr>
+              <a:t>11 / 12</a:t>
+            </a:r>
+            <a:endParaRPr lang="en-US" sz="1050" dirty="0"/>
+          </a:p>
+        </p:txBody>
+      </p:sp>
+    </p:spTree>
+  </p:cSld>
+  <p:clrMapOvr>
+    <a:masterClrMapping/>
+  </p:clrMapOvr>
+</p:sld>
+</file>
+
+<file path=ppt/slides/slide12.xml><?xml version="1.0" encoding="utf-8"?>
+<p:sld xmlns:a="http://schemas.openxmlformats.org/drawingml/2006/main" xmlns:r="http://schemas.openxmlformats.org/officeDocument/2006/relationships" xmlns:p="http://schemas.openxmlformats.org/presentationml/2006/main">
+  <p:cSld name="Slide 12">
+    <p:bg>
+      <p:bgPr>
+        <a:solidFill>
           <a:srgbClr val="0E1726"/>
         </a:solidFill>
       </p:bgPr>
@@ -4072,7 +6575,7 @@
                 <a:ea typeface="Calibri" pitchFamily="34" charset="-122"/>
                 <a:cs typeface="Calibri" pitchFamily="34" charset="-120"/>
               </a:rPr>
-              <a:t>02 / 10</a:t>
+              <a:t>02 / 12</a:t>
             </a:r>
             <a:endParaRPr lang="en-US" sz="1050" dirty="0"/>
           </a:p>
@@ -5505,7 +8008,7 @@
                 <a:ea typeface="Calibri" pitchFamily="34" charset="-122"/>
                 <a:cs typeface="Calibri" pitchFamily="34" charset="-120"/>
               </a:rPr>
-              <a:t>03 / 10</a:t>
+              <a:t>03 / 12</a:t>
             </a:r>
             <a:endParaRPr lang="en-US" sz="1050" dirty="0"/>
           </a:p>
@@ -6622,7 +9125,7 @@
                 <a:ea typeface="Calibri" pitchFamily="34" charset="-122"/>
                 <a:cs typeface="Calibri" pitchFamily="34" charset="-120"/>
               </a:rPr>
-              <a:t>04 / 10</a:t>
+              <a:t>04 / 12</a:t>
             </a:r>
             <a:endParaRPr lang="en-US" sz="1050" dirty="0"/>
           </a:p>
@@ -6639,6 +9142,2530 @@
 <file path=ppt/slides/slide5.xml><?xml version="1.0" encoding="utf-8"?>
 <p:sld xmlns:a="http://schemas.openxmlformats.org/drawingml/2006/main" xmlns:r="http://schemas.openxmlformats.org/officeDocument/2006/relationships" xmlns:p="http://schemas.openxmlformats.org/presentationml/2006/main">
   <p:cSld name="Slide 5">
+    <p:bg>
+      <p:bgPr>
+        <a:solidFill>
+          <a:srgbClr val="F3F6F9"/>
+        </a:solidFill>
+      </p:bgPr>
+    </p:bg>
+    <p:spTree>
+      <p:nvGrpSpPr>
+        <p:cNvPr id="1" name=""/>
+        <p:cNvGrpSpPr/>
+        <p:nvPr/>
+      </p:nvGrpSpPr>
+      <p:grpSpPr>
+        <a:xfrm>
+          <a:off x="0" y="0"/>
+          <a:ext cx="0" cy="0"/>
+          <a:chOff x="0" y="0"/>
+          <a:chExt cx="0" cy="0"/>
+        </a:xfrm>
+      </p:grpSpPr>
+      <p:sp>
+        <p:nvSpPr>
+          <p:cNvPr id="2" name="Text 0"/>
+          <p:cNvSpPr/>
+          <p:nvPr/>
+        </p:nvSpPr>
+        <p:spPr>
+          <a:xfrm>
+            <a:off x="640080" y="502920"/>
+            <a:ext cx="10058400" cy="274320"/>
+          </a:xfrm>
+          <a:prstGeom prst="rect">
+            <a:avLst/>
+          </a:prstGeom>
+          <a:noFill/>
+          <a:ln/>
+        </p:spPr>
+        <p:txBody>
+          <a:bodyPr wrap="square" lIns="0" tIns="0" rIns="0" bIns="0" rtlCol="0" anchor="ctr"/>
+          <a:lstStyle/>
+          <a:p>
+            <a:pPr algn="l" indent="0" marL="0">
+              <a:buNone/>
+            </a:pPr>
+            <a:r>
+              <a:rPr lang="en-US" sz="1200" b="1" spc="300" kern="0" dirty="0">
+                <a:solidFill>
+                  <a:srgbClr val="19C37D"/>
+                </a:solidFill>
+                <a:latin typeface="Calibri" pitchFamily="34" charset="0"/>
+                <a:ea typeface="Calibri" pitchFamily="34" charset="-122"/>
+                <a:cs typeface="Calibri" pitchFamily="34" charset="-120"/>
+              </a:rPr>
+              <a:t>DATOVÁ PIPELINE</a:t>
+            </a:r>
+            <a:endParaRPr lang="en-US" sz="1200" dirty="0"/>
+          </a:p>
+        </p:txBody>
+      </p:sp>
+      <p:sp>
+        <p:nvSpPr>
+          <p:cNvPr id="3" name="Text 1"/>
+          <p:cNvSpPr/>
+          <p:nvPr/>
+        </p:nvSpPr>
+        <p:spPr>
+          <a:xfrm>
+            <a:off x="640080" y="795528"/>
+            <a:ext cx="8229600" cy="1005840"/>
+          </a:xfrm>
+          <a:prstGeom prst="rect">
+            <a:avLst/>
+          </a:prstGeom>
+          <a:noFill/>
+          <a:ln/>
+        </p:spPr>
+        <p:txBody>
+          <a:bodyPr wrap="square" lIns="0" tIns="0" rIns="0" bIns="0" rtlCol="0" anchor="t"/>
+          <a:lstStyle/>
+          <a:p>
+            <a:pPr algn="l" indent="0" marL="0">
+              <a:lnSpc>
+                <a:spcPct val="102000"/>
+              </a:lnSpc>
+              <a:buNone/>
+            </a:pPr>
+            <a:r>
+              <a:rPr lang="en-US" sz="3100" b="1" dirty="0">
+                <a:solidFill>
+                  <a:srgbClr val="0E1726"/>
+                </a:solidFill>
+                <a:latin typeface="Georgia" pitchFamily="34" charset="0"/>
+                <a:ea typeface="Georgia" pitchFamily="34" charset="-122"/>
+                <a:cs typeface="Georgia" pitchFamily="34" charset="-120"/>
+              </a:rPr>
+              <a:t>Sami si data sbíráme — automaticky</a:t>
+            </a:r>
+            <a:endParaRPr lang="en-US" sz="3100" dirty="0"/>
+          </a:p>
+          <a:p>
+            <a:pPr algn="l" indent="0" marL="0">
+              <a:lnSpc>
+                <a:spcPct val="102000"/>
+              </a:lnSpc>
+              <a:buNone/>
+            </a:pPr>
+            <a:r>
+              <a:rPr lang="en-US" sz="3100" b="1" dirty="0">
+                <a:solidFill>
+                  <a:srgbClr val="0E1726"/>
+                </a:solidFill>
+                <a:latin typeface="Georgia" pitchFamily="34" charset="0"/>
+                <a:ea typeface="Georgia" pitchFamily="34" charset="-122"/>
+                <a:cs typeface="Georgia" pitchFamily="34" charset="-120"/>
+              </a:rPr>
+              <a:t>a pořád dokola.</a:t>
+            </a:r>
+            <a:endParaRPr lang="en-US" sz="3100" dirty="0"/>
+          </a:p>
+        </p:txBody>
+      </p:sp>
+      <p:sp>
+        <p:nvSpPr>
+          <p:cNvPr id="4" name="Text 2"/>
+          <p:cNvSpPr/>
+          <p:nvPr/>
+        </p:nvSpPr>
+        <p:spPr>
+          <a:xfrm>
+            <a:off x="658368" y="2103120"/>
+            <a:ext cx="10881360" cy="868680"/>
+          </a:xfrm>
+          <a:prstGeom prst="rect">
+            <a:avLst/>
+          </a:prstGeom>
+          <a:noFill/>
+          <a:ln/>
+        </p:spPr>
+        <p:txBody>
+          <a:bodyPr wrap="square" lIns="0" tIns="0" rIns="0" bIns="0" rtlCol="0" anchor="t"/>
+          <a:lstStyle/>
+          <a:p>
+            <a:pPr algn="l" indent="0" marL="0">
+              <a:lnSpc>
+                <a:spcPct val="115000"/>
+              </a:lnSpc>
+              <a:buNone/>
+            </a:pPr>
+            <a:r>
+              <a:rPr lang="en-US" sz="1450" dirty="0">
+                <a:solidFill>
+                  <a:srgbClr val="55626F"/>
+                </a:solidFill>
+                <a:latin typeface="Calibri" pitchFamily="34" charset="0"/>
+                <a:ea typeface="Calibri" pitchFamily="34" charset="-122"/>
+                <a:cs typeface="Calibri" pitchFamily="34" charset="-120"/>
+              </a:rPr>
+              <a:t>VoltPlán neběží na jednorázovém exportu. Noční konektory stahují data z 8 zdrojů — přes API i headless scraping tam, kde API není — a samy je čistí, validují a verzují. Tím služba „žije zítra“: model se přeučuje na čerstvých datech bez ruční práce.</a:t>
+            </a:r>
+            <a:endParaRPr lang="en-US" sz="1450" dirty="0"/>
+          </a:p>
+        </p:txBody>
+      </p:sp>
+      <p:sp>
+        <p:nvSpPr>
+          <p:cNvPr id="5" name="Text 3"/>
+          <p:cNvSpPr/>
+          <p:nvPr/>
+        </p:nvSpPr>
+        <p:spPr>
+          <a:xfrm>
+            <a:off x="658368" y="3063240"/>
+            <a:ext cx="7315200" cy="274320"/>
+          </a:xfrm>
+          <a:prstGeom prst="rect">
+            <a:avLst/>
+          </a:prstGeom>
+          <a:noFill/>
+          <a:ln/>
+        </p:spPr>
+        <p:txBody>
+          <a:bodyPr wrap="square" lIns="0" tIns="0" rIns="0" bIns="0" rtlCol="0" anchor="ctr"/>
+          <a:lstStyle/>
+          <a:p>
+            <a:pPr indent="0" marL="0">
+              <a:buNone/>
+            </a:pPr>
+            <a:r>
+              <a:rPr lang="en-US" sz="1200" b="1" spc="150" kern="0" dirty="0">
+                <a:solidFill>
+                  <a:srgbClr val="1FA8C9"/>
+                </a:solidFill>
+                <a:latin typeface="Calibri" pitchFamily="34" charset="0"/>
+                <a:ea typeface="Calibri" pitchFamily="34" charset="-122"/>
+                <a:cs typeface="Calibri" pitchFamily="34" charset="-120"/>
+              </a:rPr>
+              <a:t>SCRAPOVANÉ ZDROJE  ·  8 KONEKTORŮ</a:t>
+            </a:r>
+            <a:endParaRPr lang="en-US" sz="1200" dirty="0"/>
+          </a:p>
+        </p:txBody>
+      </p:sp>
+      <p:sp>
+        <p:nvSpPr>
+          <p:cNvPr id="6" name="Shape 4"/>
+          <p:cNvSpPr/>
+          <p:nvPr/>
+        </p:nvSpPr>
+        <p:spPr>
+          <a:xfrm>
+            <a:off x="640080" y="3429000"/>
+            <a:ext cx="2679192" cy="1051560"/>
+          </a:xfrm>
+          <a:prstGeom prst="rect">
+            <a:avLst/>
+          </a:prstGeom>
+          <a:solidFill>
+            <a:srgbClr val="FFFFFF"/>
+          </a:solidFill>
+          <a:ln w="12700">
+            <a:solidFill>
+              <a:srgbClr val="E1E8EF"/>
+            </a:solidFill>
+            <a:prstDash val="solid"/>
+          </a:ln>
+          <a:effectLst>
+            <a:outerShdw sx="100000" sy="100000" kx="0" ky="0" algn="bl" rotWithShape="0" blurRad="76200" dist="25400" dir="5400000">
+              <a:srgbClr val="0E1726">
+                <a:alpha val="10000"/>
+              </a:srgbClr>
+            </a:outerShdw>
+          </a:effectLst>
+        </p:spPr>
+      </p:sp>
+      <p:sp>
+        <p:nvSpPr>
+          <p:cNvPr id="7" name="Shape 5"/>
+          <p:cNvSpPr/>
+          <p:nvPr/>
+        </p:nvSpPr>
+        <p:spPr>
+          <a:xfrm>
+            <a:off x="640080" y="3429000"/>
+            <a:ext cx="73152" cy="1051560"/>
+          </a:xfrm>
+          <a:prstGeom prst="rect">
+            <a:avLst/>
+          </a:prstGeom>
+          <a:solidFill>
+            <a:srgbClr val="1FA8C9"/>
+          </a:solidFill>
+          <a:ln/>
+        </p:spPr>
+      </p:sp>
+      <p:sp>
+        <p:nvSpPr>
+          <p:cNvPr id="8" name="Shape 6"/>
+          <p:cNvSpPr/>
+          <p:nvPr/>
+        </p:nvSpPr>
+        <p:spPr>
+          <a:xfrm>
+            <a:off x="841248" y="3630168"/>
+            <a:ext cx="548640" cy="548640"/>
+          </a:xfrm>
+          <a:prstGeom prst="roundRect">
+            <a:avLst>
+              <a:gd name="adj" fmla="val 22000"/>
+            </a:avLst>
+          </a:prstGeom>
+          <a:solidFill>
+            <a:srgbClr val="0E1726"/>
+          </a:solidFill>
+          <a:ln/>
+        </p:spPr>
+      </p:sp>
+      <p:pic>
+        <p:nvPicPr>
+          <p:cNvPr id="9" name="Image 0" descr="preencoded.png">    </p:cNvPr>
+          <p:cNvPicPr>
+            <a:picLocks noChangeAspect="1"/>
+          </p:cNvPicPr>
+          <p:nvPr/>
+        </p:nvPicPr>
+        <p:blipFill>
+          <a:blip r:embed="rId1"/>
+          <a:stretch>
+            <a:fillRect/>
+          </a:stretch>
+        </p:blipFill>
+        <p:spPr>
+          <a:xfrm>
+            <a:off x="983894" y="3772814"/>
+            <a:ext cx="263347" cy="263347"/>
+          </a:xfrm>
+          <a:prstGeom prst="rect">
+            <a:avLst/>
+          </a:prstGeom>
+        </p:spPr>
+      </p:pic>
+      <p:sp>
+        <p:nvSpPr>
+          <p:cNvPr id="10" name="Text 7"/>
+          <p:cNvSpPr/>
+          <p:nvPr/>
+        </p:nvSpPr>
+        <p:spPr>
+          <a:xfrm>
+            <a:off x="1508760" y="3575304"/>
+            <a:ext cx="1719072" cy="274320"/>
+          </a:xfrm>
+          <a:prstGeom prst="rect">
+            <a:avLst/>
+          </a:prstGeom>
+          <a:noFill/>
+          <a:ln/>
+        </p:spPr>
+        <p:txBody>
+          <a:bodyPr wrap="square" lIns="0" tIns="0" rIns="0" bIns="0" rtlCol="0" anchor="ctr"/>
+          <a:lstStyle/>
+          <a:p>
+            <a:pPr indent="0" marL="0">
+              <a:buNone/>
+            </a:pPr>
+            <a:r>
+              <a:rPr lang="en-US" sz="1200" b="1" dirty="0">
+                <a:solidFill>
+                  <a:srgbClr val="0E1726"/>
+                </a:solidFill>
+                <a:latin typeface="Calibri" pitchFamily="34" charset="0"/>
+                <a:ea typeface="Calibri" pitchFamily="34" charset="-122"/>
+                <a:cs typeface="Calibri" pitchFamily="34" charset="-120"/>
+              </a:rPr>
+              <a:t>Golemio API</a:t>
+            </a:r>
+            <a:endParaRPr lang="en-US" sz="1200" dirty="0"/>
+          </a:p>
+        </p:txBody>
+      </p:sp>
+      <p:sp>
+        <p:nvSpPr>
+          <p:cNvPr id="11" name="Text 8"/>
+          <p:cNvSpPr/>
+          <p:nvPr/>
+        </p:nvSpPr>
+        <p:spPr>
+          <a:xfrm>
+            <a:off x="1508760" y="3831336"/>
+            <a:ext cx="1719072" cy="201168"/>
+          </a:xfrm>
+          <a:prstGeom prst="rect">
+            <a:avLst/>
+          </a:prstGeom>
+          <a:noFill/>
+          <a:ln/>
+        </p:spPr>
+        <p:txBody>
+          <a:bodyPr wrap="square" lIns="0" tIns="0" rIns="0" bIns="0" rtlCol="0" anchor="ctr"/>
+          <a:lstStyle/>
+          <a:p>
+            <a:pPr indent="0" marL="0">
+              <a:buNone/>
+            </a:pPr>
+            <a:r>
+              <a:rPr lang="en-US" sz="850" b="1" spc="100" kern="0" dirty="0">
+                <a:solidFill>
+                  <a:srgbClr val="0E9E63"/>
+                </a:solidFill>
+                <a:latin typeface="Calibri" pitchFamily="34" charset="0"/>
+                <a:ea typeface="Calibri" pitchFamily="34" charset="-122"/>
+                <a:cs typeface="Calibri" pitchFamily="34" charset="-120"/>
+              </a:rPr>
+              <a:t>real-time</a:t>
+            </a:r>
+            <a:endParaRPr lang="en-US" sz="850" dirty="0"/>
+          </a:p>
+        </p:txBody>
+      </p:sp>
+      <p:sp>
+        <p:nvSpPr>
+          <p:cNvPr id="12" name="Text 9"/>
+          <p:cNvSpPr/>
+          <p:nvPr/>
+        </p:nvSpPr>
+        <p:spPr>
+          <a:xfrm>
+            <a:off x="841248" y="4087368"/>
+            <a:ext cx="2359152" cy="347472"/>
+          </a:xfrm>
+          <a:prstGeom prst="rect">
+            <a:avLst/>
+          </a:prstGeom>
+          <a:noFill/>
+          <a:ln/>
+        </p:spPr>
+        <p:txBody>
+          <a:bodyPr wrap="square" lIns="0" tIns="0" rIns="0" bIns="0" rtlCol="0" anchor="t"/>
+          <a:lstStyle/>
+          <a:p>
+            <a:pPr indent="0" marL="0">
+              <a:lnSpc>
+                <a:spcPct val="98000"/>
+              </a:lnSpc>
+              <a:buNone/>
+            </a:pPr>
+            <a:r>
+              <a:rPr lang="en-US" sz="1000" dirty="0">
+                <a:solidFill>
+                  <a:srgbClr val="55626F"/>
+                </a:solidFill>
+                <a:latin typeface="Calibri" pitchFamily="34" charset="0"/>
+                <a:ea typeface="Calibri" pitchFamily="34" charset="-122"/>
+                <a:cs typeface="Calibri" pitchFamily="34" charset="-120"/>
+              </a:rPr>
+              <a:t>parkování, polohy PID, Waze dojezdy</a:t>
+            </a:r>
+            <a:endParaRPr lang="en-US" sz="1000" dirty="0"/>
+          </a:p>
+        </p:txBody>
+      </p:sp>
+      <p:sp>
+        <p:nvSpPr>
+          <p:cNvPr id="13" name="Shape 10"/>
+          <p:cNvSpPr/>
+          <p:nvPr/>
+        </p:nvSpPr>
+        <p:spPr>
+          <a:xfrm>
+            <a:off x="3474720" y="3429000"/>
+            <a:ext cx="2679192" cy="1051560"/>
+          </a:xfrm>
+          <a:prstGeom prst="rect">
+            <a:avLst/>
+          </a:prstGeom>
+          <a:solidFill>
+            <a:srgbClr val="FFFFFF"/>
+          </a:solidFill>
+          <a:ln w="12700">
+            <a:solidFill>
+              <a:srgbClr val="E1E8EF"/>
+            </a:solidFill>
+            <a:prstDash val="solid"/>
+          </a:ln>
+          <a:effectLst>
+            <a:outerShdw sx="100000" sy="100000" kx="0" ky="0" algn="bl" rotWithShape="0" blurRad="76200" dist="25400" dir="5400000">
+              <a:srgbClr val="0E1726">
+                <a:alpha val="10000"/>
+              </a:srgbClr>
+            </a:outerShdw>
+          </a:effectLst>
+        </p:spPr>
+      </p:sp>
+      <p:sp>
+        <p:nvSpPr>
+          <p:cNvPr id="14" name="Shape 11"/>
+          <p:cNvSpPr/>
+          <p:nvPr/>
+        </p:nvSpPr>
+        <p:spPr>
+          <a:xfrm>
+            <a:off x="3474720" y="3429000"/>
+            <a:ext cx="73152" cy="1051560"/>
+          </a:xfrm>
+          <a:prstGeom prst="rect">
+            <a:avLst/>
+          </a:prstGeom>
+          <a:solidFill>
+            <a:srgbClr val="1FA8C9"/>
+          </a:solidFill>
+          <a:ln/>
+        </p:spPr>
+      </p:sp>
+      <p:sp>
+        <p:nvSpPr>
+          <p:cNvPr id="15" name="Shape 12"/>
+          <p:cNvSpPr/>
+          <p:nvPr/>
+        </p:nvSpPr>
+        <p:spPr>
+          <a:xfrm>
+            <a:off x="3675888" y="3630168"/>
+            <a:ext cx="548640" cy="548640"/>
+          </a:xfrm>
+          <a:prstGeom prst="roundRect">
+            <a:avLst>
+              <a:gd name="adj" fmla="val 22000"/>
+            </a:avLst>
+          </a:prstGeom>
+          <a:solidFill>
+            <a:srgbClr val="0E1726"/>
+          </a:solidFill>
+          <a:ln/>
+        </p:spPr>
+      </p:sp>
+      <p:pic>
+        <p:nvPicPr>
+          <p:cNvPr id="16" name="Image 1" descr="preencoded.png">    </p:cNvPr>
+          <p:cNvPicPr>
+            <a:picLocks noChangeAspect="1"/>
+          </p:cNvPicPr>
+          <p:nvPr/>
+        </p:nvPicPr>
+        <p:blipFill>
+          <a:blip r:embed="rId2"/>
+          <a:stretch>
+            <a:fillRect/>
+          </a:stretch>
+        </p:blipFill>
+        <p:spPr>
+          <a:xfrm>
+            <a:off x="3818534" y="3772814"/>
+            <a:ext cx="263347" cy="263347"/>
+          </a:xfrm>
+          <a:prstGeom prst="rect">
+            <a:avLst/>
+          </a:prstGeom>
+        </p:spPr>
+      </p:pic>
+      <p:sp>
+        <p:nvSpPr>
+          <p:cNvPr id="17" name="Text 13"/>
+          <p:cNvSpPr/>
+          <p:nvPr/>
+        </p:nvSpPr>
+        <p:spPr>
+          <a:xfrm>
+            <a:off x="4343400" y="3575304"/>
+            <a:ext cx="1719072" cy="274320"/>
+          </a:xfrm>
+          <a:prstGeom prst="rect">
+            <a:avLst/>
+          </a:prstGeom>
+          <a:noFill/>
+          <a:ln/>
+        </p:spPr>
+        <p:txBody>
+          <a:bodyPr wrap="square" lIns="0" tIns="0" rIns="0" bIns="0" rtlCol="0" anchor="ctr"/>
+          <a:lstStyle/>
+          <a:p>
+            <a:pPr indent="0" marL="0">
+              <a:buNone/>
+            </a:pPr>
+            <a:r>
+              <a:rPr lang="en-US" sz="1200" b="1" dirty="0">
+                <a:solidFill>
+                  <a:srgbClr val="0E1726"/>
+                </a:solidFill>
+                <a:latin typeface="Calibri" pitchFamily="34" charset="0"/>
+                <a:ea typeface="Calibri" pitchFamily="34" charset="-122"/>
+                <a:cs typeface="Calibri" pitchFamily="34" charset="-120"/>
+              </a:rPr>
+              <a:t>opendata.praha.eu</a:t>
+            </a:r>
+            <a:endParaRPr lang="en-US" sz="1200" dirty="0"/>
+          </a:p>
+        </p:txBody>
+      </p:sp>
+      <p:sp>
+        <p:nvSpPr>
+          <p:cNvPr id="18" name="Text 14"/>
+          <p:cNvSpPr/>
+          <p:nvPr/>
+        </p:nvSpPr>
+        <p:spPr>
+          <a:xfrm>
+            <a:off x="4343400" y="3831336"/>
+            <a:ext cx="1719072" cy="201168"/>
+          </a:xfrm>
+          <a:prstGeom prst="rect">
+            <a:avLst/>
+          </a:prstGeom>
+          <a:noFill/>
+          <a:ln/>
+        </p:spPr>
+        <p:txBody>
+          <a:bodyPr wrap="square" lIns="0" tIns="0" rIns="0" bIns="0" rtlCol="0" anchor="ctr"/>
+          <a:lstStyle/>
+          <a:p>
+            <a:pPr indent="0" marL="0">
+              <a:buNone/>
+            </a:pPr>
+            <a:r>
+              <a:rPr lang="en-US" sz="850" b="1" spc="100" kern="0" dirty="0">
+                <a:solidFill>
+                  <a:srgbClr val="0E9E63"/>
+                </a:solidFill>
+                <a:latin typeface="Calibri" pitchFamily="34" charset="0"/>
+                <a:ea typeface="Calibri" pitchFamily="34" charset="-122"/>
+                <a:cs typeface="Calibri" pitchFamily="34" charset="-120"/>
+              </a:rPr>
+              <a:t>měsíčně</a:t>
+            </a:r>
+            <a:endParaRPr lang="en-US" sz="850" dirty="0"/>
+          </a:p>
+        </p:txBody>
+      </p:sp>
+      <p:sp>
+        <p:nvSpPr>
+          <p:cNvPr id="19" name="Text 15"/>
+          <p:cNvSpPr/>
+          <p:nvPr/>
+        </p:nvSpPr>
+        <p:spPr>
+          <a:xfrm>
+            <a:off x="3675888" y="4087368"/>
+            <a:ext cx="2359152" cy="347472"/>
+          </a:xfrm>
+          <a:prstGeom prst="rect">
+            <a:avLst/>
+          </a:prstGeom>
+          <a:noFill/>
+          <a:ln/>
+        </p:spPr>
+        <p:txBody>
+          <a:bodyPr wrap="square" lIns="0" tIns="0" rIns="0" bIns="0" rtlCol="0" anchor="t"/>
+          <a:lstStyle/>
+          <a:p>
+            <a:pPr indent="0" marL="0">
+              <a:lnSpc>
+                <a:spcPct val="98000"/>
+              </a:lnSpc>
+              <a:buNone/>
+            </a:pPr>
+            <a:r>
+              <a:rPr lang="en-US" sz="1000" dirty="0">
+                <a:solidFill>
+                  <a:srgbClr val="55626F"/>
+                </a:solidFill>
+                <a:latin typeface="Calibri" pitchFamily="34" charset="0"/>
+                <a:ea typeface="Calibri" pitchFamily="34" charset="-122"/>
+                <a:cs typeface="Calibri" pitchFamily="34" charset="-120"/>
+              </a:rPr>
+              <a:t>RÚIAN, územní plán, landuse</a:t>
+            </a:r>
+            <a:endParaRPr lang="en-US" sz="1000" dirty="0"/>
+          </a:p>
+        </p:txBody>
+      </p:sp>
+      <p:sp>
+        <p:nvSpPr>
+          <p:cNvPr id="20" name="Shape 16"/>
+          <p:cNvSpPr/>
+          <p:nvPr/>
+        </p:nvSpPr>
+        <p:spPr>
+          <a:xfrm>
+            <a:off x="6309360" y="3429000"/>
+            <a:ext cx="2679192" cy="1051560"/>
+          </a:xfrm>
+          <a:prstGeom prst="rect">
+            <a:avLst/>
+          </a:prstGeom>
+          <a:solidFill>
+            <a:srgbClr val="FFFFFF"/>
+          </a:solidFill>
+          <a:ln w="12700">
+            <a:solidFill>
+              <a:srgbClr val="E1E8EF"/>
+            </a:solidFill>
+            <a:prstDash val="solid"/>
+          </a:ln>
+          <a:effectLst>
+            <a:outerShdw sx="100000" sy="100000" kx="0" ky="0" algn="bl" rotWithShape="0" blurRad="76200" dist="25400" dir="5400000">
+              <a:srgbClr val="0E1726">
+                <a:alpha val="10000"/>
+              </a:srgbClr>
+            </a:outerShdw>
+          </a:effectLst>
+        </p:spPr>
+      </p:sp>
+      <p:sp>
+        <p:nvSpPr>
+          <p:cNvPr id="21" name="Shape 17"/>
+          <p:cNvSpPr/>
+          <p:nvPr/>
+        </p:nvSpPr>
+        <p:spPr>
+          <a:xfrm>
+            <a:off x="6309360" y="3429000"/>
+            <a:ext cx="73152" cy="1051560"/>
+          </a:xfrm>
+          <a:prstGeom prst="rect">
+            <a:avLst/>
+          </a:prstGeom>
+          <a:solidFill>
+            <a:srgbClr val="1FA8C9"/>
+          </a:solidFill>
+          <a:ln/>
+        </p:spPr>
+      </p:sp>
+      <p:sp>
+        <p:nvSpPr>
+          <p:cNvPr id="22" name="Shape 18"/>
+          <p:cNvSpPr/>
+          <p:nvPr/>
+        </p:nvSpPr>
+        <p:spPr>
+          <a:xfrm>
+            <a:off x="6510528" y="3630168"/>
+            <a:ext cx="548640" cy="548640"/>
+          </a:xfrm>
+          <a:prstGeom prst="roundRect">
+            <a:avLst>
+              <a:gd name="adj" fmla="val 22000"/>
+            </a:avLst>
+          </a:prstGeom>
+          <a:solidFill>
+            <a:srgbClr val="0E1726"/>
+          </a:solidFill>
+          <a:ln/>
+        </p:spPr>
+      </p:sp>
+      <p:pic>
+        <p:nvPicPr>
+          <p:cNvPr id="23" name="Image 2" descr="preencoded.png">    </p:cNvPr>
+          <p:cNvPicPr>
+            <a:picLocks noChangeAspect="1"/>
+          </p:cNvPicPr>
+          <p:nvPr/>
+        </p:nvPicPr>
+        <p:blipFill>
+          <a:blip r:embed="rId3"/>
+          <a:stretch>
+            <a:fillRect/>
+          </a:stretch>
+        </p:blipFill>
+        <p:spPr>
+          <a:xfrm>
+            <a:off x="6653174" y="3772814"/>
+            <a:ext cx="263347" cy="263347"/>
+          </a:xfrm>
+          <a:prstGeom prst="rect">
+            <a:avLst/>
+          </a:prstGeom>
+        </p:spPr>
+      </p:pic>
+      <p:sp>
+        <p:nvSpPr>
+          <p:cNvPr id="24" name="Text 19"/>
+          <p:cNvSpPr/>
+          <p:nvPr/>
+        </p:nvSpPr>
+        <p:spPr>
+          <a:xfrm>
+            <a:off x="7178040" y="3575304"/>
+            <a:ext cx="1719072" cy="274320"/>
+          </a:xfrm>
+          <a:prstGeom prst="rect">
+            <a:avLst/>
+          </a:prstGeom>
+          <a:noFill/>
+          <a:ln/>
+        </p:spPr>
+        <p:txBody>
+          <a:bodyPr wrap="square" lIns="0" tIns="0" rIns="0" bIns="0" rtlCol="0" anchor="ctr"/>
+          <a:lstStyle/>
+          <a:p>
+            <a:pPr indent="0" marL="0">
+              <a:buNone/>
+            </a:pPr>
+            <a:r>
+              <a:rPr lang="en-US" sz="1200" b="1" dirty="0">
+                <a:solidFill>
+                  <a:srgbClr val="0E1726"/>
+                </a:solidFill>
+                <a:latin typeface="Calibri" pitchFamily="34" charset="0"/>
+                <a:ea typeface="Calibri" pitchFamily="34" charset="-122"/>
+                <a:cs typeface="Calibri" pitchFamily="34" charset="-120"/>
+              </a:rPr>
+              <a:t>ČSÚ census</a:t>
+            </a:r>
+            <a:endParaRPr lang="en-US" sz="1200" dirty="0"/>
+          </a:p>
+        </p:txBody>
+      </p:sp>
+      <p:sp>
+        <p:nvSpPr>
+          <p:cNvPr id="25" name="Text 20"/>
+          <p:cNvSpPr/>
+          <p:nvPr/>
+        </p:nvSpPr>
+        <p:spPr>
+          <a:xfrm>
+            <a:off x="7178040" y="3831336"/>
+            <a:ext cx="1719072" cy="201168"/>
+          </a:xfrm>
+          <a:prstGeom prst="rect">
+            <a:avLst/>
+          </a:prstGeom>
+          <a:noFill/>
+          <a:ln/>
+        </p:spPr>
+        <p:txBody>
+          <a:bodyPr wrap="square" lIns="0" tIns="0" rIns="0" bIns="0" rtlCol="0" anchor="ctr"/>
+          <a:lstStyle/>
+          <a:p>
+            <a:pPr indent="0" marL="0">
+              <a:buNone/>
+            </a:pPr>
+            <a:r>
+              <a:rPr lang="en-US" sz="850" b="1" spc="100" kern="0" dirty="0">
+                <a:solidFill>
+                  <a:srgbClr val="0E9E63"/>
+                </a:solidFill>
+                <a:latin typeface="Calibri" pitchFamily="34" charset="0"/>
+                <a:ea typeface="Calibri" pitchFamily="34" charset="-122"/>
+                <a:cs typeface="Calibri" pitchFamily="34" charset="-120"/>
+              </a:rPr>
+              <a:t>ročně</a:t>
+            </a:r>
+            <a:endParaRPr lang="en-US" sz="850" dirty="0"/>
+          </a:p>
+        </p:txBody>
+      </p:sp>
+      <p:sp>
+        <p:nvSpPr>
+          <p:cNvPr id="26" name="Text 21"/>
+          <p:cNvSpPr/>
+          <p:nvPr/>
+        </p:nvSpPr>
+        <p:spPr>
+          <a:xfrm>
+            <a:off x="6510528" y="4087368"/>
+            <a:ext cx="2359152" cy="347472"/>
+          </a:xfrm>
+          <a:prstGeom prst="rect">
+            <a:avLst/>
+          </a:prstGeom>
+          <a:noFill/>
+          <a:ln/>
+        </p:spPr>
+        <p:txBody>
+          <a:bodyPr wrap="square" lIns="0" tIns="0" rIns="0" bIns="0" rtlCol="0" anchor="t"/>
+          <a:lstStyle/>
+          <a:p>
+            <a:pPr indent="0" marL="0">
+              <a:lnSpc>
+                <a:spcPct val="98000"/>
+              </a:lnSpc>
+              <a:buNone/>
+            </a:pPr>
+            <a:r>
+              <a:rPr lang="en-US" sz="1000" dirty="0">
+                <a:solidFill>
+                  <a:srgbClr val="55626F"/>
+                </a:solidFill>
+                <a:latin typeface="Calibri" pitchFamily="34" charset="0"/>
+                <a:ea typeface="Calibri" pitchFamily="34" charset="-122"/>
+                <a:cs typeface="Calibri" pitchFamily="34" charset="-120"/>
+              </a:rPr>
+              <a:t>populace, byty bez stání</a:t>
+            </a:r>
+            <a:endParaRPr lang="en-US" sz="1000" dirty="0"/>
+          </a:p>
+        </p:txBody>
+      </p:sp>
+      <p:sp>
+        <p:nvSpPr>
+          <p:cNvPr id="27" name="Shape 22"/>
+          <p:cNvSpPr/>
+          <p:nvPr/>
+        </p:nvSpPr>
+        <p:spPr>
+          <a:xfrm>
+            <a:off x="9144000" y="3429000"/>
+            <a:ext cx="2679192" cy="1051560"/>
+          </a:xfrm>
+          <a:prstGeom prst="rect">
+            <a:avLst/>
+          </a:prstGeom>
+          <a:solidFill>
+            <a:srgbClr val="FFFFFF"/>
+          </a:solidFill>
+          <a:ln w="12700">
+            <a:solidFill>
+              <a:srgbClr val="E1E8EF"/>
+            </a:solidFill>
+            <a:prstDash val="solid"/>
+          </a:ln>
+          <a:effectLst>
+            <a:outerShdw sx="100000" sy="100000" kx="0" ky="0" algn="bl" rotWithShape="0" blurRad="76200" dist="25400" dir="5400000">
+              <a:srgbClr val="0E1726">
+                <a:alpha val="10000"/>
+              </a:srgbClr>
+            </a:outerShdw>
+          </a:effectLst>
+        </p:spPr>
+      </p:sp>
+      <p:sp>
+        <p:nvSpPr>
+          <p:cNvPr id="28" name="Shape 23"/>
+          <p:cNvSpPr/>
+          <p:nvPr/>
+        </p:nvSpPr>
+        <p:spPr>
+          <a:xfrm>
+            <a:off x="9144000" y="3429000"/>
+            <a:ext cx="73152" cy="1051560"/>
+          </a:xfrm>
+          <a:prstGeom prst="rect">
+            <a:avLst/>
+          </a:prstGeom>
+          <a:solidFill>
+            <a:srgbClr val="1FA8C9"/>
+          </a:solidFill>
+          <a:ln/>
+        </p:spPr>
+      </p:sp>
+      <p:sp>
+        <p:nvSpPr>
+          <p:cNvPr id="29" name="Shape 24"/>
+          <p:cNvSpPr/>
+          <p:nvPr/>
+        </p:nvSpPr>
+        <p:spPr>
+          <a:xfrm>
+            <a:off x="9345168" y="3630168"/>
+            <a:ext cx="548640" cy="548640"/>
+          </a:xfrm>
+          <a:prstGeom prst="roundRect">
+            <a:avLst>
+              <a:gd name="adj" fmla="val 22000"/>
+            </a:avLst>
+          </a:prstGeom>
+          <a:solidFill>
+            <a:srgbClr val="0E1726"/>
+          </a:solidFill>
+          <a:ln/>
+        </p:spPr>
+      </p:sp>
+      <p:pic>
+        <p:nvPicPr>
+          <p:cNvPr id="30" name="Image 3" descr="preencoded.png">    </p:cNvPr>
+          <p:cNvPicPr>
+            <a:picLocks noChangeAspect="1"/>
+          </p:cNvPicPr>
+          <p:nvPr/>
+        </p:nvPicPr>
+        <p:blipFill>
+          <a:blip r:embed="rId4"/>
+          <a:stretch>
+            <a:fillRect/>
+          </a:stretch>
+        </p:blipFill>
+        <p:spPr>
+          <a:xfrm>
+            <a:off x="9487814" y="3772814"/>
+            <a:ext cx="263347" cy="263347"/>
+          </a:xfrm>
+          <a:prstGeom prst="rect">
+            <a:avLst/>
+          </a:prstGeom>
+        </p:spPr>
+      </p:pic>
+      <p:sp>
+        <p:nvSpPr>
+          <p:cNvPr id="31" name="Text 25"/>
+          <p:cNvSpPr/>
+          <p:nvPr/>
+        </p:nvSpPr>
+        <p:spPr>
+          <a:xfrm>
+            <a:off x="10012680" y="3575304"/>
+            <a:ext cx="1719072" cy="274320"/>
+          </a:xfrm>
+          <a:prstGeom prst="rect">
+            <a:avLst/>
+          </a:prstGeom>
+          <a:noFill/>
+          <a:ln/>
+        </p:spPr>
+        <p:txBody>
+          <a:bodyPr wrap="square" lIns="0" tIns="0" rIns="0" bIns="0" rtlCol="0" anchor="ctr"/>
+          <a:lstStyle/>
+          <a:p>
+            <a:pPr indent="0" marL="0">
+              <a:buNone/>
+            </a:pPr>
+            <a:r>
+              <a:rPr lang="en-US" sz="1200" b="1" dirty="0">
+                <a:solidFill>
+                  <a:srgbClr val="0E1726"/>
+                </a:solidFill>
+                <a:latin typeface="Calibri" pitchFamily="34" charset="0"/>
+                <a:ea typeface="Calibri" pitchFamily="34" charset="-122"/>
+                <a:cs typeface="Calibri" pitchFamily="34" charset="-120"/>
+              </a:rPr>
+              <a:t>PRE / distributor</a:t>
+            </a:r>
+            <a:endParaRPr lang="en-US" sz="1200" dirty="0"/>
+          </a:p>
+        </p:txBody>
+      </p:sp>
+      <p:sp>
+        <p:nvSpPr>
+          <p:cNvPr id="32" name="Text 26"/>
+          <p:cNvSpPr/>
+          <p:nvPr/>
+        </p:nvSpPr>
+        <p:spPr>
+          <a:xfrm>
+            <a:off x="10012680" y="3831336"/>
+            <a:ext cx="1719072" cy="201168"/>
+          </a:xfrm>
+          <a:prstGeom prst="rect">
+            <a:avLst/>
+          </a:prstGeom>
+          <a:noFill/>
+          <a:ln/>
+        </p:spPr>
+        <p:txBody>
+          <a:bodyPr wrap="square" lIns="0" tIns="0" rIns="0" bIns="0" rtlCol="0" anchor="ctr"/>
+          <a:lstStyle/>
+          <a:p>
+            <a:pPr indent="0" marL="0">
+              <a:buNone/>
+            </a:pPr>
+            <a:r>
+              <a:rPr lang="en-US" sz="850" b="1" spc="100" kern="0" dirty="0">
+                <a:solidFill>
+                  <a:srgbClr val="0E9E63"/>
+                </a:solidFill>
+                <a:latin typeface="Calibri" pitchFamily="34" charset="0"/>
+                <a:ea typeface="Calibri" pitchFamily="34" charset="-122"/>
+                <a:cs typeface="Calibri" pitchFamily="34" charset="-120"/>
+              </a:rPr>
+              <a:t>měsíčně</a:t>
+            </a:r>
+            <a:endParaRPr lang="en-US" sz="850" dirty="0"/>
+          </a:p>
+        </p:txBody>
+      </p:sp>
+      <p:sp>
+        <p:nvSpPr>
+          <p:cNvPr id="33" name="Text 27"/>
+          <p:cNvSpPr/>
+          <p:nvPr/>
+        </p:nvSpPr>
+        <p:spPr>
+          <a:xfrm>
+            <a:off x="9345168" y="4087368"/>
+            <a:ext cx="2359152" cy="347472"/>
+          </a:xfrm>
+          <a:prstGeom prst="rect">
+            <a:avLst/>
+          </a:prstGeom>
+          <a:noFill/>
+          <a:ln/>
+        </p:spPr>
+        <p:txBody>
+          <a:bodyPr wrap="square" lIns="0" tIns="0" rIns="0" bIns="0" rtlCol="0" anchor="t"/>
+          <a:lstStyle/>
+          <a:p>
+            <a:pPr indent="0" marL="0">
+              <a:lnSpc>
+                <a:spcPct val="98000"/>
+              </a:lnSpc>
+              <a:buNone/>
+            </a:pPr>
+            <a:r>
+              <a:rPr lang="en-US" sz="1000" dirty="0">
+                <a:solidFill>
+                  <a:srgbClr val="55626F"/>
+                </a:solidFill>
+                <a:latin typeface="Calibri" pitchFamily="34" charset="0"/>
+                <a:ea typeface="Calibri" pitchFamily="34" charset="-122"/>
+                <a:cs typeface="Calibri" pitchFamily="34" charset="-120"/>
+              </a:rPr>
+              <a:t>kapacita TS, odběrová rezerva</a:t>
+            </a:r>
+            <a:endParaRPr lang="en-US" sz="1000" dirty="0"/>
+          </a:p>
+        </p:txBody>
+      </p:sp>
+      <p:sp>
+        <p:nvSpPr>
+          <p:cNvPr id="34" name="Shape 28"/>
+          <p:cNvSpPr/>
+          <p:nvPr/>
+        </p:nvSpPr>
+        <p:spPr>
+          <a:xfrm>
+            <a:off x="640080" y="4626864"/>
+            <a:ext cx="2679192" cy="1051560"/>
+          </a:xfrm>
+          <a:prstGeom prst="rect">
+            <a:avLst/>
+          </a:prstGeom>
+          <a:solidFill>
+            <a:srgbClr val="FFFFFF"/>
+          </a:solidFill>
+          <a:ln w="12700">
+            <a:solidFill>
+              <a:srgbClr val="E1E8EF"/>
+            </a:solidFill>
+            <a:prstDash val="solid"/>
+          </a:ln>
+          <a:effectLst>
+            <a:outerShdw sx="100000" sy="100000" kx="0" ky="0" algn="bl" rotWithShape="0" blurRad="76200" dist="25400" dir="5400000">
+              <a:srgbClr val="0E1726">
+                <a:alpha val="10000"/>
+              </a:srgbClr>
+            </a:outerShdw>
+          </a:effectLst>
+        </p:spPr>
+      </p:sp>
+      <p:sp>
+        <p:nvSpPr>
+          <p:cNvPr id="35" name="Shape 29"/>
+          <p:cNvSpPr/>
+          <p:nvPr/>
+        </p:nvSpPr>
+        <p:spPr>
+          <a:xfrm>
+            <a:off x="640080" y="4626864"/>
+            <a:ext cx="73152" cy="1051560"/>
+          </a:xfrm>
+          <a:prstGeom prst="rect">
+            <a:avLst/>
+          </a:prstGeom>
+          <a:solidFill>
+            <a:srgbClr val="1FA8C9"/>
+          </a:solidFill>
+          <a:ln/>
+        </p:spPr>
+      </p:sp>
+      <p:sp>
+        <p:nvSpPr>
+          <p:cNvPr id="36" name="Shape 30"/>
+          <p:cNvSpPr/>
+          <p:nvPr/>
+        </p:nvSpPr>
+        <p:spPr>
+          <a:xfrm>
+            <a:off x="841248" y="4828032"/>
+            <a:ext cx="548640" cy="548640"/>
+          </a:xfrm>
+          <a:prstGeom prst="roundRect">
+            <a:avLst>
+              <a:gd name="adj" fmla="val 22000"/>
+            </a:avLst>
+          </a:prstGeom>
+          <a:solidFill>
+            <a:srgbClr val="0E1726"/>
+          </a:solidFill>
+          <a:ln/>
+        </p:spPr>
+      </p:sp>
+      <p:pic>
+        <p:nvPicPr>
+          <p:cNvPr id="37" name="Image 4" descr="preencoded.png">    </p:cNvPr>
+          <p:cNvPicPr>
+            <a:picLocks noChangeAspect="1"/>
+          </p:cNvPicPr>
+          <p:nvPr/>
+        </p:nvPicPr>
+        <p:blipFill>
+          <a:blip r:embed="rId5"/>
+          <a:stretch>
+            <a:fillRect/>
+          </a:stretch>
+        </p:blipFill>
+        <p:spPr>
+          <a:xfrm>
+            <a:off x="983894" y="4970678"/>
+            <a:ext cx="263347" cy="263347"/>
+          </a:xfrm>
+          <a:prstGeom prst="rect">
+            <a:avLst/>
+          </a:prstGeom>
+        </p:spPr>
+      </p:pic>
+      <p:sp>
+        <p:nvSpPr>
+          <p:cNvPr id="38" name="Text 31"/>
+          <p:cNvSpPr/>
+          <p:nvPr/>
+        </p:nvSpPr>
+        <p:spPr>
+          <a:xfrm>
+            <a:off x="1508760" y="4773168"/>
+            <a:ext cx="1719072" cy="274320"/>
+          </a:xfrm>
+          <a:prstGeom prst="rect">
+            <a:avLst/>
+          </a:prstGeom>
+          <a:noFill/>
+          <a:ln/>
+        </p:spPr>
+        <p:txBody>
+          <a:bodyPr wrap="square" lIns="0" tIns="0" rIns="0" bIns="0" rtlCol="0" anchor="ctr"/>
+          <a:lstStyle/>
+          <a:p>
+            <a:pPr indent="0" marL="0">
+              <a:buNone/>
+            </a:pPr>
+            <a:r>
+              <a:rPr lang="en-US" sz="1200" b="1" dirty="0">
+                <a:solidFill>
+                  <a:srgbClr val="0E1726"/>
+                </a:solidFill>
+                <a:latin typeface="Calibri" pitchFamily="34" charset="0"/>
+                <a:ea typeface="Calibri" pitchFamily="34" charset="-122"/>
+                <a:cs typeface="Calibri" pitchFamily="34" charset="-120"/>
+              </a:rPr>
+              <a:t>ČHMÚ weather API</a:t>
+            </a:r>
+            <a:endParaRPr lang="en-US" sz="1200" dirty="0"/>
+          </a:p>
+        </p:txBody>
+      </p:sp>
+      <p:sp>
+        <p:nvSpPr>
+          <p:cNvPr id="39" name="Text 32"/>
+          <p:cNvSpPr/>
+          <p:nvPr/>
+        </p:nvSpPr>
+        <p:spPr>
+          <a:xfrm>
+            <a:off x="1508760" y="5029200"/>
+            <a:ext cx="1719072" cy="201168"/>
+          </a:xfrm>
+          <a:prstGeom prst="rect">
+            <a:avLst/>
+          </a:prstGeom>
+          <a:noFill/>
+          <a:ln/>
+        </p:spPr>
+        <p:txBody>
+          <a:bodyPr wrap="square" lIns="0" tIns="0" rIns="0" bIns="0" rtlCol="0" anchor="ctr"/>
+          <a:lstStyle/>
+          <a:p>
+            <a:pPr indent="0" marL="0">
+              <a:buNone/>
+            </a:pPr>
+            <a:r>
+              <a:rPr lang="en-US" sz="850" b="1" spc="100" kern="0" dirty="0">
+                <a:solidFill>
+                  <a:srgbClr val="0E9E63"/>
+                </a:solidFill>
+                <a:latin typeface="Calibri" pitchFamily="34" charset="0"/>
+                <a:ea typeface="Calibri" pitchFamily="34" charset="-122"/>
+                <a:cs typeface="Calibri" pitchFamily="34" charset="-120"/>
+              </a:rPr>
+              <a:t>hodinově</a:t>
+            </a:r>
+            <a:endParaRPr lang="en-US" sz="850" dirty="0"/>
+          </a:p>
+        </p:txBody>
+      </p:sp>
+      <p:sp>
+        <p:nvSpPr>
+          <p:cNvPr id="40" name="Text 33"/>
+          <p:cNvSpPr/>
+          <p:nvPr/>
+        </p:nvSpPr>
+        <p:spPr>
+          <a:xfrm>
+            <a:off x="841248" y="5285232"/>
+            <a:ext cx="2359152" cy="347472"/>
+          </a:xfrm>
+          <a:prstGeom prst="rect">
+            <a:avLst/>
+          </a:prstGeom>
+          <a:noFill/>
+          <a:ln/>
+        </p:spPr>
+        <p:txBody>
+          <a:bodyPr wrap="square" lIns="0" tIns="0" rIns="0" bIns="0" rtlCol="0" anchor="t"/>
+          <a:lstStyle/>
+          <a:p>
+            <a:pPr indent="0" marL="0">
+              <a:lnSpc>
+                <a:spcPct val="98000"/>
+              </a:lnSpc>
+              <a:buNone/>
+            </a:pPr>
+            <a:r>
+              <a:rPr lang="en-US" sz="1000" dirty="0">
+                <a:solidFill>
+                  <a:srgbClr val="55626F"/>
+                </a:solidFill>
+                <a:latin typeface="Calibri" pitchFamily="34" charset="0"/>
+                <a:ea typeface="Calibri" pitchFamily="34" charset="-122"/>
+                <a:cs typeface="Calibri" pitchFamily="34" charset="-120"/>
+              </a:rPr>
+              <a:t>počasí → vliv na nabíjení</a:t>
+            </a:r>
+            <a:endParaRPr lang="en-US" sz="1000" dirty="0"/>
+          </a:p>
+        </p:txBody>
+      </p:sp>
+      <p:sp>
+        <p:nvSpPr>
+          <p:cNvPr id="41" name="Shape 34"/>
+          <p:cNvSpPr/>
+          <p:nvPr/>
+        </p:nvSpPr>
+        <p:spPr>
+          <a:xfrm>
+            <a:off x="3474720" y="4626864"/>
+            <a:ext cx="2679192" cy="1051560"/>
+          </a:xfrm>
+          <a:prstGeom prst="rect">
+            <a:avLst/>
+          </a:prstGeom>
+          <a:solidFill>
+            <a:srgbClr val="FFFFFF"/>
+          </a:solidFill>
+          <a:ln w="12700">
+            <a:solidFill>
+              <a:srgbClr val="E1E8EF"/>
+            </a:solidFill>
+            <a:prstDash val="solid"/>
+          </a:ln>
+          <a:effectLst>
+            <a:outerShdw sx="100000" sy="100000" kx="0" ky="0" algn="bl" rotWithShape="0" blurRad="76200" dist="25400" dir="5400000">
+              <a:srgbClr val="0E1726">
+                <a:alpha val="10000"/>
+              </a:srgbClr>
+            </a:outerShdw>
+          </a:effectLst>
+        </p:spPr>
+      </p:sp>
+      <p:sp>
+        <p:nvSpPr>
+          <p:cNvPr id="42" name="Shape 35"/>
+          <p:cNvSpPr/>
+          <p:nvPr/>
+        </p:nvSpPr>
+        <p:spPr>
+          <a:xfrm>
+            <a:off x="3474720" y="4626864"/>
+            <a:ext cx="73152" cy="1051560"/>
+          </a:xfrm>
+          <a:prstGeom prst="rect">
+            <a:avLst/>
+          </a:prstGeom>
+          <a:solidFill>
+            <a:srgbClr val="1FA8C9"/>
+          </a:solidFill>
+          <a:ln/>
+        </p:spPr>
+      </p:sp>
+      <p:sp>
+        <p:nvSpPr>
+          <p:cNvPr id="43" name="Shape 36"/>
+          <p:cNvSpPr/>
+          <p:nvPr/>
+        </p:nvSpPr>
+        <p:spPr>
+          <a:xfrm>
+            <a:off x="3675888" y="4828032"/>
+            <a:ext cx="548640" cy="548640"/>
+          </a:xfrm>
+          <a:prstGeom prst="roundRect">
+            <a:avLst>
+              <a:gd name="adj" fmla="val 22000"/>
+            </a:avLst>
+          </a:prstGeom>
+          <a:solidFill>
+            <a:srgbClr val="0E1726"/>
+          </a:solidFill>
+          <a:ln/>
+        </p:spPr>
+      </p:sp>
+      <p:pic>
+        <p:nvPicPr>
+          <p:cNvPr id="44" name="Image 5" descr="preencoded.png">    </p:cNvPr>
+          <p:cNvPicPr>
+            <a:picLocks noChangeAspect="1"/>
+          </p:cNvPicPr>
+          <p:nvPr/>
+        </p:nvPicPr>
+        <p:blipFill>
+          <a:blip r:embed="rId6"/>
+          <a:stretch>
+            <a:fillRect/>
+          </a:stretch>
+        </p:blipFill>
+        <p:spPr>
+          <a:xfrm>
+            <a:off x="3818534" y="4970678"/>
+            <a:ext cx="263347" cy="263347"/>
+          </a:xfrm>
+          <a:prstGeom prst="rect">
+            <a:avLst/>
+          </a:prstGeom>
+        </p:spPr>
+      </p:pic>
+      <p:sp>
+        <p:nvSpPr>
+          <p:cNvPr id="45" name="Text 37"/>
+          <p:cNvSpPr/>
+          <p:nvPr/>
+        </p:nvSpPr>
+        <p:spPr>
+          <a:xfrm>
+            <a:off x="4343400" y="4773168"/>
+            <a:ext cx="1719072" cy="274320"/>
+          </a:xfrm>
+          <a:prstGeom prst="rect">
+            <a:avLst/>
+          </a:prstGeom>
+          <a:noFill/>
+          <a:ln/>
+        </p:spPr>
+        <p:txBody>
+          <a:bodyPr wrap="square" lIns="0" tIns="0" rIns="0" bIns="0" rtlCol="0" anchor="ctr"/>
+          <a:lstStyle/>
+          <a:p>
+            <a:pPr indent="0" marL="0">
+              <a:buNone/>
+            </a:pPr>
+            <a:r>
+              <a:rPr lang="en-US" sz="1200" b="1" dirty="0">
+                <a:solidFill>
+                  <a:srgbClr val="0E1726"/>
+                </a:solidFill>
+                <a:latin typeface="Calibri" pitchFamily="34" charset="0"/>
+                <a:ea typeface="Calibri" pitchFamily="34" charset="-122"/>
+                <a:cs typeface="Calibri" pitchFamily="34" charset="-120"/>
+              </a:rPr>
+              <a:t>MPO + provozovatelé</a:t>
+            </a:r>
+            <a:endParaRPr lang="en-US" sz="1200" dirty="0"/>
+          </a:p>
+        </p:txBody>
+      </p:sp>
+      <p:sp>
+        <p:nvSpPr>
+          <p:cNvPr id="46" name="Text 38"/>
+          <p:cNvSpPr/>
+          <p:nvPr/>
+        </p:nvSpPr>
+        <p:spPr>
+          <a:xfrm>
+            <a:off x="4343400" y="5029200"/>
+            <a:ext cx="1719072" cy="201168"/>
+          </a:xfrm>
+          <a:prstGeom prst="rect">
+            <a:avLst/>
+          </a:prstGeom>
+          <a:noFill/>
+          <a:ln/>
+        </p:spPr>
+        <p:txBody>
+          <a:bodyPr wrap="square" lIns="0" tIns="0" rIns="0" bIns="0" rtlCol="0" anchor="ctr"/>
+          <a:lstStyle/>
+          <a:p>
+            <a:pPr indent="0" marL="0">
+              <a:buNone/>
+            </a:pPr>
+            <a:r>
+              <a:rPr lang="en-US" sz="850" b="1" spc="100" kern="0" dirty="0">
+                <a:solidFill>
+                  <a:srgbClr val="0E9E63"/>
+                </a:solidFill>
+                <a:latin typeface="Calibri" pitchFamily="34" charset="0"/>
+                <a:ea typeface="Calibri" pitchFamily="34" charset="-122"/>
+                <a:cs typeface="Calibri" pitchFamily="34" charset="-120"/>
+              </a:rPr>
+              <a:t>týdně</a:t>
+            </a:r>
+            <a:endParaRPr lang="en-US" sz="850" dirty="0"/>
+          </a:p>
+        </p:txBody>
+      </p:sp>
+      <p:sp>
+        <p:nvSpPr>
+          <p:cNvPr id="47" name="Text 39"/>
+          <p:cNvSpPr/>
+          <p:nvPr/>
+        </p:nvSpPr>
+        <p:spPr>
+          <a:xfrm>
+            <a:off x="3675888" y="5285232"/>
+            <a:ext cx="2359152" cy="347472"/>
+          </a:xfrm>
+          <a:prstGeom prst="rect">
+            <a:avLst/>
+          </a:prstGeom>
+          <a:noFill/>
+          <a:ln/>
+        </p:spPr>
+        <p:txBody>
+          <a:bodyPr wrap="square" lIns="0" tIns="0" rIns="0" bIns="0" rtlCol="0" anchor="t"/>
+          <a:lstStyle/>
+          <a:p>
+            <a:pPr indent="0" marL="0">
+              <a:lnSpc>
+                <a:spcPct val="98000"/>
+              </a:lnSpc>
+              <a:buNone/>
+            </a:pPr>
+            <a:r>
+              <a:rPr lang="en-US" sz="1000" dirty="0">
+                <a:solidFill>
+                  <a:srgbClr val="55626F"/>
+                </a:solidFill>
+                <a:latin typeface="Calibri" pitchFamily="34" charset="0"/>
+                <a:ea typeface="Calibri" pitchFamily="34" charset="-122"/>
+                <a:cs typeface="Calibri" pitchFamily="34" charset="-120"/>
+              </a:rPr>
+              <a:t>stávající stanice + využití</a:t>
+            </a:r>
+            <a:endParaRPr lang="en-US" sz="1000" dirty="0"/>
+          </a:p>
+        </p:txBody>
+      </p:sp>
+      <p:sp>
+        <p:nvSpPr>
+          <p:cNvPr id="48" name="Shape 40"/>
+          <p:cNvSpPr/>
+          <p:nvPr/>
+        </p:nvSpPr>
+        <p:spPr>
+          <a:xfrm>
+            <a:off x="6309360" y="4626864"/>
+            <a:ext cx="2679192" cy="1051560"/>
+          </a:xfrm>
+          <a:prstGeom prst="rect">
+            <a:avLst/>
+          </a:prstGeom>
+          <a:solidFill>
+            <a:srgbClr val="FFFFFF"/>
+          </a:solidFill>
+          <a:ln w="12700">
+            <a:solidFill>
+              <a:srgbClr val="E1E8EF"/>
+            </a:solidFill>
+            <a:prstDash val="solid"/>
+          </a:ln>
+          <a:effectLst>
+            <a:outerShdw sx="100000" sy="100000" kx="0" ky="0" algn="bl" rotWithShape="0" blurRad="76200" dist="25400" dir="5400000">
+              <a:srgbClr val="0E1726">
+                <a:alpha val="10000"/>
+              </a:srgbClr>
+            </a:outerShdw>
+          </a:effectLst>
+        </p:spPr>
+      </p:sp>
+      <p:sp>
+        <p:nvSpPr>
+          <p:cNvPr id="49" name="Shape 41"/>
+          <p:cNvSpPr/>
+          <p:nvPr/>
+        </p:nvSpPr>
+        <p:spPr>
+          <a:xfrm>
+            <a:off x="6309360" y="4626864"/>
+            <a:ext cx="73152" cy="1051560"/>
+          </a:xfrm>
+          <a:prstGeom prst="rect">
+            <a:avLst/>
+          </a:prstGeom>
+          <a:solidFill>
+            <a:srgbClr val="1FA8C9"/>
+          </a:solidFill>
+          <a:ln/>
+        </p:spPr>
+      </p:sp>
+      <p:sp>
+        <p:nvSpPr>
+          <p:cNvPr id="50" name="Shape 42"/>
+          <p:cNvSpPr/>
+          <p:nvPr/>
+        </p:nvSpPr>
+        <p:spPr>
+          <a:xfrm>
+            <a:off x="6510528" y="4828032"/>
+            <a:ext cx="548640" cy="548640"/>
+          </a:xfrm>
+          <a:prstGeom prst="roundRect">
+            <a:avLst>
+              <a:gd name="adj" fmla="val 22000"/>
+            </a:avLst>
+          </a:prstGeom>
+          <a:solidFill>
+            <a:srgbClr val="0E1726"/>
+          </a:solidFill>
+          <a:ln/>
+        </p:spPr>
+      </p:sp>
+      <p:pic>
+        <p:nvPicPr>
+          <p:cNvPr id="51" name="Image 6" descr="preencoded.png">    </p:cNvPr>
+          <p:cNvPicPr>
+            <a:picLocks noChangeAspect="1"/>
+          </p:cNvPicPr>
+          <p:nvPr/>
+        </p:nvPicPr>
+        <p:blipFill>
+          <a:blip r:embed="rId7"/>
+          <a:stretch>
+            <a:fillRect/>
+          </a:stretch>
+        </p:blipFill>
+        <p:spPr>
+          <a:xfrm>
+            <a:off x="6653174" y="4970678"/>
+            <a:ext cx="263347" cy="263347"/>
+          </a:xfrm>
+          <a:prstGeom prst="rect">
+            <a:avLst/>
+          </a:prstGeom>
+        </p:spPr>
+      </p:pic>
+      <p:sp>
+        <p:nvSpPr>
+          <p:cNvPr id="52" name="Text 43"/>
+          <p:cNvSpPr/>
+          <p:nvPr/>
+        </p:nvSpPr>
+        <p:spPr>
+          <a:xfrm>
+            <a:off x="7178040" y="4773168"/>
+            <a:ext cx="1719072" cy="274320"/>
+          </a:xfrm>
+          <a:prstGeom prst="rect">
+            <a:avLst/>
+          </a:prstGeom>
+          <a:noFill/>
+          <a:ln/>
+        </p:spPr>
+        <p:txBody>
+          <a:bodyPr wrap="square" lIns="0" tIns="0" rIns="0" bIns="0" rtlCol="0" anchor="ctr"/>
+          <a:lstStyle/>
+          <a:p>
+            <a:pPr indent="0" marL="0">
+              <a:buNone/>
+            </a:pPr>
+            <a:r>
+              <a:rPr lang="en-US" sz="1200" b="1" dirty="0">
+                <a:solidFill>
+                  <a:srgbClr val="0E1726"/>
+                </a:solidFill>
+                <a:latin typeface="Calibri" pitchFamily="34" charset="0"/>
+                <a:ea typeface="Calibri" pitchFamily="34" charset="-122"/>
+                <a:cs typeface="Calibri" pitchFamily="34" charset="-120"/>
+              </a:rPr>
+              <a:t>OpenStreetMap</a:t>
+            </a:r>
+            <a:endParaRPr lang="en-US" sz="1200" dirty="0"/>
+          </a:p>
+        </p:txBody>
+      </p:sp>
+      <p:sp>
+        <p:nvSpPr>
+          <p:cNvPr id="53" name="Text 44"/>
+          <p:cNvSpPr/>
+          <p:nvPr/>
+        </p:nvSpPr>
+        <p:spPr>
+          <a:xfrm>
+            <a:off x="7178040" y="5029200"/>
+            <a:ext cx="1719072" cy="201168"/>
+          </a:xfrm>
+          <a:prstGeom prst="rect">
+            <a:avLst/>
+          </a:prstGeom>
+          <a:noFill/>
+          <a:ln/>
+        </p:spPr>
+        <p:txBody>
+          <a:bodyPr wrap="square" lIns="0" tIns="0" rIns="0" bIns="0" rtlCol="0" anchor="ctr"/>
+          <a:lstStyle/>
+          <a:p>
+            <a:pPr indent="0" marL="0">
+              <a:buNone/>
+            </a:pPr>
+            <a:r>
+              <a:rPr lang="en-US" sz="850" b="1" spc="100" kern="0" dirty="0">
+                <a:solidFill>
+                  <a:srgbClr val="0E9E63"/>
+                </a:solidFill>
+                <a:latin typeface="Calibri" pitchFamily="34" charset="0"/>
+                <a:ea typeface="Calibri" pitchFamily="34" charset="-122"/>
+                <a:cs typeface="Calibri" pitchFamily="34" charset="-120"/>
+              </a:rPr>
+              <a:t>měsíčně</a:t>
+            </a:r>
+            <a:endParaRPr lang="en-US" sz="850" dirty="0"/>
+          </a:p>
+        </p:txBody>
+      </p:sp>
+      <p:sp>
+        <p:nvSpPr>
+          <p:cNvPr id="54" name="Text 45"/>
+          <p:cNvSpPr/>
+          <p:nvPr/>
+        </p:nvSpPr>
+        <p:spPr>
+          <a:xfrm>
+            <a:off x="6510528" y="5285232"/>
+            <a:ext cx="2359152" cy="347472"/>
+          </a:xfrm>
+          <a:prstGeom prst="rect">
+            <a:avLst/>
+          </a:prstGeom>
+          <a:noFill/>
+          <a:ln/>
+        </p:spPr>
+        <p:txBody>
+          <a:bodyPr wrap="square" lIns="0" tIns="0" rIns="0" bIns="0" rtlCol="0" anchor="t"/>
+          <a:lstStyle/>
+          <a:p>
+            <a:pPr indent="0" marL="0">
+              <a:lnSpc>
+                <a:spcPct val="98000"/>
+              </a:lnSpc>
+              <a:buNone/>
+            </a:pPr>
+            <a:r>
+              <a:rPr lang="en-US" sz="1000" dirty="0">
+                <a:solidFill>
+                  <a:srgbClr val="55626F"/>
+                </a:solidFill>
+                <a:latin typeface="Calibri" pitchFamily="34" charset="0"/>
+                <a:ea typeface="Calibri" pitchFamily="34" charset="-122"/>
+                <a:cs typeface="Calibri" pitchFamily="34" charset="-120"/>
+              </a:rPr>
+              <a:t>silnice, POI, stožáry VO</a:t>
+            </a:r>
+            <a:endParaRPr lang="en-US" sz="1000" dirty="0"/>
+          </a:p>
+        </p:txBody>
+      </p:sp>
+      <p:sp>
+        <p:nvSpPr>
+          <p:cNvPr id="55" name="Shape 46"/>
+          <p:cNvSpPr/>
+          <p:nvPr/>
+        </p:nvSpPr>
+        <p:spPr>
+          <a:xfrm>
+            <a:off x="9144000" y="4626864"/>
+            <a:ext cx="2679192" cy="1051560"/>
+          </a:xfrm>
+          <a:prstGeom prst="rect">
+            <a:avLst/>
+          </a:prstGeom>
+          <a:solidFill>
+            <a:srgbClr val="FFFFFF"/>
+          </a:solidFill>
+          <a:ln w="12700">
+            <a:solidFill>
+              <a:srgbClr val="E1E8EF"/>
+            </a:solidFill>
+            <a:prstDash val="solid"/>
+          </a:ln>
+          <a:effectLst>
+            <a:outerShdw sx="100000" sy="100000" kx="0" ky="0" algn="bl" rotWithShape="0" blurRad="76200" dist="25400" dir="5400000">
+              <a:srgbClr val="0E1726">
+                <a:alpha val="10000"/>
+              </a:srgbClr>
+            </a:outerShdw>
+          </a:effectLst>
+        </p:spPr>
+      </p:sp>
+      <p:sp>
+        <p:nvSpPr>
+          <p:cNvPr id="56" name="Shape 47"/>
+          <p:cNvSpPr/>
+          <p:nvPr/>
+        </p:nvSpPr>
+        <p:spPr>
+          <a:xfrm>
+            <a:off x="9144000" y="4626864"/>
+            <a:ext cx="73152" cy="1051560"/>
+          </a:xfrm>
+          <a:prstGeom prst="rect">
+            <a:avLst/>
+          </a:prstGeom>
+          <a:solidFill>
+            <a:srgbClr val="1FA8C9"/>
+          </a:solidFill>
+          <a:ln/>
+        </p:spPr>
+      </p:sp>
+      <p:sp>
+        <p:nvSpPr>
+          <p:cNvPr id="57" name="Shape 48"/>
+          <p:cNvSpPr/>
+          <p:nvPr/>
+        </p:nvSpPr>
+        <p:spPr>
+          <a:xfrm>
+            <a:off x="9345168" y="4828032"/>
+            <a:ext cx="548640" cy="548640"/>
+          </a:xfrm>
+          <a:prstGeom prst="roundRect">
+            <a:avLst>
+              <a:gd name="adj" fmla="val 22000"/>
+            </a:avLst>
+          </a:prstGeom>
+          <a:solidFill>
+            <a:srgbClr val="0E1726"/>
+          </a:solidFill>
+          <a:ln/>
+        </p:spPr>
+      </p:sp>
+      <p:pic>
+        <p:nvPicPr>
+          <p:cNvPr id="58" name="Image 7" descr="preencoded.png">    </p:cNvPr>
+          <p:cNvPicPr>
+            <a:picLocks noChangeAspect="1"/>
+          </p:cNvPicPr>
+          <p:nvPr/>
+        </p:nvPicPr>
+        <p:blipFill>
+          <a:blip r:embed="rId8"/>
+          <a:stretch>
+            <a:fillRect/>
+          </a:stretch>
+        </p:blipFill>
+        <p:spPr>
+          <a:xfrm>
+            <a:off x="9487814" y="4970678"/>
+            <a:ext cx="263347" cy="263347"/>
+          </a:xfrm>
+          <a:prstGeom prst="rect">
+            <a:avLst/>
+          </a:prstGeom>
+        </p:spPr>
+      </p:pic>
+      <p:sp>
+        <p:nvSpPr>
+          <p:cNvPr id="59" name="Text 49"/>
+          <p:cNvSpPr/>
+          <p:nvPr/>
+        </p:nvSpPr>
+        <p:spPr>
+          <a:xfrm>
+            <a:off x="10012680" y="4773168"/>
+            <a:ext cx="1719072" cy="274320"/>
+          </a:xfrm>
+          <a:prstGeom prst="rect">
+            <a:avLst/>
+          </a:prstGeom>
+          <a:noFill/>
+          <a:ln/>
+        </p:spPr>
+        <p:txBody>
+          <a:bodyPr wrap="square" lIns="0" tIns="0" rIns="0" bIns="0" rtlCol="0" anchor="ctr"/>
+          <a:lstStyle/>
+          <a:p>
+            <a:pPr indent="0" marL="0">
+              <a:buNone/>
+            </a:pPr>
+            <a:r>
+              <a:rPr lang="en-US" sz="1200" b="1" dirty="0">
+                <a:solidFill>
+                  <a:srgbClr val="0E1726"/>
+                </a:solidFill>
+                <a:latin typeface="Calibri" pitchFamily="34" charset="0"/>
+                <a:ea typeface="Calibri" pitchFamily="34" charset="-122"/>
+                <a:cs typeface="Calibri" pitchFamily="34" charset="-120"/>
+              </a:rPr>
+              <a:t>Zpětná vazba z appky</a:t>
+            </a:r>
+            <a:endParaRPr lang="en-US" sz="1200" dirty="0"/>
+          </a:p>
+        </p:txBody>
+      </p:sp>
+      <p:sp>
+        <p:nvSpPr>
+          <p:cNvPr id="60" name="Text 50"/>
+          <p:cNvSpPr/>
+          <p:nvPr/>
+        </p:nvSpPr>
+        <p:spPr>
+          <a:xfrm>
+            <a:off x="10012680" y="5029200"/>
+            <a:ext cx="1719072" cy="201168"/>
+          </a:xfrm>
+          <a:prstGeom prst="rect">
+            <a:avLst/>
+          </a:prstGeom>
+          <a:noFill/>
+          <a:ln/>
+        </p:spPr>
+        <p:txBody>
+          <a:bodyPr wrap="square" lIns="0" tIns="0" rIns="0" bIns="0" rtlCol="0" anchor="ctr"/>
+          <a:lstStyle/>
+          <a:p>
+            <a:pPr indent="0" marL="0">
+              <a:buNone/>
+            </a:pPr>
+            <a:r>
+              <a:rPr lang="en-US" sz="850" b="1" spc="100" kern="0" dirty="0">
+                <a:solidFill>
+                  <a:srgbClr val="0E9E63"/>
+                </a:solidFill>
+                <a:latin typeface="Calibri" pitchFamily="34" charset="0"/>
+                <a:ea typeface="Calibri" pitchFamily="34" charset="-122"/>
+                <a:cs typeface="Calibri" pitchFamily="34" charset="-120"/>
+              </a:rPr>
+              <a:t>průběžně</a:t>
+            </a:r>
+            <a:endParaRPr lang="en-US" sz="850" dirty="0"/>
+          </a:p>
+        </p:txBody>
+      </p:sp>
+      <p:sp>
+        <p:nvSpPr>
+          <p:cNvPr id="61" name="Text 51"/>
+          <p:cNvSpPr/>
+          <p:nvPr/>
+        </p:nvSpPr>
+        <p:spPr>
+          <a:xfrm>
+            <a:off x="9345168" y="5285232"/>
+            <a:ext cx="2359152" cy="347472"/>
+          </a:xfrm>
+          <a:prstGeom prst="rect">
+            <a:avLst/>
+          </a:prstGeom>
+          <a:noFill/>
+          <a:ln/>
+        </p:spPr>
+        <p:txBody>
+          <a:bodyPr wrap="square" lIns="0" tIns="0" rIns="0" bIns="0" rtlCol="0" anchor="t"/>
+          <a:lstStyle/>
+          <a:p>
+            <a:pPr indent="0" marL="0">
+              <a:lnSpc>
+                <a:spcPct val="98000"/>
+              </a:lnSpc>
+              <a:buNone/>
+            </a:pPr>
+            <a:r>
+              <a:rPr lang="en-US" sz="1000" dirty="0">
+                <a:solidFill>
+                  <a:srgbClr val="55626F"/>
+                </a:solidFill>
+                <a:latin typeface="Calibri" pitchFamily="34" charset="0"/>
+                <a:ea typeface="Calibri" pitchFamily="34" charset="-122"/>
+                <a:cs typeface="Calibri" pitchFamily="34" charset="-120"/>
+              </a:rPr>
+              <a:t>reálné využití → do modelu</a:t>
+            </a:r>
+            <a:endParaRPr lang="en-US" sz="1000" dirty="0"/>
+          </a:p>
+        </p:txBody>
+      </p:sp>
+      <p:sp>
+        <p:nvSpPr>
+          <p:cNvPr id="62" name="Shape 52"/>
+          <p:cNvSpPr/>
+          <p:nvPr/>
+        </p:nvSpPr>
+        <p:spPr>
+          <a:xfrm>
+            <a:off x="640080" y="5897880"/>
+            <a:ext cx="10927080" cy="566928"/>
+          </a:xfrm>
+          <a:prstGeom prst="rect">
+            <a:avLst/>
+          </a:prstGeom>
+          <a:solidFill>
+            <a:srgbClr val="0E1726"/>
+          </a:solidFill>
+          <a:ln/>
+          <a:effectLst>
+            <a:outerShdw sx="100000" sy="100000" kx="0" ky="0" algn="bl" rotWithShape="0" blurRad="76200" dist="25400" dir="5400000">
+              <a:srgbClr val="0E1726">
+                <a:alpha val="10000"/>
+              </a:srgbClr>
+            </a:outerShdw>
+          </a:effectLst>
+        </p:spPr>
+      </p:sp>
+      <p:sp>
+        <p:nvSpPr>
+          <p:cNvPr id="63" name="Text 53"/>
+          <p:cNvSpPr/>
+          <p:nvPr/>
+        </p:nvSpPr>
+        <p:spPr>
+          <a:xfrm>
+            <a:off x="868680" y="5897880"/>
+            <a:ext cx="1600200" cy="566928"/>
+          </a:xfrm>
+          <a:prstGeom prst="rect">
+            <a:avLst/>
+          </a:prstGeom>
+          <a:noFill/>
+          <a:ln/>
+        </p:spPr>
+        <p:txBody>
+          <a:bodyPr wrap="square" lIns="0" tIns="0" rIns="0" bIns="0" rtlCol="0" anchor="ctr"/>
+          <a:lstStyle/>
+          <a:p>
+            <a:pPr algn="ctr" indent="0" marL="0">
+              <a:lnSpc>
+                <a:spcPct val="95000"/>
+              </a:lnSpc>
+              <a:buNone/>
+            </a:pPr>
+            <a:r>
+              <a:rPr lang="en-US" sz="1050" b="1" dirty="0">
+                <a:solidFill>
+                  <a:srgbClr val="FFFFFF"/>
+                </a:solidFill>
+                <a:latin typeface="Calibri" pitchFamily="34" charset="0"/>
+                <a:ea typeface="Calibri" pitchFamily="34" charset="-122"/>
+                <a:cs typeface="Calibri" pitchFamily="34" charset="-120"/>
+              </a:rPr>
+              <a:t>Scraping / ingest</a:t>
+            </a:r>
+            <a:endParaRPr lang="en-US" sz="1050" dirty="0"/>
+          </a:p>
+        </p:txBody>
+      </p:sp>
+      <p:sp>
+        <p:nvSpPr>
+          <p:cNvPr id="64" name="Text 54"/>
+          <p:cNvSpPr/>
+          <p:nvPr/>
+        </p:nvSpPr>
+        <p:spPr>
+          <a:xfrm>
+            <a:off x="2350008" y="5897880"/>
+            <a:ext cx="365760" cy="566928"/>
+          </a:xfrm>
+          <a:prstGeom prst="rect">
+            <a:avLst/>
+          </a:prstGeom>
+          <a:noFill/>
+          <a:ln/>
+        </p:spPr>
+        <p:txBody>
+          <a:bodyPr wrap="square" lIns="0" tIns="0" rIns="0" bIns="0" rtlCol="0" anchor="ctr"/>
+          <a:lstStyle/>
+          <a:p>
+            <a:pPr algn="ctr" indent="0" marL="0">
+              <a:buNone/>
+            </a:pPr>
+            <a:r>
+              <a:rPr lang="en-US" sz="1800" b="1" dirty="0">
+                <a:solidFill>
+                  <a:srgbClr val="19C37D"/>
+                </a:solidFill>
+                <a:latin typeface="Georgia" pitchFamily="34" charset="0"/>
+                <a:ea typeface="Georgia" pitchFamily="34" charset="-122"/>
+                <a:cs typeface="Georgia" pitchFamily="34" charset="-120"/>
+              </a:rPr>
+              <a:t>›</a:t>
+            </a:r>
+            <a:endParaRPr lang="en-US" sz="1800" dirty="0"/>
+          </a:p>
+        </p:txBody>
+      </p:sp>
+      <p:sp>
+        <p:nvSpPr>
+          <p:cNvPr id="65" name="Text 55"/>
+          <p:cNvSpPr/>
+          <p:nvPr/>
+        </p:nvSpPr>
+        <p:spPr>
+          <a:xfrm>
+            <a:off x="2670048" y="5897880"/>
+            <a:ext cx="1600200" cy="566928"/>
+          </a:xfrm>
+          <a:prstGeom prst="rect">
+            <a:avLst/>
+          </a:prstGeom>
+          <a:noFill/>
+          <a:ln/>
+        </p:spPr>
+        <p:txBody>
+          <a:bodyPr wrap="square" lIns="0" tIns="0" rIns="0" bIns="0" rtlCol="0" anchor="ctr"/>
+          <a:lstStyle/>
+          <a:p>
+            <a:pPr algn="ctr" indent="0" marL="0">
+              <a:lnSpc>
+                <a:spcPct val="95000"/>
+              </a:lnSpc>
+              <a:buNone/>
+            </a:pPr>
+            <a:r>
+              <a:rPr lang="en-US" sz="1050" b="1" dirty="0">
+                <a:solidFill>
+                  <a:srgbClr val="FFFFFF"/>
+                </a:solidFill>
+                <a:latin typeface="Calibri" pitchFamily="34" charset="0"/>
+                <a:ea typeface="Calibri" pitchFamily="34" charset="-122"/>
+                <a:cs typeface="Calibri" pitchFamily="34" charset="-120"/>
+              </a:rPr>
+              <a:t>Čištění + validace</a:t>
+            </a:r>
+            <a:endParaRPr lang="en-US" sz="1050" dirty="0"/>
+          </a:p>
+        </p:txBody>
+      </p:sp>
+      <p:sp>
+        <p:nvSpPr>
+          <p:cNvPr id="66" name="Text 56"/>
+          <p:cNvSpPr/>
+          <p:nvPr/>
+        </p:nvSpPr>
+        <p:spPr>
+          <a:xfrm>
+            <a:off x="4151376" y="5897880"/>
+            <a:ext cx="365760" cy="566928"/>
+          </a:xfrm>
+          <a:prstGeom prst="rect">
+            <a:avLst/>
+          </a:prstGeom>
+          <a:noFill/>
+          <a:ln/>
+        </p:spPr>
+        <p:txBody>
+          <a:bodyPr wrap="square" lIns="0" tIns="0" rIns="0" bIns="0" rtlCol="0" anchor="ctr"/>
+          <a:lstStyle/>
+          <a:p>
+            <a:pPr algn="ctr" indent="0" marL="0">
+              <a:buNone/>
+            </a:pPr>
+            <a:r>
+              <a:rPr lang="en-US" sz="1800" b="1" dirty="0">
+                <a:solidFill>
+                  <a:srgbClr val="19C37D"/>
+                </a:solidFill>
+                <a:latin typeface="Georgia" pitchFamily="34" charset="0"/>
+                <a:ea typeface="Georgia" pitchFamily="34" charset="-122"/>
+                <a:cs typeface="Georgia" pitchFamily="34" charset="-120"/>
+              </a:rPr>
+              <a:t>›</a:t>
+            </a:r>
+            <a:endParaRPr lang="en-US" sz="1800" dirty="0"/>
+          </a:p>
+        </p:txBody>
+      </p:sp>
+      <p:sp>
+        <p:nvSpPr>
+          <p:cNvPr id="67" name="Text 57"/>
+          <p:cNvSpPr/>
+          <p:nvPr/>
+        </p:nvSpPr>
+        <p:spPr>
+          <a:xfrm>
+            <a:off x="4471416" y="5897880"/>
+            <a:ext cx="1600200" cy="566928"/>
+          </a:xfrm>
+          <a:prstGeom prst="rect">
+            <a:avLst/>
+          </a:prstGeom>
+          <a:noFill/>
+          <a:ln/>
+        </p:spPr>
+        <p:txBody>
+          <a:bodyPr wrap="square" lIns="0" tIns="0" rIns="0" bIns="0" rtlCol="0" anchor="ctr"/>
+          <a:lstStyle/>
+          <a:p>
+            <a:pPr algn="ctr" indent="0" marL="0">
+              <a:lnSpc>
+                <a:spcPct val="95000"/>
+              </a:lnSpc>
+              <a:buNone/>
+            </a:pPr>
+            <a:r>
+              <a:rPr lang="en-US" sz="1050" b="1" dirty="0">
+                <a:solidFill>
+                  <a:srgbClr val="FFFFFF"/>
+                </a:solidFill>
+                <a:latin typeface="Calibri" pitchFamily="34" charset="0"/>
+                <a:ea typeface="Calibri" pitchFamily="34" charset="-122"/>
+                <a:cs typeface="Calibri" pitchFamily="34" charset="-120"/>
+              </a:rPr>
+              <a:t>Anti-leakage guard</a:t>
+            </a:r>
+            <a:endParaRPr lang="en-US" sz="1050" dirty="0"/>
+          </a:p>
+        </p:txBody>
+      </p:sp>
+      <p:sp>
+        <p:nvSpPr>
+          <p:cNvPr id="68" name="Text 58"/>
+          <p:cNvSpPr/>
+          <p:nvPr/>
+        </p:nvSpPr>
+        <p:spPr>
+          <a:xfrm>
+            <a:off x="5952744" y="5897880"/>
+            <a:ext cx="365760" cy="566928"/>
+          </a:xfrm>
+          <a:prstGeom prst="rect">
+            <a:avLst/>
+          </a:prstGeom>
+          <a:noFill/>
+          <a:ln/>
+        </p:spPr>
+        <p:txBody>
+          <a:bodyPr wrap="square" lIns="0" tIns="0" rIns="0" bIns="0" rtlCol="0" anchor="ctr"/>
+          <a:lstStyle/>
+          <a:p>
+            <a:pPr algn="ctr" indent="0" marL="0">
+              <a:buNone/>
+            </a:pPr>
+            <a:r>
+              <a:rPr lang="en-US" sz="1800" b="1" dirty="0">
+                <a:solidFill>
+                  <a:srgbClr val="19C37D"/>
+                </a:solidFill>
+                <a:latin typeface="Georgia" pitchFamily="34" charset="0"/>
+                <a:ea typeface="Georgia" pitchFamily="34" charset="-122"/>
+                <a:cs typeface="Georgia" pitchFamily="34" charset="-120"/>
+              </a:rPr>
+              <a:t>›</a:t>
+            </a:r>
+            <a:endParaRPr lang="en-US" sz="1800" dirty="0"/>
+          </a:p>
+        </p:txBody>
+      </p:sp>
+      <p:sp>
+        <p:nvSpPr>
+          <p:cNvPr id="69" name="Text 59"/>
+          <p:cNvSpPr/>
+          <p:nvPr/>
+        </p:nvSpPr>
+        <p:spPr>
+          <a:xfrm>
+            <a:off x="6272784" y="5897880"/>
+            <a:ext cx="1600200" cy="566928"/>
+          </a:xfrm>
+          <a:prstGeom prst="rect">
+            <a:avLst/>
+          </a:prstGeom>
+          <a:noFill/>
+          <a:ln/>
+        </p:spPr>
+        <p:txBody>
+          <a:bodyPr wrap="square" lIns="0" tIns="0" rIns="0" bIns="0" rtlCol="0" anchor="ctr"/>
+          <a:lstStyle/>
+          <a:p>
+            <a:pPr algn="ctr" indent="0" marL="0">
+              <a:lnSpc>
+                <a:spcPct val="95000"/>
+              </a:lnSpc>
+              <a:buNone/>
+            </a:pPr>
+            <a:r>
+              <a:rPr lang="en-US" sz="1050" b="1" dirty="0">
+                <a:solidFill>
+                  <a:srgbClr val="FFFFFF"/>
+                </a:solidFill>
+                <a:latin typeface="Calibri" pitchFamily="34" charset="0"/>
+                <a:ea typeface="Calibri" pitchFamily="34" charset="-122"/>
+                <a:cs typeface="Calibri" pitchFamily="34" charset="-120"/>
+              </a:rPr>
+              <a:t>Feature store (verzováno)</a:t>
+            </a:r>
+            <a:endParaRPr lang="en-US" sz="1050" dirty="0"/>
+          </a:p>
+        </p:txBody>
+      </p:sp>
+      <p:sp>
+        <p:nvSpPr>
+          <p:cNvPr id="70" name="Text 60"/>
+          <p:cNvSpPr/>
+          <p:nvPr/>
+        </p:nvSpPr>
+        <p:spPr>
+          <a:xfrm>
+            <a:off x="7754112" y="5897880"/>
+            <a:ext cx="365760" cy="566928"/>
+          </a:xfrm>
+          <a:prstGeom prst="rect">
+            <a:avLst/>
+          </a:prstGeom>
+          <a:noFill/>
+          <a:ln/>
+        </p:spPr>
+        <p:txBody>
+          <a:bodyPr wrap="square" lIns="0" tIns="0" rIns="0" bIns="0" rtlCol="0" anchor="ctr"/>
+          <a:lstStyle/>
+          <a:p>
+            <a:pPr algn="ctr" indent="0" marL="0">
+              <a:buNone/>
+            </a:pPr>
+            <a:r>
+              <a:rPr lang="en-US" sz="1800" b="1" dirty="0">
+                <a:solidFill>
+                  <a:srgbClr val="19C37D"/>
+                </a:solidFill>
+                <a:latin typeface="Georgia" pitchFamily="34" charset="0"/>
+                <a:ea typeface="Georgia" pitchFamily="34" charset="-122"/>
+                <a:cs typeface="Georgia" pitchFamily="34" charset="-120"/>
+              </a:rPr>
+              <a:t>›</a:t>
+            </a:r>
+            <a:endParaRPr lang="en-US" sz="1800" dirty="0"/>
+          </a:p>
+        </p:txBody>
+      </p:sp>
+      <p:sp>
+        <p:nvSpPr>
+          <p:cNvPr id="71" name="Text 61"/>
+          <p:cNvSpPr/>
+          <p:nvPr/>
+        </p:nvSpPr>
+        <p:spPr>
+          <a:xfrm>
+            <a:off x="8074152" y="5897880"/>
+            <a:ext cx="1600200" cy="566928"/>
+          </a:xfrm>
+          <a:prstGeom prst="rect">
+            <a:avLst/>
+          </a:prstGeom>
+          <a:noFill/>
+          <a:ln/>
+        </p:spPr>
+        <p:txBody>
+          <a:bodyPr wrap="square" lIns="0" tIns="0" rIns="0" bIns="0" rtlCol="0" anchor="ctr"/>
+          <a:lstStyle/>
+          <a:p>
+            <a:pPr algn="ctr" indent="0" marL="0">
+              <a:lnSpc>
+                <a:spcPct val="95000"/>
+              </a:lnSpc>
+              <a:buNone/>
+            </a:pPr>
+            <a:r>
+              <a:rPr lang="en-US" sz="1050" b="1" dirty="0">
+                <a:solidFill>
+                  <a:srgbClr val="FFFFFF"/>
+                </a:solidFill>
+                <a:latin typeface="Calibri" pitchFamily="34" charset="0"/>
+                <a:ea typeface="Calibri" pitchFamily="34" charset="-122"/>
+                <a:cs typeface="Calibri" pitchFamily="34" charset="-120"/>
+              </a:rPr>
+              <a:t>Re-train modelu</a:t>
+            </a:r>
+            <a:endParaRPr lang="en-US" sz="1050" dirty="0"/>
+          </a:p>
+        </p:txBody>
+      </p:sp>
+      <p:sp>
+        <p:nvSpPr>
+          <p:cNvPr id="72" name="Text 62"/>
+          <p:cNvSpPr/>
+          <p:nvPr/>
+        </p:nvSpPr>
+        <p:spPr>
+          <a:xfrm>
+            <a:off x="9555480" y="5897880"/>
+            <a:ext cx="365760" cy="566928"/>
+          </a:xfrm>
+          <a:prstGeom prst="rect">
+            <a:avLst/>
+          </a:prstGeom>
+          <a:noFill/>
+          <a:ln/>
+        </p:spPr>
+        <p:txBody>
+          <a:bodyPr wrap="square" lIns="0" tIns="0" rIns="0" bIns="0" rtlCol="0" anchor="ctr"/>
+          <a:lstStyle/>
+          <a:p>
+            <a:pPr algn="ctr" indent="0" marL="0">
+              <a:buNone/>
+            </a:pPr>
+            <a:r>
+              <a:rPr lang="en-US" sz="1800" b="1" dirty="0">
+                <a:solidFill>
+                  <a:srgbClr val="19C37D"/>
+                </a:solidFill>
+                <a:latin typeface="Georgia" pitchFamily="34" charset="0"/>
+                <a:ea typeface="Georgia" pitchFamily="34" charset="-122"/>
+                <a:cs typeface="Georgia" pitchFamily="34" charset="-120"/>
+              </a:rPr>
+              <a:t>›</a:t>
+            </a:r>
+            <a:endParaRPr lang="en-US" sz="1800" dirty="0"/>
+          </a:p>
+        </p:txBody>
+      </p:sp>
+      <p:sp>
+        <p:nvSpPr>
+          <p:cNvPr id="73" name="Text 63"/>
+          <p:cNvSpPr/>
+          <p:nvPr/>
+        </p:nvSpPr>
+        <p:spPr>
+          <a:xfrm>
+            <a:off x="9875520" y="5897880"/>
+            <a:ext cx="1600200" cy="566928"/>
+          </a:xfrm>
+          <a:prstGeom prst="rect">
+            <a:avLst/>
+          </a:prstGeom>
+          <a:noFill/>
+          <a:ln/>
+        </p:spPr>
+        <p:txBody>
+          <a:bodyPr wrap="square" lIns="0" tIns="0" rIns="0" bIns="0" rtlCol="0" anchor="ctr"/>
+          <a:lstStyle/>
+          <a:p>
+            <a:pPr algn="ctr" indent="0" marL="0">
+              <a:lnSpc>
+                <a:spcPct val="95000"/>
+              </a:lnSpc>
+              <a:buNone/>
+            </a:pPr>
+            <a:r>
+              <a:rPr lang="en-US" sz="1050" b="1" dirty="0">
+                <a:solidFill>
+                  <a:srgbClr val="FFFFFF"/>
+                </a:solidFill>
+                <a:latin typeface="Calibri" pitchFamily="34" charset="0"/>
+                <a:ea typeface="Calibri" pitchFamily="34" charset="-122"/>
+                <a:cs typeface="Calibri" pitchFamily="34" charset="-120"/>
+              </a:rPr>
+              <a:t>Nové skóre v appce</a:t>
+            </a:r>
+            <a:endParaRPr lang="en-US" sz="1050" dirty="0"/>
+          </a:p>
+        </p:txBody>
+      </p:sp>
+      <p:sp>
+        <p:nvSpPr>
+          <p:cNvPr id="74" name="Text 64"/>
+          <p:cNvSpPr/>
+          <p:nvPr/>
+        </p:nvSpPr>
+        <p:spPr>
+          <a:xfrm>
+            <a:off x="457200" y="6473952"/>
+            <a:ext cx="5486400" cy="274320"/>
+          </a:xfrm>
+          <a:prstGeom prst="rect">
+            <a:avLst/>
+          </a:prstGeom>
+          <a:noFill/>
+          <a:ln/>
+        </p:spPr>
+        <p:txBody>
+          <a:bodyPr wrap="square" lIns="0" tIns="0" rIns="0" bIns="0" rtlCol="0" anchor="ctr"/>
+          <a:lstStyle/>
+          <a:p>
+            <a:pPr algn="l" indent="0" marL="0">
+              <a:buNone/>
+            </a:pPr>
+            <a:r>
+              <a:rPr lang="en-US" sz="1050" b="1" dirty="0">
+                <a:solidFill>
+                  <a:srgbClr val="0E1726"/>
+                </a:solidFill>
+                <a:latin typeface="Calibri" pitchFamily="34" charset="0"/>
+                <a:ea typeface="Calibri" pitchFamily="34" charset="-122"/>
+                <a:cs typeface="Calibri" pitchFamily="34" charset="-120"/>
+              </a:rPr>
+              <a:t>VoltPlán</a:t>
+            </a:r>
+            <a:pPr algn="l" indent="0" marL="0">
+              <a:buNone/>
+            </a:pPr>
+            <a:r>
+              <a:rPr lang="en-US" sz="1050" dirty="0">
+                <a:solidFill>
+                  <a:srgbClr val="55626F"/>
+                </a:solidFill>
+                <a:latin typeface="Calibri" pitchFamily="34" charset="0"/>
+                <a:ea typeface="Calibri" pitchFamily="34" charset="-122"/>
+                <a:cs typeface="Calibri" pitchFamily="34" charset="-120"/>
+              </a:rPr>
+              <a:t>  ·  AIO_PHA-02-PHA</a:t>
+            </a:r>
+            <a:endParaRPr lang="en-US" sz="1050" dirty="0"/>
+          </a:p>
+        </p:txBody>
+      </p:sp>
+      <p:sp>
+        <p:nvSpPr>
+          <p:cNvPr id="75" name="Text 65"/>
+          <p:cNvSpPr/>
+          <p:nvPr/>
+        </p:nvSpPr>
+        <p:spPr>
+          <a:xfrm>
+            <a:off x="10637215" y="6473952"/>
+            <a:ext cx="1097280" cy="274320"/>
+          </a:xfrm>
+          <a:prstGeom prst="rect">
+            <a:avLst/>
+          </a:prstGeom>
+          <a:noFill/>
+          <a:ln/>
+        </p:spPr>
+        <p:txBody>
+          <a:bodyPr wrap="square" lIns="0" tIns="0" rIns="0" bIns="0" rtlCol="0" anchor="ctr"/>
+          <a:lstStyle/>
+          <a:p>
+            <a:pPr algn="r" indent="0" marL="0">
+              <a:buNone/>
+            </a:pPr>
+            <a:r>
+              <a:rPr lang="en-US" sz="1050" dirty="0">
+                <a:solidFill>
+                  <a:srgbClr val="55626F"/>
+                </a:solidFill>
+                <a:latin typeface="Calibri" pitchFamily="34" charset="0"/>
+                <a:ea typeface="Calibri" pitchFamily="34" charset="-122"/>
+                <a:cs typeface="Calibri" pitchFamily="34" charset="-120"/>
+              </a:rPr>
+              <a:t>05 / 12</a:t>
+            </a:r>
+            <a:endParaRPr lang="en-US" sz="1050" dirty="0"/>
+          </a:p>
+        </p:txBody>
+      </p:sp>
+    </p:spTree>
+  </p:cSld>
+  <p:clrMapOvr>
+    <a:masterClrMapping/>
+  </p:clrMapOvr>
+</p:sld>
+</file>
+
+<file path=ppt/slides/slide6.xml><?xml version="1.0" encoding="utf-8"?>
+<p:sld xmlns:a="http://schemas.openxmlformats.org/drawingml/2006/main" xmlns:r="http://schemas.openxmlformats.org/officeDocument/2006/relationships" xmlns:p="http://schemas.openxmlformats.org/presentationml/2006/main">
+  <p:cSld name="Slide 6">
     <p:bg>
       <p:bgPr>
         <a:solidFill>
@@ -7574,939 +12601,7 @@
                 <a:ea typeface="Calibri" pitchFamily="34" charset="-122"/>
                 <a:cs typeface="Calibri" pitchFamily="34" charset="-120"/>
               </a:rPr>
-              <a:t>05 / 10</a:t>
-            </a:r>
-            <a:endParaRPr lang="en-US" sz="1050" dirty="0"/>
-          </a:p>
-        </p:txBody>
-      </p:sp>
-    </p:spTree>
-  </p:cSld>
-  <p:clrMapOvr>
-    <a:masterClrMapping/>
-  </p:clrMapOvr>
-</p:sld>
-</file>
-
-<file path=ppt/slides/slide6.xml><?xml version="1.0" encoding="utf-8"?>
-<p:sld xmlns:a="http://schemas.openxmlformats.org/drawingml/2006/main" xmlns:r="http://schemas.openxmlformats.org/officeDocument/2006/relationships" xmlns:p="http://schemas.openxmlformats.org/presentationml/2006/main">
-  <p:cSld name="Slide 6">
-    <p:bg>
-      <p:bgPr>
-        <a:solidFill>
-          <a:srgbClr val="F3F6F9"/>
-        </a:solidFill>
-      </p:bgPr>
-    </p:bg>
-    <p:spTree>
-      <p:nvGrpSpPr>
-        <p:cNvPr id="1" name=""/>
-        <p:cNvGrpSpPr/>
-        <p:nvPr/>
-      </p:nvGrpSpPr>
-      <p:grpSpPr>
-        <a:xfrm>
-          <a:off x="0" y="0"/>
-          <a:ext cx="0" cy="0"/>
-          <a:chOff x="0" y="0"/>
-          <a:chExt cx="0" cy="0"/>
-        </a:xfrm>
-      </p:grpSpPr>
-      <p:sp>
-        <p:nvSpPr>
-          <p:cNvPr id="2" name="Text 0"/>
-          <p:cNvSpPr/>
-          <p:nvPr/>
-        </p:nvSpPr>
-        <p:spPr>
-          <a:xfrm>
-            <a:off x="640080" y="502920"/>
-            <a:ext cx="10058400" cy="274320"/>
-          </a:xfrm>
-          <a:prstGeom prst="rect">
-            <a:avLst/>
-          </a:prstGeom>
-          <a:noFill/>
-          <a:ln/>
-        </p:spPr>
-        <p:txBody>
-          <a:bodyPr wrap="square" lIns="0" tIns="0" rIns="0" bIns="0" rtlCol="0" anchor="ctr"/>
-          <a:lstStyle/>
-          <a:p>
-            <a:pPr algn="l" indent="0" marL="0">
-              <a:buNone/>
-            </a:pPr>
-            <a:r>
-              <a:rPr lang="en-US" sz="1200" b="1" spc="300" kern="0" dirty="0">
-                <a:solidFill>
-                  <a:srgbClr val="19C37D"/>
-                </a:solidFill>
-                <a:latin typeface="Calibri" pitchFamily="34" charset="0"/>
-                <a:ea typeface="Calibri" pitchFamily="34" charset="-122"/>
-                <a:cs typeface="Calibri" pitchFamily="34" charset="-120"/>
-              </a:rPr>
-              <a:t>VÝSLEDKY &amp; ŽIVÉ DEMO</a:t>
-            </a:r>
-            <a:endParaRPr lang="en-US" sz="1200" dirty="0"/>
-          </a:p>
-        </p:txBody>
-      </p:sp>
-      <p:sp>
-        <p:nvSpPr>
-          <p:cNvPr id="3" name="Text 1"/>
-          <p:cNvSpPr/>
-          <p:nvPr/>
-        </p:nvSpPr>
-        <p:spPr>
-          <a:xfrm>
-            <a:off x="640080" y="795528"/>
-            <a:ext cx="11002975" cy="1005840"/>
-          </a:xfrm>
-          <a:prstGeom prst="rect">
-            <a:avLst/>
-          </a:prstGeom>
-          <a:noFill/>
-          <a:ln/>
-        </p:spPr>
-        <p:txBody>
-          <a:bodyPr wrap="square" lIns="0" tIns="0" rIns="0" bIns="0" rtlCol="0" anchor="t"/>
-          <a:lstStyle/>
-          <a:p>
-            <a:pPr algn="l" indent="0" marL="0">
-              <a:lnSpc>
-                <a:spcPct val="102000"/>
-              </a:lnSpc>
-              <a:buNone/>
-            </a:pPr>
-            <a:r>
-              <a:rPr lang="en-US" sz="3100" b="1" dirty="0">
-                <a:solidFill>
-                  <a:srgbClr val="0E1726"/>
-                </a:solidFill>
-                <a:latin typeface="Georgia" pitchFamily="34" charset="0"/>
-                <a:ea typeface="Georgia" pitchFamily="34" charset="-122"/>
-                <a:cs typeface="Georgia" pitchFamily="34" charset="-120"/>
-              </a:rPr>
-              <a:t>Z modelu rovnou akční seznam</a:t>
-            </a:r>
-            <a:endParaRPr lang="en-US" sz="3100" dirty="0"/>
-          </a:p>
-          <a:p>
-            <a:pPr algn="l" indent="0" marL="0">
-              <a:lnSpc>
-                <a:spcPct val="102000"/>
-              </a:lnSpc>
-              <a:buNone/>
-            </a:pPr>
-            <a:r>
-              <a:rPr lang="en-US" sz="3100" b="1" dirty="0">
-                <a:solidFill>
-                  <a:srgbClr val="0E1726"/>
-                </a:solidFill>
-                <a:latin typeface="Georgia" pitchFamily="34" charset="0"/>
-                <a:ea typeface="Georgia" pitchFamily="34" charset="-122"/>
-                <a:cs typeface="Georgia" pitchFamily="34" charset="-120"/>
-              </a:rPr>
-              <a:t>pro radnici.</a:t>
-            </a:r>
-            <a:endParaRPr lang="en-US" sz="3100" dirty="0"/>
-          </a:p>
-        </p:txBody>
-      </p:sp>
-      <p:sp>
-        <p:nvSpPr>
-          <p:cNvPr id="4" name="Shape 2"/>
-          <p:cNvSpPr/>
-          <p:nvPr/>
-        </p:nvSpPr>
-        <p:spPr>
-          <a:xfrm>
-            <a:off x="640080" y="2286000"/>
-            <a:ext cx="5943600" cy="3657600"/>
-          </a:xfrm>
-          <a:prstGeom prst="rect">
-            <a:avLst/>
-          </a:prstGeom>
-          <a:solidFill>
-            <a:srgbClr val="0E1726"/>
-          </a:solidFill>
-          <a:ln/>
-          <a:effectLst>
-            <a:outerShdw sx="100000" sy="100000" kx="0" ky="0" algn="bl" rotWithShape="0" blurRad="76200" dist="25400" dir="5400000">
-              <a:srgbClr val="0E1726">
-                <a:alpha val="10000"/>
-              </a:srgbClr>
-            </a:outerShdw>
-          </a:effectLst>
-        </p:spPr>
-      </p:sp>
-      <p:sp>
-        <p:nvSpPr>
-          <p:cNvPr id="5" name="Shape 3"/>
-          <p:cNvSpPr/>
-          <p:nvPr/>
-        </p:nvSpPr>
-        <p:spPr>
-          <a:xfrm>
-            <a:off x="2651760" y="3246120"/>
-            <a:ext cx="1920240" cy="1920240"/>
-          </a:xfrm>
-          <a:prstGeom prst="roundRect">
-            <a:avLst>
-              <a:gd name="adj" fmla="val 9524"/>
-            </a:avLst>
-          </a:prstGeom>
-          <a:solidFill>
-            <a:srgbClr val="18283F"/>
-          </a:solidFill>
-          <a:ln/>
-        </p:spPr>
-      </p:sp>
-      <p:pic>
-        <p:nvPicPr>
-          <p:cNvPr id="6" name="Image 0" descr="preencoded.png">    </p:cNvPr>
-          <p:cNvPicPr>
-            <a:picLocks noChangeAspect="1"/>
-          </p:cNvPicPr>
-          <p:nvPr/>
-        </p:nvPicPr>
-        <p:blipFill>
-          <a:blip r:embed="rId1"/>
-          <a:stretch>
-            <a:fillRect/>
-          </a:stretch>
-        </p:blipFill>
-        <p:spPr>
-          <a:xfrm>
-            <a:off x="3200400" y="3794760"/>
-            <a:ext cx="822960" cy="822960"/>
-          </a:xfrm>
-          <a:prstGeom prst="rect">
-            <a:avLst/>
-          </a:prstGeom>
-        </p:spPr>
-      </p:pic>
-      <p:sp>
-        <p:nvSpPr>
-          <p:cNvPr id="7" name="Text 4"/>
-          <p:cNvSpPr/>
-          <p:nvPr/>
-        </p:nvSpPr>
-        <p:spPr>
-          <a:xfrm>
-            <a:off x="640080" y="5257800"/>
-            <a:ext cx="5943600" cy="320040"/>
-          </a:xfrm>
-          <a:prstGeom prst="rect">
-            <a:avLst/>
-          </a:prstGeom>
-          <a:noFill/>
-          <a:ln/>
-        </p:spPr>
-        <p:txBody>
-          <a:bodyPr wrap="square" lIns="0" tIns="0" rIns="0" bIns="0" rtlCol="0" anchor="ctr"/>
-          <a:lstStyle/>
-          <a:p>
-            <a:pPr algn="ctr" indent="0" marL="0">
-              <a:buNone/>
-            </a:pPr>
-            <a:r>
-              <a:rPr lang="en-US" sz="1300" b="1" spc="200" kern="0" dirty="0">
-                <a:solidFill>
-                  <a:srgbClr val="19C37D"/>
-                </a:solidFill>
-                <a:latin typeface="Calibri" pitchFamily="34" charset="0"/>
-                <a:ea typeface="Calibri" pitchFamily="34" charset="-122"/>
-                <a:cs typeface="Calibri" pitchFamily="34" charset="-120"/>
-              </a:rPr>
-              <a:t>[ SCREENSHOT ŽIVÉHO DEMA ]</a:t>
-            </a:r>
-            <a:endParaRPr lang="en-US" sz="1300" dirty="0"/>
-          </a:p>
-        </p:txBody>
-      </p:sp>
-      <p:sp>
-        <p:nvSpPr>
-          <p:cNvPr id="8" name="Text 5"/>
-          <p:cNvSpPr/>
-          <p:nvPr/>
-        </p:nvSpPr>
-        <p:spPr>
-          <a:xfrm>
-            <a:off x="1005840" y="5577840"/>
-            <a:ext cx="5212080" cy="457200"/>
-          </a:xfrm>
-          <a:prstGeom prst="rect">
-            <a:avLst/>
-          </a:prstGeom>
-          <a:noFill/>
-          <a:ln/>
-        </p:spPr>
-        <p:txBody>
-          <a:bodyPr wrap="square" lIns="0" tIns="0" rIns="0" bIns="0" rtlCol="0" anchor="ctr"/>
-          <a:lstStyle/>
-          <a:p>
-            <a:pPr algn="ctr" indent="0" marL="0">
-              <a:lnSpc>
-                <a:spcPct val="100000"/>
-              </a:lnSpc>
-              <a:buNone/>
-            </a:pPr>
-            <a:r>
-              <a:rPr lang="en-US" sz="1050" i="1" dirty="0">
-                <a:solidFill>
-                  <a:srgbClr val="9DB2C6"/>
-                </a:solidFill>
-                <a:latin typeface="Calibri" pitchFamily="34" charset="0"/>
-                <a:ea typeface="Calibri" pitchFamily="34" charset="-122"/>
-                <a:cs typeface="Calibri" pitchFamily="34" charset="-120"/>
-              </a:rPr>
-              <a:t>Interaktivní mapa Prahy — heatmapa skóre, filtr po obvodech, popup „proč tady“, export pro úřad.</a:t>
-            </a:r>
-            <a:endParaRPr lang="en-US" sz="1050" dirty="0"/>
-          </a:p>
-        </p:txBody>
-      </p:sp>
-      <p:sp>
-        <p:nvSpPr>
-          <p:cNvPr id="9" name="Text 6"/>
-          <p:cNvSpPr/>
-          <p:nvPr/>
-        </p:nvSpPr>
-        <p:spPr>
-          <a:xfrm>
-            <a:off x="6858000" y="2286000"/>
-            <a:ext cx="4572000" cy="274320"/>
-          </a:xfrm>
-          <a:prstGeom prst="rect">
-            <a:avLst/>
-          </a:prstGeom>
-          <a:noFill/>
-          <a:ln/>
-        </p:spPr>
-        <p:txBody>
-          <a:bodyPr wrap="square" lIns="0" tIns="0" rIns="0" bIns="0" rtlCol="0" anchor="ctr"/>
-          <a:lstStyle/>
-          <a:p>
-            <a:pPr indent="0" marL="0">
-              <a:buNone/>
-            </a:pPr>
-            <a:r>
-              <a:rPr lang="en-US" sz="1200" b="1" spc="150" kern="0" dirty="0">
-                <a:solidFill>
-                  <a:srgbClr val="0E9E63"/>
-                </a:solidFill>
-                <a:latin typeface="Calibri" pitchFamily="34" charset="0"/>
-                <a:ea typeface="Calibri" pitchFamily="34" charset="-122"/>
-                <a:cs typeface="Calibri" pitchFamily="34" charset="-120"/>
-              </a:rPr>
-              <a:t>TOP DOPORUČENÁ LOKACE</a:t>
-            </a:r>
-            <a:endParaRPr lang="en-US" sz="1200" dirty="0"/>
-          </a:p>
-        </p:txBody>
-      </p:sp>
-      <p:sp>
-        <p:nvSpPr>
-          <p:cNvPr id="10" name="Shape 7"/>
-          <p:cNvSpPr/>
-          <p:nvPr/>
-        </p:nvSpPr>
-        <p:spPr>
-          <a:xfrm>
-            <a:off x="6858000" y="2606040"/>
-            <a:ext cx="4709160" cy="1371600"/>
-          </a:xfrm>
-          <a:prstGeom prst="rect">
-            <a:avLst/>
-          </a:prstGeom>
-          <a:solidFill>
-            <a:srgbClr val="FFFFFF"/>
-          </a:solidFill>
-          <a:ln w="12700">
-            <a:solidFill>
-              <a:srgbClr val="E1E8EF"/>
-            </a:solidFill>
-            <a:prstDash val="solid"/>
-          </a:ln>
-          <a:effectLst>
-            <a:outerShdw sx="100000" sy="100000" kx="0" ky="0" algn="bl" rotWithShape="0" blurRad="76200" dist="25400" dir="5400000">
-              <a:srgbClr val="0E1726">
-                <a:alpha val="10000"/>
-              </a:srgbClr>
-            </a:outerShdw>
-          </a:effectLst>
-        </p:spPr>
-      </p:sp>
-      <p:sp>
-        <p:nvSpPr>
-          <p:cNvPr id="11" name="Shape 8"/>
-          <p:cNvSpPr/>
-          <p:nvPr/>
-        </p:nvSpPr>
-        <p:spPr>
-          <a:xfrm>
-            <a:off x="6858000" y="2606040"/>
-            <a:ext cx="109728" cy="1371600"/>
-          </a:xfrm>
-          <a:prstGeom prst="rect">
-            <a:avLst/>
-          </a:prstGeom>
-          <a:solidFill>
-            <a:srgbClr val="19C37D"/>
-          </a:solidFill>
-          <a:ln/>
-        </p:spPr>
-      </p:sp>
-      <p:sp>
-        <p:nvSpPr>
-          <p:cNvPr id="12" name="Text 9"/>
-          <p:cNvSpPr/>
-          <p:nvPr/>
-        </p:nvSpPr>
-        <p:spPr>
-          <a:xfrm>
-            <a:off x="7086600" y="2743200"/>
-            <a:ext cx="1371600" cy="822960"/>
-          </a:xfrm>
-          <a:prstGeom prst="rect">
-            <a:avLst/>
-          </a:prstGeom>
-          <a:noFill/>
-          <a:ln/>
-        </p:spPr>
-        <p:txBody>
-          <a:bodyPr wrap="square" lIns="0" tIns="0" rIns="0" bIns="0" rtlCol="0" anchor="ctr"/>
-          <a:lstStyle/>
-          <a:p>
-            <a:pPr indent="0" marL="0">
-              <a:buNone/>
-            </a:pPr>
-            <a:r>
-              <a:rPr lang="en-US" sz="4000" b="1" dirty="0">
-                <a:solidFill>
-                  <a:srgbClr val="19C37D"/>
-                </a:solidFill>
-                <a:latin typeface="Georgia" pitchFamily="34" charset="0"/>
-                <a:ea typeface="Georgia" pitchFamily="34" charset="-122"/>
-                <a:cs typeface="Georgia" pitchFamily="34" charset="-120"/>
-              </a:rPr>
-              <a:t>91,1</a:t>
-            </a:r>
-            <a:endParaRPr lang="en-US" sz="4000" dirty="0"/>
-          </a:p>
-        </p:txBody>
-      </p:sp>
-      <p:sp>
-        <p:nvSpPr>
-          <p:cNvPr id="13" name="Text 10"/>
-          <p:cNvSpPr/>
-          <p:nvPr/>
-        </p:nvSpPr>
-        <p:spPr>
-          <a:xfrm>
-            <a:off x="7114032" y="3520440"/>
-            <a:ext cx="1371600" cy="274320"/>
-          </a:xfrm>
-          <a:prstGeom prst="rect">
-            <a:avLst/>
-          </a:prstGeom>
-          <a:noFill/>
-          <a:ln/>
-        </p:spPr>
-        <p:txBody>
-          <a:bodyPr wrap="square" lIns="0" tIns="0" rIns="0" bIns="0" rtlCol="0" anchor="ctr"/>
-          <a:lstStyle/>
-          <a:p>
-            <a:pPr indent="0" marL="0">
-              <a:buNone/>
-            </a:pPr>
-            <a:r>
-              <a:rPr lang="en-US" sz="1200" dirty="0">
-                <a:solidFill>
-                  <a:srgbClr val="55626F"/>
-                </a:solidFill>
-                <a:latin typeface="Calibri" pitchFamily="34" charset="0"/>
-                <a:ea typeface="Calibri" pitchFamily="34" charset="-122"/>
-                <a:cs typeface="Calibri" pitchFamily="34" charset="-120"/>
-              </a:rPr>
-              <a:t>/100</a:t>
-            </a:r>
-            <a:endParaRPr lang="en-US" sz="1200" dirty="0"/>
-          </a:p>
-        </p:txBody>
-      </p:sp>
-      <p:sp>
-        <p:nvSpPr>
-          <p:cNvPr id="14" name="Text 11"/>
-          <p:cNvSpPr/>
-          <p:nvPr/>
-        </p:nvSpPr>
-        <p:spPr>
-          <a:xfrm>
-            <a:off x="8595360" y="2743200"/>
-            <a:ext cx="2834640" cy="1143000"/>
-          </a:xfrm>
-          <a:prstGeom prst="rect">
-            <a:avLst/>
-          </a:prstGeom>
-          <a:noFill/>
-          <a:ln/>
-        </p:spPr>
-        <p:txBody>
-          <a:bodyPr wrap="square" lIns="0" tIns="0" rIns="0" bIns="0" rtlCol="0" anchor="ctr"/>
-          <a:lstStyle/>
-          <a:p>
-            <a:pPr indent="0" marL="0">
-              <a:lnSpc>
-                <a:spcPct val="110000"/>
-              </a:lnSpc>
-              <a:buNone/>
-            </a:pPr>
-            <a:r>
-              <a:rPr lang="en-US" sz="1500" b="1" dirty="0">
-                <a:solidFill>
-                  <a:srgbClr val="0E1726"/>
-                </a:solidFill>
-                <a:latin typeface="Calibri" pitchFamily="34" charset="0"/>
-                <a:ea typeface="Calibri" pitchFamily="34" charset="-122"/>
-                <a:cs typeface="Calibri" pitchFamily="34" charset="-120"/>
-              </a:rPr>
-              <a:t>TS_3820 · Praha 13
-</a:t>
-            </a:r>
-            <a:pPr indent="0" marL="0">
-              <a:lnSpc>
-                <a:spcPct val="110000"/>
-              </a:lnSpc>
-              <a:buNone/>
-            </a:pPr>
-            <a:r>
-              <a:rPr lang="en-US" sz="1100" dirty="0">
-                <a:solidFill>
-                  <a:srgbClr val="55626F"/>
-                </a:solidFill>
-                <a:latin typeface="Calibri" pitchFamily="34" charset="0"/>
-                <a:ea typeface="Calibri" pitchFamily="34" charset="-122"/>
-                <a:cs typeface="Calibri" pitchFamily="34" charset="-120"/>
-              </a:rPr>
-              <a:t>predikce ~201 EV 2030 · jen 1 stanice dnes · volná rezerva sítě</a:t>
-            </a:r>
-            <a:endParaRPr lang="en-US" sz="1500" dirty="0"/>
-          </a:p>
-        </p:txBody>
-      </p:sp>
-      <p:sp>
-        <p:nvSpPr>
-          <p:cNvPr id="15" name="Shape 12"/>
-          <p:cNvSpPr/>
-          <p:nvPr/>
-        </p:nvSpPr>
-        <p:spPr>
-          <a:xfrm>
-            <a:off x="6858000" y="4160520"/>
-            <a:ext cx="1463040" cy="1783080"/>
-          </a:xfrm>
-          <a:prstGeom prst="rect">
-            <a:avLst/>
-          </a:prstGeom>
-          <a:solidFill>
-            <a:srgbClr val="0E1726"/>
-          </a:solidFill>
-          <a:ln/>
-          <a:effectLst>
-            <a:outerShdw sx="100000" sy="100000" kx="0" ky="0" algn="bl" rotWithShape="0" blurRad="76200" dist="25400" dir="5400000">
-              <a:srgbClr val="0E1726">
-                <a:alpha val="10000"/>
-              </a:srgbClr>
-            </a:outerShdw>
-          </a:effectLst>
-        </p:spPr>
-      </p:sp>
-      <p:sp>
-        <p:nvSpPr>
-          <p:cNvPr id="16" name="Text 13"/>
-          <p:cNvSpPr/>
-          <p:nvPr/>
-        </p:nvSpPr>
-        <p:spPr>
-          <a:xfrm>
-            <a:off x="6903720" y="4434840"/>
-            <a:ext cx="1371600" cy="640080"/>
-          </a:xfrm>
-          <a:prstGeom prst="rect">
-            <a:avLst/>
-          </a:prstGeom>
-          <a:noFill/>
-          <a:ln/>
-        </p:spPr>
-        <p:txBody>
-          <a:bodyPr wrap="square" lIns="0" tIns="0" rIns="0" bIns="0" rtlCol="0" anchor="ctr"/>
-          <a:lstStyle/>
-          <a:p>
-            <a:pPr algn="ctr" indent="0" marL="0">
-              <a:buNone/>
-            </a:pPr>
-            <a:r>
-              <a:rPr lang="en-US" sz="2300" b="1" dirty="0">
-                <a:solidFill>
-                  <a:srgbClr val="19C37D"/>
-                </a:solidFill>
-                <a:latin typeface="Georgia" pitchFamily="34" charset="0"/>
-                <a:ea typeface="Georgia" pitchFamily="34" charset="-122"/>
-                <a:cs typeface="Georgia" pitchFamily="34" charset="-120"/>
-              </a:rPr>
-              <a:t>517</a:t>
-            </a:r>
-            <a:endParaRPr lang="en-US" sz="2300" dirty="0"/>
-          </a:p>
-        </p:txBody>
-      </p:sp>
-      <p:sp>
-        <p:nvSpPr>
-          <p:cNvPr id="17" name="Text 14"/>
-          <p:cNvSpPr/>
-          <p:nvPr/>
-        </p:nvSpPr>
-        <p:spPr>
-          <a:xfrm>
-            <a:off x="6903720" y="5166360"/>
-            <a:ext cx="1371600" cy="640080"/>
-          </a:xfrm>
-          <a:prstGeom prst="rect">
-            <a:avLst/>
-          </a:prstGeom>
-          <a:noFill/>
-          <a:ln/>
-        </p:spPr>
-        <p:txBody>
-          <a:bodyPr wrap="square" lIns="0" tIns="0" rIns="0" bIns="0" rtlCol="0" anchor="t"/>
-          <a:lstStyle/>
-          <a:p>
-            <a:pPr algn="ctr" indent="0" marL="0">
-              <a:lnSpc>
-                <a:spcPct val="105000"/>
-              </a:lnSpc>
-              <a:buNone/>
-            </a:pPr>
-            <a:r>
-              <a:rPr lang="en-US" sz="1100" dirty="0">
-                <a:solidFill>
-                  <a:srgbClr val="9DB2C6"/>
-                </a:solidFill>
-                <a:latin typeface="Calibri" pitchFamily="34" charset="0"/>
-                <a:ea typeface="Calibri" pitchFamily="34" charset="-122"/>
-                <a:cs typeface="Calibri" pitchFamily="34" charset="-120"/>
-              </a:rPr>
-              <a:t>zón oskórováno</a:t>
-            </a:r>
-            <a:endParaRPr lang="en-US" sz="1100" dirty="0"/>
-          </a:p>
-        </p:txBody>
-      </p:sp>
-      <p:sp>
-        <p:nvSpPr>
-          <p:cNvPr id="18" name="Shape 15"/>
-          <p:cNvSpPr/>
-          <p:nvPr/>
-        </p:nvSpPr>
-        <p:spPr>
-          <a:xfrm>
-            <a:off x="8449056" y="4160520"/>
-            <a:ext cx="1463040" cy="1783080"/>
-          </a:xfrm>
-          <a:prstGeom prst="rect">
-            <a:avLst/>
-          </a:prstGeom>
-          <a:solidFill>
-            <a:srgbClr val="0E1726"/>
-          </a:solidFill>
-          <a:ln/>
-          <a:effectLst>
-            <a:outerShdw sx="100000" sy="100000" kx="0" ky="0" algn="bl" rotWithShape="0" blurRad="76200" dist="25400" dir="5400000">
-              <a:srgbClr val="0E1726">
-                <a:alpha val="10000"/>
-              </a:srgbClr>
-            </a:outerShdw>
-          </a:effectLst>
-        </p:spPr>
-      </p:sp>
-      <p:sp>
-        <p:nvSpPr>
-          <p:cNvPr id="19" name="Text 16"/>
-          <p:cNvSpPr/>
-          <p:nvPr/>
-        </p:nvSpPr>
-        <p:spPr>
-          <a:xfrm>
-            <a:off x="8494776" y="4434840"/>
-            <a:ext cx="1371600" cy="640080"/>
-          </a:xfrm>
-          <a:prstGeom prst="rect">
-            <a:avLst/>
-          </a:prstGeom>
-          <a:noFill/>
-          <a:ln/>
-        </p:spPr>
-        <p:txBody>
-          <a:bodyPr wrap="square" lIns="0" tIns="0" rIns="0" bIns="0" rtlCol="0" anchor="ctr"/>
-          <a:lstStyle/>
-          <a:p>
-            <a:pPr algn="ctr" indent="0" marL="0">
-              <a:buNone/>
-            </a:pPr>
-            <a:r>
-              <a:rPr lang="en-US" sz="2300" b="1" dirty="0">
-                <a:solidFill>
-                  <a:srgbClr val="19C37D"/>
-                </a:solidFill>
-                <a:latin typeface="Georgia" pitchFamily="34" charset="0"/>
-                <a:ea typeface="Georgia" pitchFamily="34" charset="-122"/>
-                <a:cs typeface="Georgia" pitchFamily="34" charset="-120"/>
-              </a:rPr>
-              <a:t>TOP-N</a:t>
-            </a:r>
-            <a:endParaRPr lang="en-US" sz="2300" dirty="0"/>
-          </a:p>
-        </p:txBody>
-      </p:sp>
-      <p:sp>
-        <p:nvSpPr>
-          <p:cNvPr id="20" name="Text 17"/>
-          <p:cNvSpPr/>
-          <p:nvPr/>
-        </p:nvSpPr>
-        <p:spPr>
-          <a:xfrm>
-            <a:off x="8494776" y="5166360"/>
-            <a:ext cx="1371600" cy="640080"/>
-          </a:xfrm>
-          <a:prstGeom prst="rect">
-            <a:avLst/>
-          </a:prstGeom>
-          <a:noFill/>
-          <a:ln/>
-        </p:spPr>
-        <p:txBody>
-          <a:bodyPr wrap="square" lIns="0" tIns="0" rIns="0" bIns="0" rtlCol="0" anchor="t"/>
-          <a:lstStyle/>
-          <a:p>
-            <a:pPr algn="ctr" indent="0" marL="0">
-              <a:lnSpc>
-                <a:spcPct val="105000"/>
-              </a:lnSpc>
-              <a:buNone/>
-            </a:pPr>
-            <a:r>
-              <a:rPr lang="en-US" sz="1100" dirty="0">
-                <a:solidFill>
-                  <a:srgbClr val="9DB2C6"/>
-                </a:solidFill>
-                <a:latin typeface="Calibri" pitchFamily="34" charset="0"/>
-                <a:ea typeface="Calibri" pitchFamily="34" charset="-122"/>
-                <a:cs typeface="Calibri" pitchFamily="34" charset="-120"/>
-              </a:rPr>
-              <a:t>žebříček pro úřad</a:t>
-            </a:r>
-            <a:endParaRPr lang="en-US" sz="1100" dirty="0"/>
-          </a:p>
-        </p:txBody>
-      </p:sp>
-      <p:sp>
-        <p:nvSpPr>
-          <p:cNvPr id="21" name="Shape 18"/>
-          <p:cNvSpPr/>
-          <p:nvPr/>
-        </p:nvSpPr>
-        <p:spPr>
-          <a:xfrm>
-            <a:off x="10040112" y="4160520"/>
-            <a:ext cx="1463040" cy="1783080"/>
-          </a:xfrm>
-          <a:prstGeom prst="rect">
-            <a:avLst/>
-          </a:prstGeom>
-          <a:solidFill>
-            <a:srgbClr val="0E1726"/>
-          </a:solidFill>
-          <a:ln/>
-          <a:effectLst>
-            <a:outerShdw sx="100000" sy="100000" kx="0" ky="0" algn="bl" rotWithShape="0" blurRad="76200" dist="25400" dir="5400000">
-              <a:srgbClr val="0E1726">
-                <a:alpha val="10000"/>
-              </a:srgbClr>
-            </a:outerShdw>
-          </a:effectLst>
-        </p:spPr>
-      </p:sp>
-      <p:sp>
-        <p:nvSpPr>
-          <p:cNvPr id="22" name="Text 19"/>
-          <p:cNvSpPr/>
-          <p:nvPr/>
-        </p:nvSpPr>
-        <p:spPr>
-          <a:xfrm>
-            <a:off x="10085832" y="4434840"/>
-            <a:ext cx="1371600" cy="640080"/>
-          </a:xfrm>
-          <a:prstGeom prst="rect">
-            <a:avLst/>
-          </a:prstGeom>
-          <a:noFill/>
-          <a:ln/>
-        </p:spPr>
-        <p:txBody>
-          <a:bodyPr wrap="square" lIns="0" tIns="0" rIns="0" bIns="0" rtlCol="0" anchor="ctr"/>
-          <a:lstStyle/>
-          <a:p>
-            <a:pPr algn="ctr" indent="0" marL="0">
-              <a:buNone/>
-            </a:pPr>
-            <a:r>
-              <a:rPr lang="en-US" sz="2300" b="1" dirty="0">
-                <a:solidFill>
-                  <a:srgbClr val="19C37D"/>
-                </a:solidFill>
-                <a:latin typeface="Georgia" pitchFamily="34" charset="0"/>
-                <a:ea typeface="Georgia" pitchFamily="34" charset="-122"/>
-                <a:cs typeface="Georgia" pitchFamily="34" charset="-120"/>
-              </a:rPr>
-              <a:t>CSV / mapa</a:t>
-            </a:r>
-            <a:endParaRPr lang="en-US" sz="2300" dirty="0"/>
-          </a:p>
-        </p:txBody>
-      </p:sp>
-      <p:sp>
-        <p:nvSpPr>
-          <p:cNvPr id="23" name="Text 20"/>
-          <p:cNvSpPr/>
-          <p:nvPr/>
-        </p:nvSpPr>
-        <p:spPr>
-          <a:xfrm>
-            <a:off x="10085832" y="5166360"/>
-            <a:ext cx="1371600" cy="640080"/>
-          </a:xfrm>
-          <a:prstGeom prst="rect">
-            <a:avLst/>
-          </a:prstGeom>
-          <a:noFill/>
-          <a:ln/>
-        </p:spPr>
-        <p:txBody>
-          <a:bodyPr wrap="square" lIns="0" tIns="0" rIns="0" bIns="0" rtlCol="0" anchor="t"/>
-          <a:lstStyle/>
-          <a:p>
-            <a:pPr algn="ctr" indent="0" marL="0">
-              <a:lnSpc>
-                <a:spcPct val="105000"/>
-              </a:lnSpc>
-              <a:buNone/>
-            </a:pPr>
-            <a:r>
-              <a:rPr lang="en-US" sz="1100" dirty="0">
-                <a:solidFill>
-                  <a:srgbClr val="9DB2C6"/>
-                </a:solidFill>
-                <a:latin typeface="Calibri" pitchFamily="34" charset="0"/>
-                <a:ea typeface="Calibri" pitchFamily="34" charset="-122"/>
-                <a:cs typeface="Calibri" pitchFamily="34" charset="-120"/>
-              </a:rPr>
-              <a:t>export výstupů</a:t>
-            </a:r>
-            <a:endParaRPr lang="en-US" sz="1100" dirty="0"/>
-          </a:p>
-        </p:txBody>
-      </p:sp>
-      <p:sp>
-        <p:nvSpPr>
-          <p:cNvPr id="24" name="Text 21"/>
-          <p:cNvSpPr/>
-          <p:nvPr/>
-        </p:nvSpPr>
-        <p:spPr>
-          <a:xfrm>
-            <a:off x="457200" y="6473952"/>
-            <a:ext cx="5486400" cy="274320"/>
-          </a:xfrm>
-          <a:prstGeom prst="rect">
-            <a:avLst/>
-          </a:prstGeom>
-          <a:noFill/>
-          <a:ln/>
-        </p:spPr>
-        <p:txBody>
-          <a:bodyPr wrap="square" lIns="0" tIns="0" rIns="0" bIns="0" rtlCol="0" anchor="ctr"/>
-          <a:lstStyle/>
-          <a:p>
-            <a:pPr algn="l" indent="0" marL="0">
-              <a:buNone/>
-            </a:pPr>
-            <a:r>
-              <a:rPr lang="en-US" sz="1050" b="1" dirty="0">
-                <a:solidFill>
-                  <a:srgbClr val="0E1726"/>
-                </a:solidFill>
-                <a:latin typeface="Calibri" pitchFamily="34" charset="0"/>
-                <a:ea typeface="Calibri" pitchFamily="34" charset="-122"/>
-                <a:cs typeface="Calibri" pitchFamily="34" charset="-120"/>
-              </a:rPr>
-              <a:t>VoltPlán</a:t>
-            </a:r>
-            <a:pPr algn="l" indent="0" marL="0">
-              <a:buNone/>
-            </a:pPr>
-            <a:r>
-              <a:rPr lang="en-US" sz="1050" dirty="0">
-                <a:solidFill>
-                  <a:srgbClr val="55626F"/>
-                </a:solidFill>
-                <a:latin typeface="Calibri" pitchFamily="34" charset="0"/>
-                <a:ea typeface="Calibri" pitchFamily="34" charset="-122"/>
-                <a:cs typeface="Calibri" pitchFamily="34" charset="-120"/>
-              </a:rPr>
-              <a:t>  ·  AIO_PHA-02-PHA</a:t>
-            </a:r>
-            <a:endParaRPr lang="en-US" sz="1050" dirty="0"/>
-          </a:p>
-        </p:txBody>
-      </p:sp>
-      <p:sp>
-        <p:nvSpPr>
-          <p:cNvPr id="25" name="Text 22"/>
-          <p:cNvSpPr/>
-          <p:nvPr/>
-        </p:nvSpPr>
-        <p:spPr>
-          <a:xfrm>
-            <a:off x="10637215" y="6473952"/>
-            <a:ext cx="1097280" cy="274320"/>
-          </a:xfrm>
-          <a:prstGeom prst="rect">
-            <a:avLst/>
-          </a:prstGeom>
-          <a:noFill/>
-          <a:ln/>
-        </p:spPr>
-        <p:txBody>
-          <a:bodyPr wrap="square" lIns="0" tIns="0" rIns="0" bIns="0" rtlCol="0" anchor="ctr"/>
-          <a:lstStyle/>
-          <a:p>
-            <a:pPr algn="r" indent="0" marL="0">
-              <a:buNone/>
-            </a:pPr>
-            <a:r>
-              <a:rPr lang="en-US" sz="1050" dirty="0">
-                <a:solidFill>
-                  <a:srgbClr val="55626F"/>
-                </a:solidFill>
-                <a:latin typeface="Calibri" pitchFamily="34" charset="0"/>
-                <a:ea typeface="Calibri" pitchFamily="34" charset="-122"/>
-                <a:cs typeface="Calibri" pitchFamily="34" charset="-120"/>
-              </a:rPr>
-              <a:t>06 / 10</a:t>
+              <a:t>06 / 12</a:t>
             </a:r>
             <a:endParaRPr lang="en-US" sz="1050" dirty="0"/>
           </a:p>
@@ -8577,7 +12672,7 @@
                 <a:ea typeface="Calibri" pitchFamily="34" charset="-122"/>
                 <a:cs typeface="Calibri" pitchFamily="34" charset="-120"/>
               </a:rPr>
-              <a:t>BYZNYS MODEL</a:t>
+              <a:t>VÝSLEDKY &amp; ŽIVÉ DEMO</a:t>
             </a:r>
             <a:endParaRPr lang="en-US" sz="1200" dirty="0"/>
           </a:p>
@@ -8619,7 +12714,7 @@
                 <a:ea typeface="Georgia" pitchFamily="34" charset="-122"/>
                 <a:cs typeface="Georgia" pitchFamily="34" charset="-120"/>
               </a:rPr>
-              <a:t>Roční licence — protože plánování</a:t>
+              <a:t>Z modelu rovnou akční seznam</a:t>
             </a:r>
             <a:endParaRPr lang="en-US" sz="3100" dirty="0"/>
           </a:p>
@@ -8639,7 +12734,7 @@
                 <a:ea typeface="Georgia" pitchFamily="34" charset="-122"/>
                 <a:cs typeface="Georgia" pitchFamily="34" charset="-120"/>
               </a:rPr>
-              <a:t>města nikdy nekončí.</a:t>
+              <a:t>pro radnici.</a:t>
             </a:r>
             <a:endParaRPr lang="en-US" sz="3100" dirty="0"/>
           </a:p>
@@ -8647,67 +12742,184 @@
       </p:sp>
       <p:sp>
         <p:nvSpPr>
-          <p:cNvPr id="4" name="Text 2"/>
-          <p:cNvSpPr/>
-          <p:nvPr/>
-        </p:nvSpPr>
-        <p:spPr>
-          <a:xfrm>
-            <a:off x="658368" y="2194560"/>
-            <a:ext cx="10881360" cy="640080"/>
-          </a:xfrm>
-          <a:prstGeom prst="rect">
-            <a:avLst/>
-          </a:prstGeom>
-          <a:noFill/>
-          <a:ln/>
-        </p:spPr>
-        <p:txBody>
-          <a:bodyPr wrap="square" lIns="0" tIns="0" rIns="0" bIns="0" rtlCol="0" anchor="t"/>
-          <a:lstStyle/>
-          <a:p>
-            <a:pPr algn="l" indent="0" marL="0">
+          <p:cNvPr id="4" name="Shape 2"/>
+          <p:cNvSpPr/>
+          <p:nvPr/>
+        </p:nvSpPr>
+        <p:spPr>
+          <a:xfrm>
+            <a:off x="640080" y="2286000"/>
+            <a:ext cx="5943600" cy="3657600"/>
+          </a:xfrm>
+          <a:prstGeom prst="rect">
+            <a:avLst/>
+          </a:prstGeom>
+          <a:solidFill>
+            <a:srgbClr val="0E1726"/>
+          </a:solidFill>
+          <a:ln/>
+          <a:effectLst>
+            <a:outerShdw sx="100000" sy="100000" kx="0" ky="0" algn="bl" rotWithShape="0" blurRad="76200" dist="25400" dir="5400000">
+              <a:srgbClr val="0E1726">
+                <a:alpha val="10000"/>
+              </a:srgbClr>
+            </a:outerShdw>
+          </a:effectLst>
+        </p:spPr>
+      </p:sp>
+      <p:sp>
+        <p:nvSpPr>
+          <p:cNvPr id="5" name="Shape 3"/>
+          <p:cNvSpPr/>
+          <p:nvPr/>
+        </p:nvSpPr>
+        <p:spPr>
+          <a:xfrm>
+            <a:off x="2651760" y="3246120"/>
+            <a:ext cx="1920240" cy="1920240"/>
+          </a:xfrm>
+          <a:prstGeom prst="roundRect">
+            <a:avLst>
+              <a:gd name="adj" fmla="val 9524"/>
+            </a:avLst>
+          </a:prstGeom>
+          <a:solidFill>
+            <a:srgbClr val="18283F"/>
+          </a:solidFill>
+          <a:ln/>
+        </p:spPr>
+      </p:sp>
+      <p:pic>
+        <p:nvPicPr>
+          <p:cNvPr id="6" name="Image 0" descr="preencoded.png">    </p:cNvPr>
+          <p:cNvPicPr>
+            <a:picLocks noChangeAspect="1"/>
+          </p:cNvPicPr>
+          <p:nvPr/>
+        </p:nvPicPr>
+        <p:blipFill>
+          <a:blip r:embed="rId1"/>
+          <a:stretch>
+            <a:fillRect/>
+          </a:stretch>
+        </p:blipFill>
+        <p:spPr>
+          <a:xfrm>
+            <a:off x="3200400" y="3794760"/>
+            <a:ext cx="822960" cy="822960"/>
+          </a:xfrm>
+          <a:prstGeom prst="rect">
+            <a:avLst/>
+          </a:prstGeom>
+        </p:spPr>
+      </p:pic>
+      <p:sp>
+        <p:nvSpPr>
+          <p:cNvPr id="7" name="Text 4"/>
+          <p:cNvSpPr/>
+          <p:nvPr/>
+        </p:nvSpPr>
+        <p:spPr>
+          <a:xfrm>
+            <a:off x="640080" y="5257800"/>
+            <a:ext cx="5943600" cy="320040"/>
+          </a:xfrm>
+          <a:prstGeom prst="rect">
+            <a:avLst/>
+          </a:prstGeom>
+          <a:noFill/>
+          <a:ln/>
+        </p:spPr>
+        <p:txBody>
+          <a:bodyPr wrap="square" lIns="0" tIns="0" rIns="0" bIns="0" rtlCol="0" anchor="ctr"/>
+          <a:lstStyle/>
+          <a:p>
+            <a:pPr algn="ctr" indent="0" marL="0">
+              <a:buNone/>
+            </a:pPr>
+            <a:r>
+              <a:rPr lang="en-US" sz="1300" b="1" spc="200" kern="0" dirty="0">
+                <a:solidFill>
+                  <a:srgbClr val="19C37D"/>
+                </a:solidFill>
+                <a:latin typeface="Calibri" pitchFamily="34" charset="0"/>
+                <a:ea typeface="Calibri" pitchFamily="34" charset="-122"/>
+                <a:cs typeface="Calibri" pitchFamily="34" charset="-120"/>
+              </a:rPr>
+              <a:t>[ SCREENSHOT ŽIVÉHO DEMA ]</a:t>
+            </a:r>
+            <a:endParaRPr lang="en-US" sz="1300" dirty="0"/>
+          </a:p>
+        </p:txBody>
+      </p:sp>
+      <p:sp>
+        <p:nvSpPr>
+          <p:cNvPr id="8" name="Text 5"/>
+          <p:cNvSpPr/>
+          <p:nvPr/>
+        </p:nvSpPr>
+        <p:spPr>
+          <a:xfrm>
+            <a:off x="1005840" y="5577840"/>
+            <a:ext cx="5212080" cy="457200"/>
+          </a:xfrm>
+          <a:prstGeom prst="rect">
+            <a:avLst/>
+          </a:prstGeom>
+          <a:noFill/>
+          <a:ln/>
+        </p:spPr>
+        <p:txBody>
+          <a:bodyPr wrap="square" lIns="0" tIns="0" rIns="0" bIns="0" rtlCol="0" anchor="ctr"/>
+          <a:lstStyle/>
+          <a:p>
+            <a:pPr algn="ctr" indent="0" marL="0">
               <a:lnSpc>
-                <a:spcPct val="115000"/>
+                <a:spcPct val="100000"/>
               </a:lnSpc>
               <a:buNone/>
             </a:pPr>
             <a:r>
-              <a:rPr lang="en-US" sz="1500" b="1" dirty="0">
-                <a:solidFill>
-                  <a:srgbClr val="0E1726"/>
-                </a:solidFill>
-                <a:latin typeface="Calibri" pitchFamily="34" charset="0"/>
-                <a:ea typeface="Calibri" pitchFamily="34" charset="-122"/>
-                <a:cs typeface="Calibri" pitchFamily="34" charset="-120"/>
-              </a:rPr>
-              <a:t>Opakovaná hodnota, opakovaný příjem:</a:t>
-            </a:r>
-            <a:pPr algn="l" indent="0" marL="0">
-              <a:lnSpc>
-                <a:spcPct val="115000"/>
-              </a:lnSpc>
-              <a:buNone/>
-            </a:pPr>
-            <a:r>
-              <a:rPr lang="en-US" sz="1500" dirty="0">
-                <a:solidFill>
-                  <a:srgbClr val="55626F"/>
-                </a:solidFill>
-                <a:latin typeface="Calibri" pitchFamily="34" charset="0"/>
-                <a:ea typeface="Calibri" pitchFamily="34" charset="-122"/>
-                <a:cs typeface="Calibri" pitchFamily="34" charset="-120"/>
-              </a:rPr>
-              <a:t> město neplatí jednorázovou studii, ale </a:t>
-            </a:r>
-            <a:pPr algn="l" indent="0" marL="0">
-              <a:lnSpc>
-                <a:spcPct val="115000"/>
-              </a:lnSpc>
-              <a:buNone/>
-            </a:pPr>
-            <a:r>
-              <a:rPr lang="en-US" sz="1500" b="1" dirty="0">
+              <a:rPr lang="en-US" sz="1050" i="1" dirty="0">
+                <a:solidFill>
+                  <a:srgbClr val="9DB2C6"/>
+                </a:solidFill>
+                <a:latin typeface="Calibri" pitchFamily="34" charset="0"/>
+                <a:ea typeface="Calibri" pitchFamily="34" charset="-122"/>
+                <a:cs typeface="Calibri" pitchFamily="34" charset="-120"/>
+              </a:rPr>
+              <a:t>Interaktivní mapa Prahy — heatmapa skóre, filtr po obvodech, popup „proč tady“, export pro úřad.</a:t>
+            </a:r>
+            <a:endParaRPr lang="en-US" sz="1050" dirty="0"/>
+          </a:p>
+        </p:txBody>
+      </p:sp>
+      <p:sp>
+        <p:nvSpPr>
+          <p:cNvPr id="9" name="Text 6"/>
+          <p:cNvSpPr/>
+          <p:nvPr/>
+        </p:nvSpPr>
+        <p:spPr>
+          <a:xfrm>
+            <a:off x="6858000" y="2286000"/>
+            <a:ext cx="4572000" cy="274320"/>
+          </a:xfrm>
+          <a:prstGeom prst="rect">
+            <a:avLst/>
+          </a:prstGeom>
+          <a:noFill/>
+          <a:ln/>
+        </p:spPr>
+        <p:txBody>
+          <a:bodyPr wrap="square" lIns="0" tIns="0" rIns="0" bIns="0" rtlCol="0" anchor="ctr"/>
+          <a:lstStyle/>
+          <a:p>
+            <a:pPr indent="0" marL="0">
+              <a:buNone/>
+            </a:pPr>
+            <a:r>
+              <a:rPr lang="en-US" sz="1200" b="1" spc="150" kern="0" dirty="0">
                 <a:solidFill>
                   <a:srgbClr val="0E9E63"/>
                 </a:solidFill>
@@ -8715,39 +12927,22 @@
                 <a:ea typeface="Calibri" pitchFamily="34" charset="-122"/>
                 <a:cs typeface="Calibri" pitchFamily="34" charset="-120"/>
               </a:rPr>
-              <a:t>živou službu</a:t>
-            </a:r>
-            <a:pPr algn="l" indent="0" marL="0">
-              <a:lnSpc>
-                <a:spcPct val="115000"/>
-              </a:lnSpc>
-              <a:buNone/>
-            </a:pPr>
-            <a:r>
-              <a:rPr lang="en-US" sz="1500" dirty="0">
-                <a:solidFill>
-                  <a:srgbClr val="55626F"/>
-                </a:solidFill>
-                <a:latin typeface="Calibri" pitchFamily="34" charset="0"/>
-                <a:ea typeface="Calibri" pitchFamily="34" charset="-122"/>
-                <a:cs typeface="Calibri" pitchFamily="34" charset="-120"/>
-              </a:rPr>
-              <a:t>, která se aktualizuje s novými daty a scénáři růstu EV.</a:t>
-            </a:r>
-            <a:endParaRPr lang="en-US" sz="1500" dirty="0"/>
-          </a:p>
-        </p:txBody>
-      </p:sp>
-      <p:sp>
-        <p:nvSpPr>
-          <p:cNvPr id="5" name="Shape 3"/>
-          <p:cNvSpPr/>
-          <p:nvPr/>
-        </p:nvSpPr>
-        <p:spPr>
-          <a:xfrm>
-            <a:off x="640080" y="3017520"/>
-            <a:ext cx="2679192" cy="2926080"/>
+              <a:t>TOP DOPORUČENÁ LOKACE</a:t>
+            </a:r>
+            <a:endParaRPr lang="en-US" sz="1200" dirty="0"/>
+          </a:p>
+        </p:txBody>
+      </p:sp>
+      <p:sp>
+        <p:nvSpPr>
+          <p:cNvPr id="10" name="Shape 7"/>
+          <p:cNvSpPr/>
+          <p:nvPr/>
+        </p:nvSpPr>
+        <p:spPr>
+          <a:xfrm>
+            <a:off x="6858000" y="2606040"/>
+            <a:ext cx="4709160" cy="1371600"/>
           </a:xfrm>
           <a:prstGeom prst="rect">
             <a:avLst/>
@@ -8772,14 +12967,14 @@
       </p:sp>
       <p:sp>
         <p:nvSpPr>
-          <p:cNvPr id="6" name="Shape 4"/>
-          <p:cNvSpPr/>
-          <p:nvPr/>
-        </p:nvSpPr>
-        <p:spPr>
-          <a:xfrm>
-            <a:off x="640080" y="3017520"/>
-            <a:ext cx="82296" cy="2926080"/>
+          <p:cNvPr id="11" name="Shape 8"/>
+          <p:cNvSpPr/>
+          <p:nvPr/>
+        </p:nvSpPr>
+        <p:spPr>
+          <a:xfrm>
+            <a:off x="6858000" y="2606040"/>
+            <a:ext cx="109728" cy="1371600"/>
           </a:xfrm>
           <a:prstGeom prst="rect">
             <a:avLst/>
@@ -8792,108 +12987,101 @@
       </p:sp>
       <p:sp>
         <p:nvSpPr>
-          <p:cNvPr id="7" name="Shape 5"/>
-          <p:cNvSpPr/>
-          <p:nvPr/>
-        </p:nvSpPr>
-        <p:spPr>
-          <a:xfrm>
-            <a:off x="914400" y="3310128"/>
-            <a:ext cx="694944" cy="694944"/>
-          </a:xfrm>
-          <a:prstGeom prst="roundRect">
-            <a:avLst>
-              <a:gd name="adj" fmla="val 22000"/>
-            </a:avLst>
-          </a:prstGeom>
-          <a:solidFill>
-            <a:srgbClr val="0E1726"/>
-          </a:solidFill>
-          <a:ln/>
-        </p:spPr>
-      </p:sp>
-      <p:pic>
-        <p:nvPicPr>
-          <p:cNvPr id="8" name="Image 0" descr="preencoded.png">    </p:cNvPr>
-          <p:cNvPicPr>
-            <a:picLocks noChangeAspect="1"/>
-          </p:cNvPicPr>
-          <p:nvPr/>
-        </p:nvPicPr>
-        <p:blipFill>
-          <a:blip r:embed="rId1"/>
-          <a:stretch>
-            <a:fillRect/>
-          </a:stretch>
-        </p:blipFill>
-        <p:spPr>
-          <a:xfrm>
-            <a:off x="1095085" y="3490813"/>
-            <a:ext cx="333573" cy="333573"/>
-          </a:xfrm>
-          <a:prstGeom prst="rect">
-            <a:avLst/>
-          </a:prstGeom>
-        </p:spPr>
-      </p:pic>
-      <p:sp>
-        <p:nvSpPr>
-          <p:cNvPr id="9" name="Text 6"/>
-          <p:cNvSpPr/>
-          <p:nvPr/>
-        </p:nvSpPr>
-        <p:spPr>
-          <a:xfrm>
-            <a:off x="914400" y="4114800"/>
-            <a:ext cx="2176272" cy="548640"/>
-          </a:xfrm>
-          <a:prstGeom prst="rect">
-            <a:avLst/>
-          </a:prstGeom>
-          <a:noFill/>
-          <a:ln/>
-        </p:spPr>
-        <p:txBody>
-          <a:bodyPr wrap="square" lIns="0" tIns="0" rIns="0" bIns="0" rtlCol="0" anchor="t"/>
+          <p:cNvPr id="12" name="Text 9"/>
+          <p:cNvSpPr/>
+          <p:nvPr/>
+        </p:nvSpPr>
+        <p:spPr>
+          <a:xfrm>
+            <a:off x="7086600" y="2743200"/>
+            <a:ext cx="1371600" cy="822960"/>
+          </a:xfrm>
+          <a:prstGeom prst="rect">
+            <a:avLst/>
+          </a:prstGeom>
+          <a:noFill/>
+          <a:ln/>
+        </p:spPr>
+        <p:txBody>
+          <a:bodyPr wrap="square" lIns="0" tIns="0" rIns="0" bIns="0" rtlCol="0" anchor="ctr"/>
           <a:lstStyle/>
           <a:p>
             <a:pPr indent="0" marL="0">
               <a:buNone/>
             </a:pPr>
             <a:r>
-              <a:rPr lang="en-US" sz="1500" b="1" dirty="0">
-                <a:solidFill>
-                  <a:srgbClr val="0E1726"/>
+              <a:rPr lang="en-US" sz="4000" b="1" dirty="0">
+                <a:solidFill>
+                  <a:srgbClr val="19C37D"/>
                 </a:solidFill>
                 <a:latin typeface="Georgia" pitchFamily="34" charset="0"/>
                 <a:ea typeface="Georgia" pitchFamily="34" charset="-122"/>
                 <a:cs typeface="Georgia" pitchFamily="34" charset="-120"/>
               </a:rPr>
-              <a:t>Roční SaaS licence</a:t>
-            </a:r>
-            <a:endParaRPr lang="en-US" sz="1500" dirty="0"/>
-          </a:p>
-        </p:txBody>
-      </p:sp>
-      <p:sp>
-        <p:nvSpPr>
-          <p:cNvPr id="10" name="Text 7"/>
-          <p:cNvSpPr/>
-          <p:nvPr/>
-        </p:nvSpPr>
-        <p:spPr>
-          <a:xfrm>
-            <a:off x="914400" y="4645152"/>
-            <a:ext cx="2221992" cy="1234440"/>
-          </a:xfrm>
-          <a:prstGeom prst="rect">
-            <a:avLst/>
-          </a:prstGeom>
-          <a:noFill/>
-          <a:ln/>
-        </p:spPr>
-        <p:txBody>
-          <a:bodyPr wrap="square" lIns="0" tIns="0" rIns="0" bIns="0" rtlCol="0" anchor="t"/>
+              <a:t>91,1</a:t>
+            </a:r>
+            <a:endParaRPr lang="en-US" sz="4000" dirty="0"/>
+          </a:p>
+        </p:txBody>
+      </p:sp>
+      <p:sp>
+        <p:nvSpPr>
+          <p:cNvPr id="13" name="Text 10"/>
+          <p:cNvSpPr/>
+          <p:nvPr/>
+        </p:nvSpPr>
+        <p:spPr>
+          <a:xfrm>
+            <a:off x="7114032" y="3520440"/>
+            <a:ext cx="1371600" cy="274320"/>
+          </a:xfrm>
+          <a:prstGeom prst="rect">
+            <a:avLst/>
+          </a:prstGeom>
+          <a:noFill/>
+          <a:ln/>
+        </p:spPr>
+        <p:txBody>
+          <a:bodyPr wrap="square" lIns="0" tIns="0" rIns="0" bIns="0" rtlCol="0" anchor="ctr"/>
+          <a:lstStyle/>
+          <a:p>
+            <a:pPr indent="0" marL="0">
+              <a:buNone/>
+            </a:pPr>
+            <a:r>
+              <a:rPr lang="en-US" sz="1200" dirty="0">
+                <a:solidFill>
+                  <a:srgbClr val="55626F"/>
+                </a:solidFill>
+                <a:latin typeface="Calibri" pitchFamily="34" charset="0"/>
+                <a:ea typeface="Calibri" pitchFamily="34" charset="-122"/>
+                <a:cs typeface="Calibri" pitchFamily="34" charset="-120"/>
+              </a:rPr>
+              <a:t>/100</a:t>
+            </a:r>
+            <a:endParaRPr lang="en-US" sz="1200" dirty="0"/>
+          </a:p>
+        </p:txBody>
+      </p:sp>
+      <p:sp>
+        <p:nvSpPr>
+          <p:cNvPr id="14" name="Text 11"/>
+          <p:cNvSpPr/>
+          <p:nvPr/>
+        </p:nvSpPr>
+        <p:spPr>
+          <a:xfrm>
+            <a:off x="8595360" y="2743200"/>
+            <a:ext cx="2834640" cy="1143000"/>
+          </a:xfrm>
+          <a:prstGeom prst="rect">
+            <a:avLst/>
+          </a:prstGeom>
+          <a:noFill/>
+          <a:ln/>
+        </p:spPr>
+        <p:txBody>
+          <a:bodyPr wrap="square" lIns="0" tIns="0" rIns="0" bIns="0" rtlCol="0" anchor="ctr"/>
           <a:lstStyle/>
           <a:p>
             <a:pPr indent="0" marL="0">
@@ -8903,7 +13091,25 @@
               <a:buNone/>
             </a:pPr>
             <a:r>
-              <a:rPr lang="en-US" sz="1200" dirty="0">
+              <a:rPr lang="en-US" sz="1500" b="1" dirty="0">
+                <a:solidFill>
+                  <a:srgbClr val="0E1726"/>
+                </a:solidFill>
+                <a:latin typeface="Calibri" pitchFamily="34" charset="0"/>
+                <a:ea typeface="Calibri" pitchFamily="34" charset="-122"/>
+                <a:cs typeface="Calibri" pitchFamily="34" charset="-120"/>
+              </a:rPr>
+              <a:t>TS_3820 · Praha 13
+</a:t>
+            </a:r>
+            <a:pPr indent="0" marL="0">
+              <a:lnSpc>
+                <a:spcPct val="110000"/>
+              </a:lnSpc>
+              <a:buNone/>
+            </a:pPr>
+            <a:r>
+              <a:rPr lang="en-US" sz="1100" dirty="0">
                 <a:solidFill>
                   <a:srgbClr val="55626F"/>
                 </a:solidFill>
@@ -8911,7 +13117,494 @@
                 <a:ea typeface="Calibri" pitchFamily="34" charset="-122"/>
                 <a:cs typeface="Calibri" pitchFamily="34" charset="-120"/>
               </a:rPr>
-              <a:t>Předplatné pro HMP / MČ / Operátora ICT za přístup + pravidelnou aktualizaci skóre.</a:t>
+              <a:t>predikce ~201 EV 2030 · jen 1 stanice dnes · volná rezerva sítě</a:t>
+            </a:r>
+            <a:endParaRPr lang="en-US" sz="1500" dirty="0"/>
+          </a:p>
+        </p:txBody>
+      </p:sp>
+      <p:sp>
+        <p:nvSpPr>
+          <p:cNvPr id="15" name="Shape 12"/>
+          <p:cNvSpPr/>
+          <p:nvPr/>
+        </p:nvSpPr>
+        <p:spPr>
+          <a:xfrm>
+            <a:off x="6858000" y="4160520"/>
+            <a:ext cx="1463040" cy="1783080"/>
+          </a:xfrm>
+          <a:prstGeom prst="rect">
+            <a:avLst/>
+          </a:prstGeom>
+          <a:solidFill>
+            <a:srgbClr val="0E1726"/>
+          </a:solidFill>
+          <a:ln/>
+          <a:effectLst>
+            <a:outerShdw sx="100000" sy="100000" kx="0" ky="0" algn="bl" rotWithShape="0" blurRad="76200" dist="25400" dir="5400000">
+              <a:srgbClr val="0E1726">
+                <a:alpha val="10000"/>
+              </a:srgbClr>
+            </a:outerShdw>
+          </a:effectLst>
+        </p:spPr>
+      </p:sp>
+      <p:sp>
+        <p:nvSpPr>
+          <p:cNvPr id="16" name="Text 13"/>
+          <p:cNvSpPr/>
+          <p:nvPr/>
+        </p:nvSpPr>
+        <p:spPr>
+          <a:xfrm>
+            <a:off x="6903720" y="4434840"/>
+            <a:ext cx="1371600" cy="640080"/>
+          </a:xfrm>
+          <a:prstGeom prst="rect">
+            <a:avLst/>
+          </a:prstGeom>
+          <a:noFill/>
+          <a:ln/>
+        </p:spPr>
+        <p:txBody>
+          <a:bodyPr wrap="square" lIns="0" tIns="0" rIns="0" bIns="0" rtlCol="0" anchor="ctr"/>
+          <a:lstStyle/>
+          <a:p>
+            <a:pPr algn="ctr" indent="0" marL="0">
+              <a:buNone/>
+            </a:pPr>
+            <a:r>
+              <a:rPr lang="en-US" sz="2300" b="1" dirty="0">
+                <a:solidFill>
+                  <a:srgbClr val="19C37D"/>
+                </a:solidFill>
+                <a:latin typeface="Georgia" pitchFamily="34" charset="0"/>
+                <a:ea typeface="Georgia" pitchFamily="34" charset="-122"/>
+                <a:cs typeface="Georgia" pitchFamily="34" charset="-120"/>
+              </a:rPr>
+              <a:t>517</a:t>
+            </a:r>
+            <a:endParaRPr lang="en-US" sz="2300" dirty="0"/>
+          </a:p>
+        </p:txBody>
+      </p:sp>
+      <p:sp>
+        <p:nvSpPr>
+          <p:cNvPr id="17" name="Text 14"/>
+          <p:cNvSpPr/>
+          <p:nvPr/>
+        </p:nvSpPr>
+        <p:spPr>
+          <a:xfrm>
+            <a:off x="6903720" y="5166360"/>
+            <a:ext cx="1371600" cy="640080"/>
+          </a:xfrm>
+          <a:prstGeom prst="rect">
+            <a:avLst/>
+          </a:prstGeom>
+          <a:noFill/>
+          <a:ln/>
+        </p:spPr>
+        <p:txBody>
+          <a:bodyPr wrap="square" lIns="0" tIns="0" rIns="0" bIns="0" rtlCol="0" anchor="t"/>
+          <a:lstStyle/>
+          <a:p>
+            <a:pPr algn="ctr" indent="0" marL="0">
+              <a:lnSpc>
+                <a:spcPct val="105000"/>
+              </a:lnSpc>
+              <a:buNone/>
+            </a:pPr>
+            <a:r>
+              <a:rPr lang="en-US" sz="1100" dirty="0">
+                <a:solidFill>
+                  <a:srgbClr val="9DB2C6"/>
+                </a:solidFill>
+                <a:latin typeface="Calibri" pitchFamily="34" charset="0"/>
+                <a:ea typeface="Calibri" pitchFamily="34" charset="-122"/>
+                <a:cs typeface="Calibri" pitchFamily="34" charset="-120"/>
+              </a:rPr>
+              <a:t>zón oskórováno</a:t>
+            </a:r>
+            <a:endParaRPr lang="en-US" sz="1100" dirty="0"/>
+          </a:p>
+        </p:txBody>
+      </p:sp>
+      <p:sp>
+        <p:nvSpPr>
+          <p:cNvPr id="18" name="Shape 15"/>
+          <p:cNvSpPr/>
+          <p:nvPr/>
+        </p:nvSpPr>
+        <p:spPr>
+          <a:xfrm>
+            <a:off x="8449056" y="4160520"/>
+            <a:ext cx="1463040" cy="1783080"/>
+          </a:xfrm>
+          <a:prstGeom prst="rect">
+            <a:avLst/>
+          </a:prstGeom>
+          <a:solidFill>
+            <a:srgbClr val="0E1726"/>
+          </a:solidFill>
+          <a:ln/>
+          <a:effectLst>
+            <a:outerShdw sx="100000" sy="100000" kx="0" ky="0" algn="bl" rotWithShape="0" blurRad="76200" dist="25400" dir="5400000">
+              <a:srgbClr val="0E1726">
+                <a:alpha val="10000"/>
+              </a:srgbClr>
+            </a:outerShdw>
+          </a:effectLst>
+        </p:spPr>
+      </p:sp>
+      <p:sp>
+        <p:nvSpPr>
+          <p:cNvPr id="19" name="Text 16"/>
+          <p:cNvSpPr/>
+          <p:nvPr/>
+        </p:nvSpPr>
+        <p:spPr>
+          <a:xfrm>
+            <a:off x="8494776" y="4434840"/>
+            <a:ext cx="1371600" cy="640080"/>
+          </a:xfrm>
+          <a:prstGeom prst="rect">
+            <a:avLst/>
+          </a:prstGeom>
+          <a:noFill/>
+          <a:ln/>
+        </p:spPr>
+        <p:txBody>
+          <a:bodyPr wrap="square" lIns="0" tIns="0" rIns="0" bIns="0" rtlCol="0" anchor="ctr"/>
+          <a:lstStyle/>
+          <a:p>
+            <a:pPr algn="ctr" indent="0" marL="0">
+              <a:buNone/>
+            </a:pPr>
+            <a:r>
+              <a:rPr lang="en-US" sz="2300" b="1" dirty="0">
+                <a:solidFill>
+                  <a:srgbClr val="19C37D"/>
+                </a:solidFill>
+                <a:latin typeface="Georgia" pitchFamily="34" charset="0"/>
+                <a:ea typeface="Georgia" pitchFamily="34" charset="-122"/>
+                <a:cs typeface="Georgia" pitchFamily="34" charset="-120"/>
+              </a:rPr>
+              <a:t>TOP-N</a:t>
+            </a:r>
+            <a:endParaRPr lang="en-US" sz="2300" dirty="0"/>
+          </a:p>
+        </p:txBody>
+      </p:sp>
+      <p:sp>
+        <p:nvSpPr>
+          <p:cNvPr id="20" name="Text 17"/>
+          <p:cNvSpPr/>
+          <p:nvPr/>
+        </p:nvSpPr>
+        <p:spPr>
+          <a:xfrm>
+            <a:off x="8494776" y="5166360"/>
+            <a:ext cx="1371600" cy="640080"/>
+          </a:xfrm>
+          <a:prstGeom prst="rect">
+            <a:avLst/>
+          </a:prstGeom>
+          <a:noFill/>
+          <a:ln/>
+        </p:spPr>
+        <p:txBody>
+          <a:bodyPr wrap="square" lIns="0" tIns="0" rIns="0" bIns="0" rtlCol="0" anchor="t"/>
+          <a:lstStyle/>
+          <a:p>
+            <a:pPr algn="ctr" indent="0" marL="0">
+              <a:lnSpc>
+                <a:spcPct val="105000"/>
+              </a:lnSpc>
+              <a:buNone/>
+            </a:pPr>
+            <a:r>
+              <a:rPr lang="en-US" sz="1100" dirty="0">
+                <a:solidFill>
+                  <a:srgbClr val="9DB2C6"/>
+                </a:solidFill>
+                <a:latin typeface="Calibri" pitchFamily="34" charset="0"/>
+                <a:ea typeface="Calibri" pitchFamily="34" charset="-122"/>
+                <a:cs typeface="Calibri" pitchFamily="34" charset="-120"/>
+              </a:rPr>
+              <a:t>žebříček pro úřad</a:t>
+            </a:r>
+            <a:endParaRPr lang="en-US" sz="1100" dirty="0"/>
+          </a:p>
+        </p:txBody>
+      </p:sp>
+      <p:sp>
+        <p:nvSpPr>
+          <p:cNvPr id="21" name="Shape 18"/>
+          <p:cNvSpPr/>
+          <p:nvPr/>
+        </p:nvSpPr>
+        <p:spPr>
+          <a:xfrm>
+            <a:off x="10040112" y="4160520"/>
+            <a:ext cx="1463040" cy="1783080"/>
+          </a:xfrm>
+          <a:prstGeom prst="rect">
+            <a:avLst/>
+          </a:prstGeom>
+          <a:solidFill>
+            <a:srgbClr val="0E1726"/>
+          </a:solidFill>
+          <a:ln/>
+          <a:effectLst>
+            <a:outerShdw sx="100000" sy="100000" kx="0" ky="0" algn="bl" rotWithShape="0" blurRad="76200" dist="25400" dir="5400000">
+              <a:srgbClr val="0E1726">
+                <a:alpha val="10000"/>
+              </a:srgbClr>
+            </a:outerShdw>
+          </a:effectLst>
+        </p:spPr>
+      </p:sp>
+      <p:sp>
+        <p:nvSpPr>
+          <p:cNvPr id="22" name="Text 19"/>
+          <p:cNvSpPr/>
+          <p:nvPr/>
+        </p:nvSpPr>
+        <p:spPr>
+          <a:xfrm>
+            <a:off x="10085832" y="4434840"/>
+            <a:ext cx="1371600" cy="640080"/>
+          </a:xfrm>
+          <a:prstGeom prst="rect">
+            <a:avLst/>
+          </a:prstGeom>
+          <a:noFill/>
+          <a:ln/>
+        </p:spPr>
+        <p:txBody>
+          <a:bodyPr wrap="square" lIns="0" tIns="0" rIns="0" bIns="0" rtlCol="0" anchor="ctr"/>
+          <a:lstStyle/>
+          <a:p>
+            <a:pPr algn="ctr" indent="0" marL="0">
+              <a:buNone/>
+            </a:pPr>
+            <a:r>
+              <a:rPr lang="en-US" sz="2300" b="1" dirty="0">
+                <a:solidFill>
+                  <a:srgbClr val="19C37D"/>
+                </a:solidFill>
+                <a:latin typeface="Georgia" pitchFamily="34" charset="0"/>
+                <a:ea typeface="Georgia" pitchFamily="34" charset="-122"/>
+                <a:cs typeface="Georgia" pitchFamily="34" charset="-120"/>
+              </a:rPr>
+              <a:t>CSV / mapa</a:t>
+            </a:r>
+            <a:endParaRPr lang="en-US" sz="2300" dirty="0"/>
+          </a:p>
+        </p:txBody>
+      </p:sp>
+      <p:sp>
+        <p:nvSpPr>
+          <p:cNvPr id="23" name="Text 20"/>
+          <p:cNvSpPr/>
+          <p:nvPr/>
+        </p:nvSpPr>
+        <p:spPr>
+          <a:xfrm>
+            <a:off x="10085832" y="5166360"/>
+            <a:ext cx="1371600" cy="640080"/>
+          </a:xfrm>
+          <a:prstGeom prst="rect">
+            <a:avLst/>
+          </a:prstGeom>
+          <a:noFill/>
+          <a:ln/>
+        </p:spPr>
+        <p:txBody>
+          <a:bodyPr wrap="square" lIns="0" tIns="0" rIns="0" bIns="0" rtlCol="0" anchor="t"/>
+          <a:lstStyle/>
+          <a:p>
+            <a:pPr algn="ctr" indent="0" marL="0">
+              <a:lnSpc>
+                <a:spcPct val="105000"/>
+              </a:lnSpc>
+              <a:buNone/>
+            </a:pPr>
+            <a:r>
+              <a:rPr lang="en-US" sz="1100" dirty="0">
+                <a:solidFill>
+                  <a:srgbClr val="9DB2C6"/>
+                </a:solidFill>
+                <a:latin typeface="Calibri" pitchFamily="34" charset="0"/>
+                <a:ea typeface="Calibri" pitchFamily="34" charset="-122"/>
+                <a:cs typeface="Calibri" pitchFamily="34" charset="-120"/>
+              </a:rPr>
+              <a:t>export výstupů</a:t>
+            </a:r>
+            <a:endParaRPr lang="en-US" sz="1100" dirty="0"/>
+          </a:p>
+        </p:txBody>
+      </p:sp>
+      <p:sp>
+        <p:nvSpPr>
+          <p:cNvPr id="24" name="Text 21"/>
+          <p:cNvSpPr/>
+          <p:nvPr/>
+        </p:nvSpPr>
+        <p:spPr>
+          <a:xfrm>
+            <a:off x="457200" y="6473952"/>
+            <a:ext cx="5486400" cy="274320"/>
+          </a:xfrm>
+          <a:prstGeom prst="rect">
+            <a:avLst/>
+          </a:prstGeom>
+          <a:noFill/>
+          <a:ln/>
+        </p:spPr>
+        <p:txBody>
+          <a:bodyPr wrap="square" lIns="0" tIns="0" rIns="0" bIns="0" rtlCol="0" anchor="ctr"/>
+          <a:lstStyle/>
+          <a:p>
+            <a:pPr algn="l" indent="0" marL="0">
+              <a:buNone/>
+            </a:pPr>
+            <a:r>
+              <a:rPr lang="en-US" sz="1050" b="1" dirty="0">
+                <a:solidFill>
+                  <a:srgbClr val="0E1726"/>
+                </a:solidFill>
+                <a:latin typeface="Calibri" pitchFamily="34" charset="0"/>
+                <a:ea typeface="Calibri" pitchFamily="34" charset="-122"/>
+                <a:cs typeface="Calibri" pitchFamily="34" charset="-120"/>
+              </a:rPr>
+              <a:t>VoltPlán</a:t>
+            </a:r>
+            <a:pPr algn="l" indent="0" marL="0">
+              <a:buNone/>
+            </a:pPr>
+            <a:r>
+              <a:rPr lang="en-US" sz="1050" dirty="0">
+                <a:solidFill>
+                  <a:srgbClr val="55626F"/>
+                </a:solidFill>
+                <a:latin typeface="Calibri" pitchFamily="34" charset="0"/>
+                <a:ea typeface="Calibri" pitchFamily="34" charset="-122"/>
+                <a:cs typeface="Calibri" pitchFamily="34" charset="-120"/>
+              </a:rPr>
+              <a:t>  ·  AIO_PHA-02-PHA</a:t>
+            </a:r>
+            <a:endParaRPr lang="en-US" sz="1050" dirty="0"/>
+          </a:p>
+        </p:txBody>
+      </p:sp>
+      <p:sp>
+        <p:nvSpPr>
+          <p:cNvPr id="25" name="Text 22"/>
+          <p:cNvSpPr/>
+          <p:nvPr/>
+        </p:nvSpPr>
+        <p:spPr>
+          <a:xfrm>
+            <a:off x="10637215" y="6473952"/>
+            <a:ext cx="1097280" cy="274320"/>
+          </a:xfrm>
+          <a:prstGeom prst="rect">
+            <a:avLst/>
+          </a:prstGeom>
+          <a:noFill/>
+          <a:ln/>
+        </p:spPr>
+        <p:txBody>
+          <a:bodyPr wrap="square" lIns="0" tIns="0" rIns="0" bIns="0" rtlCol="0" anchor="ctr"/>
+          <a:lstStyle/>
+          <a:p>
+            <a:pPr algn="r" indent="0" marL="0">
+              <a:buNone/>
+            </a:pPr>
+            <a:r>
+              <a:rPr lang="en-US" sz="1050" dirty="0">
+                <a:solidFill>
+                  <a:srgbClr val="55626F"/>
+                </a:solidFill>
+                <a:latin typeface="Calibri" pitchFamily="34" charset="0"/>
+                <a:ea typeface="Calibri" pitchFamily="34" charset="-122"/>
+                <a:cs typeface="Calibri" pitchFamily="34" charset="-120"/>
+              </a:rPr>
+              <a:t>07 / 12</a:t>
+            </a:r>
+            <a:endParaRPr lang="en-US" sz="1050" dirty="0"/>
+          </a:p>
+        </p:txBody>
+      </p:sp>
+    </p:spTree>
+  </p:cSld>
+  <p:clrMapOvr>
+    <a:masterClrMapping/>
+  </p:clrMapOvr>
+</p:sld>
+</file>
+
+<file path=ppt/slides/slide8.xml><?xml version="1.0" encoding="utf-8"?>
+<p:sld xmlns:a="http://schemas.openxmlformats.org/drawingml/2006/main" xmlns:r="http://schemas.openxmlformats.org/officeDocument/2006/relationships" xmlns:p="http://schemas.openxmlformats.org/presentationml/2006/main">
+  <p:cSld name="Slide 8">
+    <p:bg>
+      <p:bgPr>
+        <a:solidFill>
+          <a:srgbClr val="F3F6F9"/>
+        </a:solidFill>
+      </p:bgPr>
+    </p:bg>
+    <p:spTree>
+      <p:nvGrpSpPr>
+        <p:cNvPr id="1" name=""/>
+        <p:cNvGrpSpPr/>
+        <p:nvPr/>
+      </p:nvGrpSpPr>
+      <p:grpSpPr>
+        <a:xfrm>
+          <a:off x="0" y="0"/>
+          <a:ext cx="0" cy="0"/>
+          <a:chOff x="0" y="0"/>
+          <a:chExt cx="0" cy="0"/>
+        </a:xfrm>
+      </p:grpSpPr>
+      <p:sp>
+        <p:nvSpPr>
+          <p:cNvPr id="2" name="Text 0"/>
+          <p:cNvSpPr/>
+          <p:nvPr/>
+        </p:nvSpPr>
+        <p:spPr>
+          <a:xfrm>
+            <a:off x="640080" y="502920"/>
+            <a:ext cx="10058400" cy="274320"/>
+          </a:xfrm>
+          <a:prstGeom prst="rect">
+            <a:avLst/>
+          </a:prstGeom>
+          <a:noFill/>
+          <a:ln/>
+        </p:spPr>
+        <p:txBody>
+          <a:bodyPr wrap="square" lIns="0" tIns="0" rIns="0" bIns="0" rtlCol="0" anchor="ctr"/>
+          <a:lstStyle/>
+          <a:p>
+            <a:pPr algn="l" indent="0" marL="0">
+              <a:buNone/>
+            </a:pPr>
+            <a:r>
+              <a:rPr lang="en-US" sz="1200" b="1" spc="300" kern="0" dirty="0">
+                <a:solidFill>
+                  <a:srgbClr val="19C37D"/>
+                </a:solidFill>
+                <a:latin typeface="Calibri" pitchFamily="34" charset="0"/>
+                <a:ea typeface="Calibri" pitchFamily="34" charset="-122"/>
+                <a:cs typeface="Calibri" pitchFamily="34" charset="-120"/>
+              </a:rPr>
+              <a:t>BYZNYS MODEL</a:t>
             </a:r>
             <a:endParaRPr lang="en-US" sz="1200" dirty="0"/>
           </a:p>
@@ -8919,13 +13612,168 @@
       </p:sp>
       <p:sp>
         <p:nvSpPr>
-          <p:cNvPr id="11" name="Shape 8"/>
-          <p:cNvSpPr/>
-          <p:nvPr/>
-        </p:nvSpPr>
-        <p:spPr>
-          <a:xfrm>
-            <a:off x="3474720" y="3017520"/>
+          <p:cNvPr id="3" name="Text 1"/>
+          <p:cNvSpPr/>
+          <p:nvPr/>
+        </p:nvSpPr>
+        <p:spPr>
+          <a:xfrm>
+            <a:off x="640080" y="795528"/>
+            <a:ext cx="11002975" cy="1005840"/>
+          </a:xfrm>
+          <a:prstGeom prst="rect">
+            <a:avLst/>
+          </a:prstGeom>
+          <a:noFill/>
+          <a:ln/>
+        </p:spPr>
+        <p:txBody>
+          <a:bodyPr wrap="square" lIns="0" tIns="0" rIns="0" bIns="0" rtlCol="0" anchor="t"/>
+          <a:lstStyle/>
+          <a:p>
+            <a:pPr algn="l" indent="0" marL="0">
+              <a:lnSpc>
+                <a:spcPct val="102000"/>
+              </a:lnSpc>
+              <a:buNone/>
+            </a:pPr>
+            <a:r>
+              <a:rPr lang="en-US" sz="3100" b="1" dirty="0">
+                <a:solidFill>
+                  <a:srgbClr val="0E1726"/>
+                </a:solidFill>
+                <a:latin typeface="Georgia" pitchFamily="34" charset="0"/>
+                <a:ea typeface="Georgia" pitchFamily="34" charset="-122"/>
+                <a:cs typeface="Georgia" pitchFamily="34" charset="-120"/>
+              </a:rPr>
+              <a:t>Roční licence — protože plánování</a:t>
+            </a:r>
+            <a:endParaRPr lang="en-US" sz="3100" dirty="0"/>
+          </a:p>
+          <a:p>
+            <a:pPr algn="l" indent="0" marL="0">
+              <a:lnSpc>
+                <a:spcPct val="102000"/>
+              </a:lnSpc>
+              <a:buNone/>
+            </a:pPr>
+            <a:r>
+              <a:rPr lang="en-US" sz="3100" b="1" dirty="0">
+                <a:solidFill>
+                  <a:srgbClr val="0E1726"/>
+                </a:solidFill>
+                <a:latin typeface="Georgia" pitchFamily="34" charset="0"/>
+                <a:ea typeface="Georgia" pitchFamily="34" charset="-122"/>
+                <a:cs typeface="Georgia" pitchFamily="34" charset="-120"/>
+              </a:rPr>
+              <a:t>města nikdy nekončí.</a:t>
+            </a:r>
+            <a:endParaRPr lang="en-US" sz="3100" dirty="0"/>
+          </a:p>
+        </p:txBody>
+      </p:sp>
+      <p:sp>
+        <p:nvSpPr>
+          <p:cNvPr id="4" name="Text 2"/>
+          <p:cNvSpPr/>
+          <p:nvPr/>
+        </p:nvSpPr>
+        <p:spPr>
+          <a:xfrm>
+            <a:off x="658368" y="2194560"/>
+            <a:ext cx="10881360" cy="640080"/>
+          </a:xfrm>
+          <a:prstGeom prst="rect">
+            <a:avLst/>
+          </a:prstGeom>
+          <a:noFill/>
+          <a:ln/>
+        </p:spPr>
+        <p:txBody>
+          <a:bodyPr wrap="square" lIns="0" tIns="0" rIns="0" bIns="0" rtlCol="0" anchor="t"/>
+          <a:lstStyle/>
+          <a:p>
+            <a:pPr algn="l" indent="0" marL="0">
+              <a:lnSpc>
+                <a:spcPct val="115000"/>
+              </a:lnSpc>
+              <a:buNone/>
+            </a:pPr>
+            <a:r>
+              <a:rPr lang="en-US" sz="1500" b="1" dirty="0">
+                <a:solidFill>
+                  <a:srgbClr val="0E1726"/>
+                </a:solidFill>
+                <a:latin typeface="Calibri" pitchFamily="34" charset="0"/>
+                <a:ea typeface="Calibri" pitchFamily="34" charset="-122"/>
+                <a:cs typeface="Calibri" pitchFamily="34" charset="-120"/>
+              </a:rPr>
+              <a:t>Opakovaná hodnota, opakovaný příjem:</a:t>
+            </a:r>
+            <a:pPr algn="l" indent="0" marL="0">
+              <a:lnSpc>
+                <a:spcPct val="115000"/>
+              </a:lnSpc>
+              <a:buNone/>
+            </a:pPr>
+            <a:r>
+              <a:rPr lang="en-US" sz="1500" dirty="0">
+                <a:solidFill>
+                  <a:srgbClr val="55626F"/>
+                </a:solidFill>
+                <a:latin typeface="Calibri" pitchFamily="34" charset="0"/>
+                <a:ea typeface="Calibri" pitchFamily="34" charset="-122"/>
+                <a:cs typeface="Calibri" pitchFamily="34" charset="-120"/>
+              </a:rPr>
+              <a:t> město neplatí jednorázovou studii, ale </a:t>
+            </a:r>
+            <a:pPr algn="l" indent="0" marL="0">
+              <a:lnSpc>
+                <a:spcPct val="115000"/>
+              </a:lnSpc>
+              <a:buNone/>
+            </a:pPr>
+            <a:r>
+              <a:rPr lang="en-US" sz="1500" b="1" dirty="0">
+                <a:solidFill>
+                  <a:srgbClr val="0E9E63"/>
+                </a:solidFill>
+                <a:latin typeface="Calibri" pitchFamily="34" charset="0"/>
+                <a:ea typeface="Calibri" pitchFamily="34" charset="-122"/>
+                <a:cs typeface="Calibri" pitchFamily="34" charset="-120"/>
+              </a:rPr>
+              <a:t>živou službu</a:t>
+            </a:r>
+            <a:pPr algn="l" indent="0" marL="0">
+              <a:lnSpc>
+                <a:spcPct val="115000"/>
+              </a:lnSpc>
+              <a:buNone/>
+            </a:pPr>
+            <a:r>
+              <a:rPr lang="en-US" sz="1500" dirty="0">
+                <a:solidFill>
+                  <a:srgbClr val="55626F"/>
+                </a:solidFill>
+                <a:latin typeface="Calibri" pitchFamily="34" charset="0"/>
+                <a:ea typeface="Calibri" pitchFamily="34" charset="-122"/>
+                <a:cs typeface="Calibri" pitchFamily="34" charset="-120"/>
+              </a:rPr>
+              <a:t>, která se aktualizuje s novými daty a scénáři růstu EV.</a:t>
+            </a:r>
+            <a:endParaRPr lang="en-US" sz="1500" dirty="0"/>
+          </a:p>
+        </p:txBody>
+      </p:sp>
+      <p:sp>
+        <p:nvSpPr>
+          <p:cNvPr id="5" name="Shape 3"/>
+          <p:cNvSpPr/>
+          <p:nvPr/>
+        </p:nvSpPr>
+        <p:spPr>
+          <a:xfrm>
+            <a:off x="640080" y="3017520"/>
             <a:ext cx="2679192" cy="2926080"/>
           </a:xfrm>
           <a:prstGeom prst="rect">
@@ -8951,13 +13799,13 @@
       </p:sp>
       <p:sp>
         <p:nvSpPr>
-          <p:cNvPr id="12" name="Shape 9"/>
-          <p:cNvSpPr/>
-          <p:nvPr/>
-        </p:nvSpPr>
-        <p:spPr>
-          <a:xfrm>
-            <a:off x="3474720" y="3017520"/>
+          <p:cNvPr id="6" name="Shape 4"/>
+          <p:cNvSpPr/>
+          <p:nvPr/>
+        </p:nvSpPr>
+        <p:spPr>
+          <a:xfrm>
+            <a:off x="640080" y="3017520"/>
             <a:ext cx="82296" cy="2926080"/>
           </a:xfrm>
           <a:prstGeom prst="rect">
@@ -8971,13 +13819,13 @@
       </p:sp>
       <p:sp>
         <p:nvSpPr>
-          <p:cNvPr id="13" name="Shape 10"/>
-          <p:cNvSpPr/>
-          <p:nvPr/>
-        </p:nvSpPr>
-        <p:spPr>
-          <a:xfrm>
-            <a:off x="3749040" y="3310128"/>
+          <p:cNvPr id="7" name="Shape 5"/>
+          <p:cNvSpPr/>
+          <p:nvPr/>
+        </p:nvSpPr>
+        <p:spPr>
+          <a:xfrm>
+            <a:off x="914400" y="3310128"/>
             <a:ext cx="694944" cy="694944"/>
           </a:xfrm>
           <a:prstGeom prst="roundRect">
@@ -8993,21 +13841,21 @@
       </p:sp>
       <p:pic>
         <p:nvPicPr>
-          <p:cNvPr id="14" name="Image 1" descr="preencoded.png">    </p:cNvPr>
+          <p:cNvPr id="8" name="Image 0" descr="preencoded.png">    </p:cNvPr>
           <p:cNvPicPr>
             <a:picLocks noChangeAspect="1"/>
           </p:cNvPicPr>
           <p:nvPr/>
         </p:nvPicPr>
         <p:blipFill>
-          <a:blip r:embed="rId2"/>
+          <a:blip r:embed="rId1"/>
           <a:stretch>
             <a:fillRect/>
           </a:stretch>
         </p:blipFill>
         <p:spPr>
           <a:xfrm>
-            <a:off x="3929725" y="3490813"/>
+            <a:off x="1095085" y="3490813"/>
             <a:ext cx="333573" cy="333573"/>
           </a:xfrm>
           <a:prstGeom prst="rect">
@@ -9017,13 +13865,13 @@
       </p:pic>
       <p:sp>
         <p:nvSpPr>
-          <p:cNvPr id="15" name="Text 11"/>
-          <p:cNvSpPr/>
-          <p:nvPr/>
-        </p:nvSpPr>
-        <p:spPr>
-          <a:xfrm>
-            <a:off x="3749040" y="4114800"/>
+          <p:cNvPr id="9" name="Text 6"/>
+          <p:cNvSpPr/>
+          <p:nvPr/>
+        </p:nvSpPr>
+        <p:spPr>
+          <a:xfrm>
+            <a:off x="914400" y="4114800"/>
             <a:ext cx="2176272" cy="548640"/>
           </a:xfrm>
           <a:prstGeom prst="rect">
@@ -9048,7 +13896,7 @@
                 <a:ea typeface="Georgia" pitchFamily="34" charset="-122"/>
                 <a:cs typeface="Georgia" pitchFamily="34" charset="-120"/>
               </a:rPr>
-              <a:t>Návratnost</a:t>
+              <a:t>Roční SaaS licence</a:t>
             </a:r>
             <a:endParaRPr lang="en-US" sz="1500" dirty="0"/>
           </a:p>
@@ -9056,13 +13904,13 @@
       </p:sp>
       <p:sp>
         <p:nvSpPr>
-          <p:cNvPr id="16" name="Text 12"/>
-          <p:cNvSpPr/>
-          <p:nvPr/>
-        </p:nvSpPr>
-        <p:spPr>
-          <a:xfrm>
-            <a:off x="3749040" y="4645152"/>
+          <p:cNvPr id="10" name="Text 7"/>
+          <p:cNvSpPr/>
+          <p:nvPr/>
+        </p:nvSpPr>
+        <p:spPr>
+          <a:xfrm>
+            <a:off x="914400" y="4645152"/>
             <a:ext cx="2221992" cy="1234440"/>
           </a:xfrm>
           <a:prstGeom prst="rect">
@@ -9090,7 +13938,7 @@
                 <a:ea typeface="Calibri" pitchFamily="34" charset="-122"/>
                 <a:cs typeface="Calibri" pitchFamily="34" charset="-120"/>
               </a:rPr>
-              <a:t>Jedna chybně umístěná DC stanice = stovky tisíc až miliony Kč. VoltPlán ji zaplatí mnohonásobně.</a:t>
+              <a:t>Předplatné pro HMP / MČ / Operátora ICT za přístup + pravidelnou aktualizaci skóre.</a:t>
             </a:r>
             <a:endParaRPr lang="en-US" sz="1200" dirty="0"/>
           </a:p>
@@ -9098,13 +13946,13 @@
       </p:sp>
       <p:sp>
         <p:nvSpPr>
-          <p:cNvPr id="17" name="Shape 13"/>
-          <p:cNvSpPr/>
-          <p:nvPr/>
-        </p:nvSpPr>
-        <p:spPr>
-          <a:xfrm>
-            <a:off x="6309360" y="3017520"/>
+          <p:cNvPr id="11" name="Shape 8"/>
+          <p:cNvSpPr/>
+          <p:nvPr/>
+        </p:nvSpPr>
+        <p:spPr>
+          <a:xfrm>
+            <a:off x="3474720" y="3017520"/>
             <a:ext cx="2679192" cy="2926080"/>
           </a:xfrm>
           <a:prstGeom prst="rect">
@@ -9130,13 +13978,13 @@
       </p:sp>
       <p:sp>
         <p:nvSpPr>
-          <p:cNvPr id="18" name="Shape 14"/>
-          <p:cNvSpPr/>
-          <p:nvPr/>
-        </p:nvSpPr>
-        <p:spPr>
-          <a:xfrm>
-            <a:off x="6309360" y="3017520"/>
+          <p:cNvPr id="12" name="Shape 9"/>
+          <p:cNvSpPr/>
+          <p:nvPr/>
+        </p:nvSpPr>
+        <p:spPr>
+          <a:xfrm>
+            <a:off x="3474720" y="3017520"/>
             <a:ext cx="82296" cy="2926080"/>
           </a:xfrm>
           <a:prstGeom prst="rect">
@@ -9150,13 +13998,13 @@
       </p:sp>
       <p:sp>
         <p:nvSpPr>
-          <p:cNvPr id="19" name="Shape 15"/>
-          <p:cNvSpPr/>
-          <p:nvPr/>
-        </p:nvSpPr>
-        <p:spPr>
-          <a:xfrm>
-            <a:off x="6583680" y="3310128"/>
+          <p:cNvPr id="13" name="Shape 10"/>
+          <p:cNvSpPr/>
+          <p:nvPr/>
+        </p:nvSpPr>
+        <p:spPr>
+          <a:xfrm>
+            <a:off x="3749040" y="3310128"/>
             <a:ext cx="694944" cy="694944"/>
           </a:xfrm>
           <a:prstGeom prst="roundRect">
@@ -9172,21 +14020,21 @@
       </p:sp>
       <p:pic>
         <p:nvPicPr>
-          <p:cNvPr id="20" name="Image 2" descr="preencoded.png">    </p:cNvPr>
+          <p:cNvPr id="14" name="Image 1" descr="preencoded.png">    </p:cNvPr>
           <p:cNvPicPr>
             <a:picLocks noChangeAspect="1"/>
           </p:cNvPicPr>
           <p:nvPr/>
         </p:nvPicPr>
         <p:blipFill>
-          <a:blip r:embed="rId3"/>
+          <a:blip r:embed="rId2"/>
           <a:stretch>
             <a:fillRect/>
           </a:stretch>
         </p:blipFill>
         <p:spPr>
           <a:xfrm>
-            <a:off x="6764365" y="3490813"/>
+            <a:off x="3929725" y="3490813"/>
             <a:ext cx="333573" cy="333573"/>
           </a:xfrm>
           <a:prstGeom prst="rect">
@@ -9196,13 +14044,13 @@
       </p:pic>
       <p:sp>
         <p:nvSpPr>
-          <p:cNvPr id="21" name="Text 16"/>
-          <p:cNvSpPr/>
-          <p:nvPr/>
-        </p:nvSpPr>
-        <p:spPr>
-          <a:xfrm>
-            <a:off x="6583680" y="4114800"/>
+          <p:cNvPr id="15" name="Text 11"/>
+          <p:cNvSpPr/>
+          <p:nvPr/>
+        </p:nvSpPr>
+        <p:spPr>
+          <a:xfrm>
+            <a:off x="3749040" y="4114800"/>
             <a:ext cx="2176272" cy="548640"/>
           </a:xfrm>
           <a:prstGeom prst="rect">
@@ -9227,7 +14075,7 @@
                 <a:ea typeface="Georgia" pitchFamily="34" charset="-122"/>
                 <a:cs typeface="Georgia" pitchFamily="34" charset="-120"/>
               </a:rPr>
-              <a:t>Datová smyčka</a:t>
+              <a:t>Návratnost</a:t>
             </a:r>
             <a:endParaRPr lang="en-US" sz="1500" dirty="0"/>
           </a:p>
@@ -9235,13 +14083,13 @@
       </p:sp>
       <p:sp>
         <p:nvSpPr>
-          <p:cNvPr id="22" name="Text 17"/>
-          <p:cNvSpPr/>
-          <p:nvPr/>
-        </p:nvSpPr>
-        <p:spPr>
-          <a:xfrm>
-            <a:off x="6583680" y="4645152"/>
+          <p:cNvPr id="16" name="Text 12"/>
+          <p:cNvSpPr/>
+          <p:nvPr/>
+        </p:nvSpPr>
+        <p:spPr>
+          <a:xfrm>
+            <a:off x="3749040" y="4645152"/>
             <a:ext cx="2221992" cy="1234440"/>
           </a:xfrm>
           <a:prstGeom prst="rect">
@@ -9269,7 +14117,7 @@
                 <a:ea typeface="Calibri" pitchFamily="34" charset="-122"/>
                 <a:cs typeface="Calibri" pitchFamily="34" charset="-120"/>
               </a:rPr>
-              <a:t>Reálné využití stanic teče zpět do modelu → predikce se v čase zpřesňuje. Služba žije.</a:t>
+              <a:t>Jedna chybně umístěná DC stanice = stovky tisíc až miliony Kč. VoltPlán ji zaplatí mnohonásobně.</a:t>
             </a:r>
             <a:endParaRPr lang="en-US" sz="1200" dirty="0"/>
           </a:p>
@@ -9277,13 +14125,13 @@
       </p:sp>
       <p:sp>
         <p:nvSpPr>
-          <p:cNvPr id="23" name="Shape 18"/>
-          <p:cNvSpPr/>
-          <p:nvPr/>
-        </p:nvSpPr>
-        <p:spPr>
-          <a:xfrm>
-            <a:off x="9144000" y="3017520"/>
+          <p:cNvPr id="17" name="Shape 13"/>
+          <p:cNvSpPr/>
+          <p:nvPr/>
+        </p:nvSpPr>
+        <p:spPr>
+          <a:xfrm>
+            <a:off x="6309360" y="3017520"/>
             <a:ext cx="2679192" cy="2926080"/>
           </a:xfrm>
           <a:prstGeom prst="rect">
@@ -9309,6 +14157,185 @@
       </p:sp>
       <p:sp>
         <p:nvSpPr>
+          <p:cNvPr id="18" name="Shape 14"/>
+          <p:cNvSpPr/>
+          <p:nvPr/>
+        </p:nvSpPr>
+        <p:spPr>
+          <a:xfrm>
+            <a:off x="6309360" y="3017520"/>
+            <a:ext cx="82296" cy="2926080"/>
+          </a:xfrm>
+          <a:prstGeom prst="rect">
+            <a:avLst/>
+          </a:prstGeom>
+          <a:solidFill>
+            <a:srgbClr val="19C37D"/>
+          </a:solidFill>
+          <a:ln/>
+        </p:spPr>
+      </p:sp>
+      <p:sp>
+        <p:nvSpPr>
+          <p:cNvPr id="19" name="Shape 15"/>
+          <p:cNvSpPr/>
+          <p:nvPr/>
+        </p:nvSpPr>
+        <p:spPr>
+          <a:xfrm>
+            <a:off x="6583680" y="3310128"/>
+            <a:ext cx="694944" cy="694944"/>
+          </a:xfrm>
+          <a:prstGeom prst="roundRect">
+            <a:avLst>
+              <a:gd name="adj" fmla="val 22000"/>
+            </a:avLst>
+          </a:prstGeom>
+          <a:solidFill>
+            <a:srgbClr val="0E1726"/>
+          </a:solidFill>
+          <a:ln/>
+        </p:spPr>
+      </p:sp>
+      <p:pic>
+        <p:nvPicPr>
+          <p:cNvPr id="20" name="Image 2" descr="preencoded.png">    </p:cNvPr>
+          <p:cNvPicPr>
+            <a:picLocks noChangeAspect="1"/>
+          </p:cNvPicPr>
+          <p:nvPr/>
+        </p:nvPicPr>
+        <p:blipFill>
+          <a:blip r:embed="rId3"/>
+          <a:stretch>
+            <a:fillRect/>
+          </a:stretch>
+        </p:blipFill>
+        <p:spPr>
+          <a:xfrm>
+            <a:off x="6764365" y="3490813"/>
+            <a:ext cx="333573" cy="333573"/>
+          </a:xfrm>
+          <a:prstGeom prst="rect">
+            <a:avLst/>
+          </a:prstGeom>
+        </p:spPr>
+      </p:pic>
+      <p:sp>
+        <p:nvSpPr>
+          <p:cNvPr id="21" name="Text 16"/>
+          <p:cNvSpPr/>
+          <p:nvPr/>
+        </p:nvSpPr>
+        <p:spPr>
+          <a:xfrm>
+            <a:off x="6583680" y="4114800"/>
+            <a:ext cx="2176272" cy="548640"/>
+          </a:xfrm>
+          <a:prstGeom prst="rect">
+            <a:avLst/>
+          </a:prstGeom>
+          <a:noFill/>
+          <a:ln/>
+        </p:spPr>
+        <p:txBody>
+          <a:bodyPr wrap="square" lIns="0" tIns="0" rIns="0" bIns="0" rtlCol="0" anchor="t"/>
+          <a:lstStyle/>
+          <a:p>
+            <a:pPr indent="0" marL="0">
+              <a:buNone/>
+            </a:pPr>
+            <a:r>
+              <a:rPr lang="en-US" sz="1500" b="1" dirty="0">
+                <a:solidFill>
+                  <a:srgbClr val="0E1726"/>
+                </a:solidFill>
+                <a:latin typeface="Georgia" pitchFamily="34" charset="0"/>
+                <a:ea typeface="Georgia" pitchFamily="34" charset="-122"/>
+                <a:cs typeface="Georgia" pitchFamily="34" charset="-120"/>
+              </a:rPr>
+              <a:t>Datová smyčka</a:t>
+            </a:r>
+            <a:endParaRPr lang="en-US" sz="1500" dirty="0"/>
+          </a:p>
+        </p:txBody>
+      </p:sp>
+      <p:sp>
+        <p:nvSpPr>
+          <p:cNvPr id="22" name="Text 17"/>
+          <p:cNvSpPr/>
+          <p:nvPr/>
+        </p:nvSpPr>
+        <p:spPr>
+          <a:xfrm>
+            <a:off x="6583680" y="4645152"/>
+            <a:ext cx="2221992" cy="1234440"/>
+          </a:xfrm>
+          <a:prstGeom prst="rect">
+            <a:avLst/>
+          </a:prstGeom>
+          <a:noFill/>
+          <a:ln/>
+        </p:spPr>
+        <p:txBody>
+          <a:bodyPr wrap="square" lIns="0" tIns="0" rIns="0" bIns="0" rtlCol="0" anchor="t"/>
+          <a:lstStyle/>
+          <a:p>
+            <a:pPr indent="0" marL="0">
+              <a:lnSpc>
+                <a:spcPct val="110000"/>
+              </a:lnSpc>
+              <a:buNone/>
+            </a:pPr>
+            <a:r>
+              <a:rPr lang="en-US" sz="1200" dirty="0">
+                <a:solidFill>
+                  <a:srgbClr val="55626F"/>
+                </a:solidFill>
+                <a:latin typeface="Calibri" pitchFamily="34" charset="0"/>
+                <a:ea typeface="Calibri" pitchFamily="34" charset="-122"/>
+                <a:cs typeface="Calibri" pitchFamily="34" charset="-120"/>
+              </a:rPr>
+              <a:t>Reálné využití stanic teče zpět do modelu → predikce se v čase zpřesňuje. Služba žije.</a:t>
+            </a:r>
+            <a:endParaRPr lang="en-US" sz="1200" dirty="0"/>
+          </a:p>
+        </p:txBody>
+      </p:sp>
+      <p:sp>
+        <p:nvSpPr>
+          <p:cNvPr id="23" name="Shape 18"/>
+          <p:cNvSpPr/>
+          <p:nvPr/>
+        </p:nvSpPr>
+        <p:spPr>
+          <a:xfrm>
+            <a:off x="9144000" y="3017520"/>
+            <a:ext cx="2679192" cy="2926080"/>
+          </a:xfrm>
+          <a:prstGeom prst="rect">
+            <a:avLst/>
+          </a:prstGeom>
+          <a:solidFill>
+            <a:srgbClr val="FFFFFF"/>
+          </a:solidFill>
+          <a:ln w="12700">
+            <a:solidFill>
+              <a:srgbClr val="E1E8EF"/>
+            </a:solidFill>
+            <a:prstDash val="solid"/>
+          </a:ln>
+          <a:effectLst>
+            <a:outerShdw sx="100000" sy="100000" kx="0" ky="0" algn="bl" rotWithShape="0" blurRad="76200" dist="25400" dir="5400000">
+              <a:srgbClr val="0E1726">
+                <a:alpha val="10000"/>
+              </a:srgbClr>
+            </a:outerShdw>
+          </a:effectLst>
+        </p:spPr>
+      </p:sp>
+      <p:sp>
+        <p:nvSpPr>
           <p:cNvPr id="24" name="Shape 19"/>
           <p:cNvSpPr/>
           <p:nvPr/>
@@ -9540,7 +14567,7 @@
                 <a:ea typeface="Calibri" pitchFamily="34" charset="-122"/>
                 <a:cs typeface="Calibri" pitchFamily="34" charset="-120"/>
               </a:rPr>
-              <a:t>07 / 10</a:t>
+              <a:t>08 / 12</a:t>
             </a:r>
             <a:endParaRPr lang="en-US" sz="1050" dirty="0"/>
           </a:p>
@@ -9554,9 +14581,9 @@
 </p:sld>
 </file>
 
-<file path=ppt/slides/slide8.xml><?xml version="1.0" encoding="utf-8"?>
+<file path=ppt/slides/slide9.xml><?xml version="1.0" encoding="utf-8"?>
 <p:sld xmlns:a="http://schemas.openxmlformats.org/drawingml/2006/main" xmlns:r="http://schemas.openxmlformats.org/officeDocument/2006/relationships" xmlns:p="http://schemas.openxmlformats.org/presentationml/2006/main">
-  <p:cSld name="Slide 8">
+  <p:cSld name="Slide 9">
     <p:bg>
       <p:bgPr>
         <a:solidFill>
@@ -10527,1001 +15554,7 @@
                 <a:ea typeface="Calibri" pitchFamily="34" charset="-122"/>
                 <a:cs typeface="Calibri" pitchFamily="34" charset="-120"/>
               </a:rPr>
-              <a:t>08 / 10</a:t>
-            </a:r>
-            <a:endParaRPr lang="en-US" sz="1050" dirty="0"/>
-          </a:p>
-        </p:txBody>
-      </p:sp>
-    </p:spTree>
-  </p:cSld>
-  <p:clrMapOvr>
-    <a:masterClrMapping/>
-  </p:clrMapOvr>
-</p:sld>
-</file>
-
-<file path=ppt/slides/slide9.xml><?xml version="1.0" encoding="utf-8"?>
-<p:sld xmlns:a="http://schemas.openxmlformats.org/drawingml/2006/main" xmlns:r="http://schemas.openxmlformats.org/officeDocument/2006/relationships" xmlns:p="http://schemas.openxmlformats.org/presentationml/2006/main">
-  <p:cSld name="Slide 9">
-    <p:bg>
-      <p:bgPr>
-        <a:solidFill>
-          <a:srgbClr val="F3F6F9"/>
-        </a:solidFill>
-      </p:bgPr>
-    </p:bg>
-    <p:spTree>
-      <p:nvGrpSpPr>
-        <p:cNvPr id="1" name=""/>
-        <p:cNvGrpSpPr/>
-        <p:nvPr/>
-      </p:nvGrpSpPr>
-      <p:grpSpPr>
-        <a:xfrm>
-          <a:off x="0" y="0"/>
-          <a:ext cx="0" cy="0"/>
-          <a:chOff x="0" y="0"/>
-          <a:chExt cx="0" cy="0"/>
-        </a:xfrm>
-      </p:grpSpPr>
-      <p:sp>
-        <p:nvSpPr>
-          <p:cNvPr id="2" name="Text 0"/>
-          <p:cNvSpPr/>
-          <p:nvPr/>
-        </p:nvSpPr>
-        <p:spPr>
-          <a:xfrm>
-            <a:off x="640080" y="502920"/>
-            <a:ext cx="10058400" cy="274320"/>
-          </a:xfrm>
-          <a:prstGeom prst="rect">
-            <a:avLst/>
-          </a:prstGeom>
-          <a:noFill/>
-          <a:ln/>
-        </p:spPr>
-        <p:txBody>
-          <a:bodyPr wrap="square" lIns="0" tIns="0" rIns="0" bIns="0" rtlCol="0" anchor="ctr"/>
-          <a:lstStyle/>
-          <a:p>
-            <a:pPr algn="l" indent="0" marL="0">
-              <a:buNone/>
-            </a:pPr>
-            <a:r>
-              <a:rPr lang="en-US" sz="1200" b="1" spc="300" kern="0" dirty="0">
-                <a:solidFill>
-                  <a:srgbClr val="19C37D"/>
-                </a:solidFill>
-                <a:latin typeface="Calibri" pitchFamily="34" charset="0"/>
-                <a:ea typeface="Calibri" pitchFamily="34" charset="-122"/>
-                <a:cs typeface="Calibri" pitchFamily="34" charset="-120"/>
-              </a:rPr>
-              <a:t>ETIKA &amp; ODPOVĚDNOST</a:t>
-            </a:r>
-            <a:endParaRPr lang="en-US" sz="1200" dirty="0"/>
-          </a:p>
-        </p:txBody>
-      </p:sp>
-      <p:sp>
-        <p:nvSpPr>
-          <p:cNvPr id="3" name="Text 1"/>
-          <p:cNvSpPr/>
-          <p:nvPr/>
-        </p:nvSpPr>
-        <p:spPr>
-          <a:xfrm>
-            <a:off x="640080" y="795528"/>
-            <a:ext cx="8686800" cy="1005840"/>
-          </a:xfrm>
-          <a:prstGeom prst="rect">
-            <a:avLst/>
-          </a:prstGeom>
-          <a:noFill/>
-          <a:ln/>
-        </p:spPr>
-        <p:txBody>
-          <a:bodyPr wrap="square" lIns="0" tIns="0" rIns="0" bIns="0" rtlCol="0" anchor="t"/>
-          <a:lstStyle/>
-          <a:p>
-            <a:pPr algn="l" indent="0" marL="0">
-              <a:lnSpc>
-                <a:spcPct val="102000"/>
-              </a:lnSpc>
-              <a:buNone/>
-            </a:pPr>
-            <a:r>
-              <a:rPr lang="en-US" sz="3100" b="1" dirty="0">
-                <a:solidFill>
-                  <a:srgbClr val="0E1726"/>
-                </a:solidFill>
-                <a:latin typeface="Georgia" pitchFamily="34" charset="0"/>
-                <a:ea typeface="Georgia" pitchFamily="34" charset="-122"/>
-                <a:cs typeface="Georgia" pitchFamily="34" charset="-120"/>
-              </a:rPr>
-              <a:t>Čtyři rizika, která bereme vážně</a:t>
-            </a:r>
-            <a:endParaRPr lang="en-US" sz="3100" dirty="0"/>
-          </a:p>
-          <a:p>
-            <a:pPr algn="l" indent="0" marL="0">
-              <a:lnSpc>
-                <a:spcPct val="102000"/>
-              </a:lnSpc>
-              <a:buNone/>
-            </a:pPr>
-            <a:r>
-              <a:rPr lang="en-US" sz="3100" b="1" dirty="0">
-                <a:solidFill>
-                  <a:srgbClr val="0E1726"/>
-                </a:solidFill>
-                <a:latin typeface="Georgia" pitchFamily="34" charset="0"/>
-                <a:ea typeface="Georgia" pitchFamily="34" charset="-122"/>
-                <a:cs typeface="Georgia" pitchFamily="34" charset="-120"/>
-              </a:rPr>
-              <a:t>— ne dodatek, ale součást návrhu.</a:t>
-            </a:r>
-            <a:endParaRPr lang="en-US" sz="3100" dirty="0"/>
-          </a:p>
-        </p:txBody>
-      </p:sp>
-      <p:sp>
-        <p:nvSpPr>
-          <p:cNvPr id="4" name="Shape 2"/>
-          <p:cNvSpPr/>
-          <p:nvPr/>
-        </p:nvSpPr>
-        <p:spPr>
-          <a:xfrm>
-            <a:off x="640080" y="2606040"/>
-            <a:ext cx="5349240" cy="1417320"/>
-          </a:xfrm>
-          <a:prstGeom prst="rect">
-            <a:avLst/>
-          </a:prstGeom>
-          <a:solidFill>
-            <a:srgbClr val="FFFFFF"/>
-          </a:solidFill>
-          <a:ln w="12700">
-            <a:solidFill>
-              <a:srgbClr val="E1E8EF"/>
-            </a:solidFill>
-            <a:prstDash val="solid"/>
-          </a:ln>
-          <a:effectLst>
-            <a:outerShdw sx="100000" sy="100000" kx="0" ky="0" algn="bl" rotWithShape="0" blurRad="76200" dist="25400" dir="5400000">
-              <a:srgbClr val="0E1726">
-                <a:alpha val="10000"/>
-              </a:srgbClr>
-            </a:outerShdw>
-          </a:effectLst>
-        </p:spPr>
-      </p:sp>
-      <p:sp>
-        <p:nvSpPr>
-          <p:cNvPr id="5" name="Shape 3"/>
-          <p:cNvSpPr/>
-          <p:nvPr/>
-        </p:nvSpPr>
-        <p:spPr>
-          <a:xfrm>
-            <a:off x="640080" y="2606040"/>
-            <a:ext cx="91440" cy="1417320"/>
-          </a:xfrm>
-          <a:prstGeom prst="rect">
-            <a:avLst/>
-          </a:prstGeom>
-          <a:solidFill>
-            <a:srgbClr val="19C37D"/>
-          </a:solidFill>
-          <a:ln/>
-        </p:spPr>
-      </p:sp>
-      <p:sp>
-        <p:nvSpPr>
-          <p:cNvPr id="6" name="Shape 4"/>
-          <p:cNvSpPr/>
-          <p:nvPr/>
-        </p:nvSpPr>
-        <p:spPr>
-          <a:xfrm>
-            <a:off x="914400" y="2898648"/>
-            <a:ext cx="713232" cy="713232"/>
-          </a:xfrm>
-          <a:prstGeom prst="roundRect">
-            <a:avLst>
-              <a:gd name="adj" fmla="val 22000"/>
-            </a:avLst>
-          </a:prstGeom>
-          <a:solidFill>
-            <a:srgbClr val="0E1726"/>
-          </a:solidFill>
-          <a:ln/>
-        </p:spPr>
-      </p:sp>
-      <p:pic>
-        <p:nvPicPr>
-          <p:cNvPr id="7" name="Image 0" descr="preencoded.png">    </p:cNvPr>
-          <p:cNvPicPr>
-            <a:picLocks noChangeAspect="1"/>
-          </p:cNvPicPr>
-          <p:nvPr/>
-        </p:nvPicPr>
-        <p:blipFill>
-          <a:blip r:embed="rId1"/>
-          <a:stretch>
-            <a:fillRect/>
-          </a:stretch>
-        </p:blipFill>
-        <p:spPr>
-          <a:xfrm>
-            <a:off x="1099840" y="3084088"/>
-            <a:ext cx="342351" cy="342351"/>
-          </a:xfrm>
-          <a:prstGeom prst="rect">
-            <a:avLst/>
-          </a:prstGeom>
-        </p:spPr>
-      </p:pic>
-      <p:sp>
-        <p:nvSpPr>
-          <p:cNvPr id="8" name="Text 5"/>
-          <p:cNvSpPr/>
-          <p:nvPr/>
-        </p:nvSpPr>
-        <p:spPr>
-          <a:xfrm>
-            <a:off x="1847088" y="2825496"/>
-            <a:ext cx="3886200" cy="384048"/>
-          </a:xfrm>
-          <a:prstGeom prst="rect">
-            <a:avLst/>
-          </a:prstGeom>
-          <a:noFill/>
-          <a:ln/>
-        </p:spPr>
-        <p:txBody>
-          <a:bodyPr wrap="square" lIns="0" tIns="0" rIns="0" bIns="0" rtlCol="0" anchor="ctr"/>
-          <a:lstStyle/>
-          <a:p>
-            <a:pPr indent="0" marL="0">
-              <a:buNone/>
-            </a:pPr>
-            <a:r>
-              <a:rPr lang="en-US" sz="1550" b="1" dirty="0">
-                <a:solidFill>
-                  <a:srgbClr val="0E1726"/>
-                </a:solidFill>
-                <a:latin typeface="Georgia" pitchFamily="34" charset="0"/>
-                <a:ea typeface="Georgia" pitchFamily="34" charset="-122"/>
-                <a:cs typeface="Georgia" pitchFamily="34" charset="-120"/>
-              </a:rPr>
-              <a:t>Chybná predikce &amp; odpovědnost</a:t>
-            </a:r>
-            <a:endParaRPr lang="en-US" sz="1550" dirty="0"/>
-          </a:p>
-        </p:txBody>
-      </p:sp>
-      <p:sp>
-        <p:nvSpPr>
-          <p:cNvPr id="9" name="Text 6"/>
-          <p:cNvSpPr/>
-          <p:nvPr/>
-        </p:nvSpPr>
-        <p:spPr>
-          <a:xfrm>
-            <a:off x="1847088" y="3227832"/>
-            <a:ext cx="3931920" cy="731520"/>
-          </a:xfrm>
-          <a:prstGeom prst="rect">
-            <a:avLst/>
-          </a:prstGeom>
-          <a:noFill/>
-          <a:ln/>
-        </p:spPr>
-        <p:txBody>
-          <a:bodyPr wrap="square" lIns="0" tIns="0" rIns="0" bIns="0" rtlCol="0" anchor="t"/>
-          <a:lstStyle/>
-          <a:p>
-            <a:pPr indent="0" marL="0">
-              <a:lnSpc>
-                <a:spcPct val="106000"/>
-              </a:lnSpc>
-              <a:buNone/>
-            </a:pPr>
-            <a:r>
-              <a:rPr lang="en-US" sz="1150" dirty="0">
-                <a:solidFill>
-                  <a:srgbClr val="55626F"/>
-                </a:solidFill>
-                <a:latin typeface="Calibri" pitchFamily="34" charset="0"/>
-                <a:ea typeface="Calibri" pitchFamily="34" charset="-122"/>
-                <a:cs typeface="Calibri" pitchFamily="34" charset="-120"/>
-              </a:rPr>
-              <a:t>Model je podpora rozhodnutí, ne autopilot. Doporučení = vstup pro úředníka, finální slovo má člověk.</a:t>
-            </a:r>
-            <a:endParaRPr lang="en-US" sz="1150" dirty="0"/>
-          </a:p>
-        </p:txBody>
-      </p:sp>
-      <p:sp>
-        <p:nvSpPr>
-          <p:cNvPr id="10" name="Shape 7"/>
-          <p:cNvSpPr/>
-          <p:nvPr/>
-        </p:nvSpPr>
-        <p:spPr>
-          <a:xfrm>
-            <a:off x="6172200" y="2606040"/>
-            <a:ext cx="5349240" cy="1417320"/>
-          </a:xfrm>
-          <a:prstGeom prst="rect">
-            <a:avLst/>
-          </a:prstGeom>
-          <a:solidFill>
-            <a:srgbClr val="FFFFFF"/>
-          </a:solidFill>
-          <a:ln w="12700">
-            <a:solidFill>
-              <a:srgbClr val="E1E8EF"/>
-            </a:solidFill>
-            <a:prstDash val="solid"/>
-          </a:ln>
-          <a:effectLst>
-            <a:outerShdw sx="100000" sy="100000" kx="0" ky="0" algn="bl" rotWithShape="0" blurRad="76200" dist="25400" dir="5400000">
-              <a:srgbClr val="0E1726">
-                <a:alpha val="10000"/>
-              </a:srgbClr>
-            </a:outerShdw>
-          </a:effectLst>
-        </p:spPr>
-      </p:sp>
-      <p:sp>
-        <p:nvSpPr>
-          <p:cNvPr id="11" name="Shape 8"/>
-          <p:cNvSpPr/>
-          <p:nvPr/>
-        </p:nvSpPr>
-        <p:spPr>
-          <a:xfrm>
-            <a:off x="6172200" y="2606040"/>
-            <a:ext cx="91440" cy="1417320"/>
-          </a:xfrm>
-          <a:prstGeom prst="rect">
-            <a:avLst/>
-          </a:prstGeom>
-          <a:solidFill>
-            <a:srgbClr val="19C37D"/>
-          </a:solidFill>
-          <a:ln/>
-        </p:spPr>
-      </p:sp>
-      <p:sp>
-        <p:nvSpPr>
-          <p:cNvPr id="12" name="Shape 9"/>
-          <p:cNvSpPr/>
-          <p:nvPr/>
-        </p:nvSpPr>
-        <p:spPr>
-          <a:xfrm>
-            <a:off x="6446520" y="2898648"/>
-            <a:ext cx="713232" cy="713232"/>
-          </a:xfrm>
-          <a:prstGeom prst="roundRect">
-            <a:avLst>
-              <a:gd name="adj" fmla="val 22000"/>
-            </a:avLst>
-          </a:prstGeom>
-          <a:solidFill>
-            <a:srgbClr val="0E1726"/>
-          </a:solidFill>
-          <a:ln/>
-        </p:spPr>
-      </p:sp>
-      <p:pic>
-        <p:nvPicPr>
-          <p:cNvPr id="13" name="Image 1" descr="preencoded.png">    </p:cNvPr>
-          <p:cNvPicPr>
-            <a:picLocks noChangeAspect="1"/>
-          </p:cNvPicPr>
-          <p:nvPr/>
-        </p:nvPicPr>
-        <p:blipFill>
-          <a:blip r:embed="rId2"/>
-          <a:stretch>
-            <a:fillRect/>
-          </a:stretch>
-        </p:blipFill>
-        <p:spPr>
-          <a:xfrm>
-            <a:off x="6631960" y="3084088"/>
-            <a:ext cx="342351" cy="342351"/>
-          </a:xfrm>
-          <a:prstGeom prst="rect">
-            <a:avLst/>
-          </a:prstGeom>
-        </p:spPr>
-      </p:pic>
-      <p:sp>
-        <p:nvSpPr>
-          <p:cNvPr id="14" name="Text 10"/>
-          <p:cNvSpPr/>
-          <p:nvPr/>
-        </p:nvSpPr>
-        <p:spPr>
-          <a:xfrm>
-            <a:off x="7379208" y="2825496"/>
-            <a:ext cx="3886200" cy="384048"/>
-          </a:xfrm>
-          <a:prstGeom prst="rect">
-            <a:avLst/>
-          </a:prstGeom>
-          <a:noFill/>
-          <a:ln/>
-        </p:spPr>
-        <p:txBody>
-          <a:bodyPr wrap="square" lIns="0" tIns="0" rIns="0" bIns="0" rtlCol="0" anchor="ctr"/>
-          <a:lstStyle/>
-          <a:p>
-            <a:pPr indent="0" marL="0">
-              <a:buNone/>
-            </a:pPr>
-            <a:r>
-              <a:rPr lang="en-US" sz="1550" b="1" dirty="0">
-                <a:solidFill>
-                  <a:srgbClr val="0E1726"/>
-                </a:solidFill>
-                <a:latin typeface="Georgia" pitchFamily="34" charset="0"/>
-                <a:ea typeface="Georgia" pitchFamily="34" charset="-122"/>
-                <a:cs typeface="Georgia" pitchFamily="34" charset="-120"/>
-              </a:rPr>
-              <a:t>Soukromí</a:t>
-            </a:r>
-            <a:endParaRPr lang="en-US" sz="1550" dirty="0"/>
-          </a:p>
-        </p:txBody>
-      </p:sp>
-      <p:sp>
-        <p:nvSpPr>
-          <p:cNvPr id="15" name="Text 11"/>
-          <p:cNvSpPr/>
-          <p:nvPr/>
-        </p:nvSpPr>
-        <p:spPr>
-          <a:xfrm>
-            <a:off x="7379208" y="3227832"/>
-            <a:ext cx="3931920" cy="731520"/>
-          </a:xfrm>
-          <a:prstGeom prst="rect">
-            <a:avLst/>
-          </a:prstGeom>
-          <a:noFill/>
-          <a:ln/>
-        </p:spPr>
-        <p:txBody>
-          <a:bodyPr wrap="square" lIns="0" tIns="0" rIns="0" bIns="0" rtlCol="0" anchor="t"/>
-          <a:lstStyle/>
-          <a:p>
-            <a:pPr indent="0" marL="0">
-              <a:lnSpc>
-                <a:spcPct val="106000"/>
-              </a:lnSpc>
-              <a:buNone/>
-            </a:pPr>
-            <a:r>
-              <a:rPr lang="en-US" sz="1150" dirty="0">
-                <a:solidFill>
-                  <a:srgbClr val="55626F"/>
-                </a:solidFill>
-                <a:latin typeface="Calibri" pitchFamily="34" charset="0"/>
-                <a:ea typeface="Calibri" pitchFamily="34" charset="-122"/>
-                <a:cs typeface="Calibri" pitchFamily="34" charset="-120"/>
-              </a:rPr>
-              <a:t>Pracujeme s agregovanými daty na úrovni zón a sítě — žádné sledování pohybu jednotlivců.</a:t>
-            </a:r>
-            <a:endParaRPr lang="en-US" sz="1150" dirty="0"/>
-          </a:p>
-        </p:txBody>
-      </p:sp>
-      <p:sp>
-        <p:nvSpPr>
-          <p:cNvPr id="16" name="Shape 12"/>
-          <p:cNvSpPr/>
-          <p:nvPr/>
-        </p:nvSpPr>
-        <p:spPr>
-          <a:xfrm>
-            <a:off x="640080" y="4206240"/>
-            <a:ext cx="5349240" cy="1417320"/>
-          </a:xfrm>
-          <a:prstGeom prst="rect">
-            <a:avLst/>
-          </a:prstGeom>
-          <a:solidFill>
-            <a:srgbClr val="FFFFFF"/>
-          </a:solidFill>
-          <a:ln w="12700">
-            <a:solidFill>
-              <a:srgbClr val="E1E8EF"/>
-            </a:solidFill>
-            <a:prstDash val="solid"/>
-          </a:ln>
-          <a:effectLst>
-            <a:outerShdw sx="100000" sy="100000" kx="0" ky="0" algn="bl" rotWithShape="0" blurRad="76200" dist="25400" dir="5400000">
-              <a:srgbClr val="0E1726">
-                <a:alpha val="10000"/>
-              </a:srgbClr>
-            </a:outerShdw>
-          </a:effectLst>
-        </p:spPr>
-      </p:sp>
-      <p:sp>
-        <p:nvSpPr>
-          <p:cNvPr id="17" name="Shape 13"/>
-          <p:cNvSpPr/>
-          <p:nvPr/>
-        </p:nvSpPr>
-        <p:spPr>
-          <a:xfrm>
-            <a:off x="640080" y="4206240"/>
-            <a:ext cx="91440" cy="1417320"/>
-          </a:xfrm>
-          <a:prstGeom prst="rect">
-            <a:avLst/>
-          </a:prstGeom>
-          <a:solidFill>
-            <a:srgbClr val="19C37D"/>
-          </a:solidFill>
-          <a:ln/>
-        </p:spPr>
-      </p:sp>
-      <p:sp>
-        <p:nvSpPr>
-          <p:cNvPr id="18" name="Shape 14"/>
-          <p:cNvSpPr/>
-          <p:nvPr/>
-        </p:nvSpPr>
-        <p:spPr>
-          <a:xfrm>
-            <a:off x="914400" y="4498848"/>
-            <a:ext cx="713232" cy="713232"/>
-          </a:xfrm>
-          <a:prstGeom prst="roundRect">
-            <a:avLst>
-              <a:gd name="adj" fmla="val 22000"/>
-            </a:avLst>
-          </a:prstGeom>
-          <a:solidFill>
-            <a:srgbClr val="0E1726"/>
-          </a:solidFill>
-          <a:ln/>
-        </p:spPr>
-      </p:sp>
-      <p:pic>
-        <p:nvPicPr>
-          <p:cNvPr id="19" name="Image 2" descr="preencoded.png">    </p:cNvPr>
-          <p:cNvPicPr>
-            <a:picLocks noChangeAspect="1"/>
-          </p:cNvPicPr>
-          <p:nvPr/>
-        </p:nvPicPr>
-        <p:blipFill>
-          <a:blip r:embed="rId3"/>
-          <a:stretch>
-            <a:fillRect/>
-          </a:stretch>
-        </p:blipFill>
-        <p:spPr>
-          <a:xfrm>
-            <a:off x="1099840" y="4684288"/>
-            <a:ext cx="342351" cy="342351"/>
-          </a:xfrm>
-          <a:prstGeom prst="rect">
-            <a:avLst/>
-          </a:prstGeom>
-        </p:spPr>
-      </p:pic>
-      <p:sp>
-        <p:nvSpPr>
-          <p:cNvPr id="20" name="Text 15"/>
-          <p:cNvSpPr/>
-          <p:nvPr/>
-        </p:nvSpPr>
-        <p:spPr>
-          <a:xfrm>
-            <a:off x="1847088" y="4425696"/>
-            <a:ext cx="3886200" cy="384048"/>
-          </a:xfrm>
-          <a:prstGeom prst="rect">
-            <a:avLst/>
-          </a:prstGeom>
-          <a:noFill/>
-          <a:ln/>
-        </p:spPr>
-        <p:txBody>
-          <a:bodyPr wrap="square" lIns="0" tIns="0" rIns="0" bIns="0" rtlCol="0" anchor="ctr"/>
-          <a:lstStyle/>
-          <a:p>
-            <a:pPr indent="0" marL="0">
-              <a:buNone/>
-            </a:pPr>
-            <a:r>
-              <a:rPr lang="en-US" sz="1550" b="1" dirty="0">
-                <a:solidFill>
-                  <a:srgbClr val="0E1726"/>
-                </a:solidFill>
-                <a:latin typeface="Georgia" pitchFamily="34" charset="0"/>
-                <a:ea typeface="Georgia" pitchFamily="34" charset="-122"/>
-                <a:cs typeface="Georgia" pitchFamily="34" charset="-120"/>
-              </a:rPr>
-              <a:t>Spravedlnost &amp; cold-start</a:t>
-            </a:r>
-            <a:endParaRPr lang="en-US" sz="1550" dirty="0"/>
-          </a:p>
-        </p:txBody>
-      </p:sp>
-      <p:sp>
-        <p:nvSpPr>
-          <p:cNvPr id="21" name="Text 16"/>
-          <p:cNvSpPr/>
-          <p:nvPr/>
-        </p:nvSpPr>
-        <p:spPr>
-          <a:xfrm>
-            <a:off x="1847088" y="4828032"/>
-            <a:ext cx="3931920" cy="731520"/>
-          </a:xfrm>
-          <a:prstGeom prst="rect">
-            <a:avLst/>
-          </a:prstGeom>
-          <a:noFill/>
-          <a:ln/>
-        </p:spPr>
-        <p:txBody>
-          <a:bodyPr wrap="square" lIns="0" tIns="0" rIns="0" bIns="0" rtlCol="0" anchor="t"/>
-          <a:lstStyle/>
-          <a:p>
-            <a:pPr indent="0" marL="0">
-              <a:lnSpc>
-                <a:spcPct val="106000"/>
-              </a:lnSpc>
-              <a:buNone/>
-            </a:pPr>
-            <a:r>
-              <a:rPr lang="en-US" sz="1150" dirty="0">
-                <a:solidFill>
-                  <a:srgbClr val="55626F"/>
-                </a:solidFill>
-                <a:latin typeface="Calibri" pitchFamily="34" charset="0"/>
-                <a:ea typeface="Calibri" pitchFamily="34" charset="-122"/>
-                <a:cs typeface="Calibri" pitchFamily="34" charset="-120"/>
-              </a:rPr>
-              <a:t>equity_weight chrání okrajové a chudší čtvrti před spirálou podinvestování. Férovost je přímo ve skóre.</a:t>
-            </a:r>
-            <a:endParaRPr lang="en-US" sz="1150" dirty="0"/>
-          </a:p>
-        </p:txBody>
-      </p:sp>
-      <p:sp>
-        <p:nvSpPr>
-          <p:cNvPr id="22" name="Shape 17"/>
-          <p:cNvSpPr/>
-          <p:nvPr/>
-        </p:nvSpPr>
-        <p:spPr>
-          <a:xfrm>
-            <a:off x="6172200" y="4206240"/>
-            <a:ext cx="5349240" cy="1417320"/>
-          </a:xfrm>
-          <a:prstGeom prst="rect">
-            <a:avLst/>
-          </a:prstGeom>
-          <a:solidFill>
-            <a:srgbClr val="FFFFFF"/>
-          </a:solidFill>
-          <a:ln w="12700">
-            <a:solidFill>
-              <a:srgbClr val="E1E8EF"/>
-            </a:solidFill>
-            <a:prstDash val="solid"/>
-          </a:ln>
-          <a:effectLst>
-            <a:outerShdw sx="100000" sy="100000" kx="0" ky="0" algn="bl" rotWithShape="0" blurRad="76200" dist="25400" dir="5400000">
-              <a:srgbClr val="0E1726">
-                <a:alpha val="10000"/>
-              </a:srgbClr>
-            </a:outerShdw>
-          </a:effectLst>
-        </p:spPr>
-      </p:sp>
-      <p:sp>
-        <p:nvSpPr>
-          <p:cNvPr id="23" name="Shape 18"/>
-          <p:cNvSpPr/>
-          <p:nvPr/>
-        </p:nvSpPr>
-        <p:spPr>
-          <a:xfrm>
-            <a:off x="6172200" y="4206240"/>
-            <a:ext cx="91440" cy="1417320"/>
-          </a:xfrm>
-          <a:prstGeom prst="rect">
-            <a:avLst/>
-          </a:prstGeom>
-          <a:solidFill>
-            <a:srgbClr val="19C37D"/>
-          </a:solidFill>
-          <a:ln/>
-        </p:spPr>
-      </p:sp>
-      <p:sp>
-        <p:nvSpPr>
-          <p:cNvPr id="24" name="Shape 19"/>
-          <p:cNvSpPr/>
-          <p:nvPr/>
-        </p:nvSpPr>
-        <p:spPr>
-          <a:xfrm>
-            <a:off x="6446520" y="4498848"/>
-            <a:ext cx="713232" cy="713232"/>
-          </a:xfrm>
-          <a:prstGeom prst="roundRect">
-            <a:avLst>
-              <a:gd name="adj" fmla="val 22000"/>
-            </a:avLst>
-          </a:prstGeom>
-          <a:solidFill>
-            <a:srgbClr val="0E1726"/>
-          </a:solidFill>
-          <a:ln/>
-        </p:spPr>
-      </p:sp>
-      <p:pic>
-        <p:nvPicPr>
-          <p:cNvPr id="25" name="Image 3" descr="preencoded.png">    </p:cNvPr>
-          <p:cNvPicPr>
-            <a:picLocks noChangeAspect="1"/>
-          </p:cNvPicPr>
-          <p:nvPr/>
-        </p:nvPicPr>
-        <p:blipFill>
-          <a:blip r:embed="rId4"/>
-          <a:stretch>
-            <a:fillRect/>
-          </a:stretch>
-        </p:blipFill>
-        <p:spPr>
-          <a:xfrm>
-            <a:off x="6631960" y="4684288"/>
-            <a:ext cx="342351" cy="342351"/>
-          </a:xfrm>
-          <a:prstGeom prst="rect">
-            <a:avLst/>
-          </a:prstGeom>
-        </p:spPr>
-      </p:pic>
-      <p:sp>
-        <p:nvSpPr>
-          <p:cNvPr id="26" name="Text 20"/>
-          <p:cNvSpPr/>
-          <p:nvPr/>
-        </p:nvSpPr>
-        <p:spPr>
-          <a:xfrm>
-            <a:off x="7379208" y="4425696"/>
-            <a:ext cx="3886200" cy="384048"/>
-          </a:xfrm>
-          <a:prstGeom prst="rect">
-            <a:avLst/>
-          </a:prstGeom>
-          <a:noFill/>
-          <a:ln/>
-        </p:spPr>
-        <p:txBody>
-          <a:bodyPr wrap="square" lIns="0" tIns="0" rIns="0" bIns="0" rtlCol="0" anchor="ctr"/>
-          <a:lstStyle/>
-          <a:p>
-            <a:pPr indent="0" marL="0">
-              <a:buNone/>
-            </a:pPr>
-            <a:r>
-              <a:rPr lang="en-US" sz="1550" b="1" dirty="0">
-                <a:solidFill>
-                  <a:srgbClr val="0E1726"/>
-                </a:solidFill>
-                <a:latin typeface="Georgia" pitchFamily="34" charset="0"/>
-                <a:ea typeface="Georgia" pitchFamily="34" charset="-122"/>
-                <a:cs typeface="Georgia" pitchFamily="34" charset="-120"/>
-              </a:rPr>
-              <a:t>Komunikace nejistoty</a:t>
-            </a:r>
-            <a:endParaRPr lang="en-US" sz="1550" dirty="0"/>
-          </a:p>
-        </p:txBody>
-      </p:sp>
-      <p:sp>
-        <p:nvSpPr>
-          <p:cNvPr id="27" name="Text 21"/>
-          <p:cNvSpPr/>
-          <p:nvPr/>
-        </p:nvSpPr>
-        <p:spPr>
-          <a:xfrm>
-            <a:off x="7379208" y="4828032"/>
-            <a:ext cx="3931920" cy="731520"/>
-          </a:xfrm>
-          <a:prstGeom prst="rect">
-            <a:avLst/>
-          </a:prstGeom>
-          <a:noFill/>
-          <a:ln/>
-        </p:spPr>
-        <p:txBody>
-          <a:bodyPr wrap="square" lIns="0" tIns="0" rIns="0" bIns="0" rtlCol="0" anchor="t"/>
-          <a:lstStyle/>
-          <a:p>
-            <a:pPr indent="0" marL="0">
-              <a:lnSpc>
-                <a:spcPct val="106000"/>
-              </a:lnSpc>
-              <a:buNone/>
-            </a:pPr>
-            <a:r>
-              <a:rPr lang="en-US" sz="1150" dirty="0">
-                <a:solidFill>
-                  <a:srgbClr val="55626F"/>
-                </a:solidFill>
-                <a:latin typeface="Calibri" pitchFamily="34" charset="0"/>
-                <a:ea typeface="Calibri" pitchFamily="34" charset="-122"/>
-                <a:cs typeface="Calibri" pitchFamily="34" charset="-120"/>
-              </a:rPr>
-              <a:t>Predikce 2030 ukazujeme jako pásmo scénářů (konzervativní / střední / ambiciózní), ne jedno „zaručené“ číslo.</a:t>
-            </a:r>
-            <a:endParaRPr lang="en-US" sz="1150" dirty="0"/>
-          </a:p>
-        </p:txBody>
-      </p:sp>
-      <p:sp>
-        <p:nvSpPr>
-          <p:cNvPr id="28" name="Text 22"/>
-          <p:cNvSpPr/>
-          <p:nvPr/>
-        </p:nvSpPr>
-        <p:spPr>
-          <a:xfrm>
-            <a:off x="640080" y="5943600"/>
-            <a:ext cx="10881360" cy="457200"/>
-          </a:xfrm>
-          <a:prstGeom prst="rect">
-            <a:avLst/>
-          </a:prstGeom>
-          <a:noFill/>
-          <a:ln/>
-        </p:spPr>
-        <p:txBody>
-          <a:bodyPr wrap="square" lIns="0" tIns="0" rIns="0" bIns="0" rtlCol="0" anchor="ctr"/>
-          <a:lstStyle/>
-          <a:p>
-            <a:pPr algn="l" indent="0" marL="0">
-              <a:buNone/>
-            </a:pPr>
-            <a:r>
-              <a:rPr lang="en-US" sz="1300" b="1" i="1" dirty="0">
-                <a:solidFill>
-                  <a:srgbClr val="0E9E63"/>
-                </a:solidFill>
-                <a:latin typeface="Calibri" pitchFamily="34" charset="0"/>
-                <a:ea typeface="Calibri" pitchFamily="34" charset="-122"/>
-                <a:cs typeface="Calibri" pitchFamily="34" charset="-120"/>
-              </a:rPr>
-              <a:t>Cold-start skóruje 2× — </a:t>
-            </a:r>
-            <a:pPr algn="l" indent="0" marL="0">
-              <a:buNone/>
-            </a:pPr>
-            <a:r>
-              <a:rPr lang="en-US" sz="1300" i="1" dirty="0">
-                <a:solidFill>
-                  <a:srgbClr val="55626F"/>
-                </a:solidFill>
-                <a:latin typeface="Calibri" pitchFamily="34" charset="0"/>
-                <a:ea typeface="Calibri" pitchFamily="34" charset="-122"/>
-                <a:cs typeface="Calibri" pitchFamily="34" charset="-120"/>
-              </a:rPr>
-              <a:t>technicky (málo dat o okraji) i eticky (spravedlnost). U nás je to jeden a tentýž mechanismus.</a:t>
-            </a:r>
-            <a:endParaRPr lang="en-US" sz="1300" dirty="0"/>
-          </a:p>
-        </p:txBody>
-      </p:sp>
-      <p:sp>
-        <p:nvSpPr>
-          <p:cNvPr id="29" name="Text 23"/>
-          <p:cNvSpPr/>
-          <p:nvPr/>
-        </p:nvSpPr>
-        <p:spPr>
-          <a:xfrm>
-            <a:off x="457200" y="6473952"/>
-            <a:ext cx="5486400" cy="274320"/>
-          </a:xfrm>
-          <a:prstGeom prst="rect">
-            <a:avLst/>
-          </a:prstGeom>
-          <a:noFill/>
-          <a:ln/>
-        </p:spPr>
-        <p:txBody>
-          <a:bodyPr wrap="square" lIns="0" tIns="0" rIns="0" bIns="0" rtlCol="0" anchor="ctr"/>
-          <a:lstStyle/>
-          <a:p>
-            <a:pPr algn="l" indent="0" marL="0">
-              <a:buNone/>
-            </a:pPr>
-            <a:r>
-              <a:rPr lang="en-US" sz="1050" b="1" dirty="0">
-                <a:solidFill>
-                  <a:srgbClr val="0E1726"/>
-                </a:solidFill>
-                <a:latin typeface="Calibri" pitchFamily="34" charset="0"/>
-                <a:ea typeface="Calibri" pitchFamily="34" charset="-122"/>
-                <a:cs typeface="Calibri" pitchFamily="34" charset="-120"/>
-              </a:rPr>
-              <a:t>VoltPlán</a:t>
-            </a:r>
-            <a:pPr algn="l" indent="0" marL="0">
-              <a:buNone/>
-            </a:pPr>
-            <a:r>
-              <a:rPr lang="en-US" sz="1050" dirty="0">
-                <a:solidFill>
-                  <a:srgbClr val="55626F"/>
-                </a:solidFill>
-                <a:latin typeface="Calibri" pitchFamily="34" charset="0"/>
-                <a:ea typeface="Calibri" pitchFamily="34" charset="-122"/>
-                <a:cs typeface="Calibri" pitchFamily="34" charset="-120"/>
-              </a:rPr>
-              <a:t>  ·  AIO_PHA-02-PHA</a:t>
-            </a:r>
-            <a:endParaRPr lang="en-US" sz="1050" dirty="0"/>
-          </a:p>
-        </p:txBody>
-      </p:sp>
-      <p:sp>
-        <p:nvSpPr>
-          <p:cNvPr id="30" name="Text 24"/>
-          <p:cNvSpPr/>
-          <p:nvPr/>
-        </p:nvSpPr>
-        <p:spPr>
-          <a:xfrm>
-            <a:off x="10637215" y="6473952"/>
-            <a:ext cx="1097280" cy="274320"/>
-          </a:xfrm>
-          <a:prstGeom prst="rect">
-            <a:avLst/>
-          </a:prstGeom>
-          <a:noFill/>
-          <a:ln/>
-        </p:spPr>
-        <p:txBody>
-          <a:bodyPr wrap="square" lIns="0" tIns="0" rIns="0" bIns="0" rtlCol="0" anchor="ctr"/>
-          <a:lstStyle/>
-          <a:p>
-            <a:pPr algn="r" indent="0" marL="0">
-              <a:buNone/>
-            </a:pPr>
-            <a:r>
-              <a:rPr lang="en-US" sz="1050" dirty="0">
-                <a:solidFill>
-                  <a:srgbClr val="55626F"/>
-                </a:solidFill>
-                <a:latin typeface="Calibri" pitchFamily="34" charset="0"/>
-                <a:ea typeface="Calibri" pitchFamily="34" charset="-122"/>
-                <a:cs typeface="Calibri" pitchFamily="34" charset="-120"/>
-              </a:rPr>
-              <a:t>09 / 10</a:t>
+              <a:t>09 / 12</a:t>
             </a:r>
             <a:endParaRPr lang="en-US" sz="1050" dirty="0"/>
           </a:p>
